--- a/Togo_Numerique_Insights_v3.pptx
+++ b/Togo_Numerique_Insights_v3.pptx
@@ -4,6 +4,9 @@
   <p:sldMasterIdLst>
     <p:sldMasterId id="2147483648" r:id="rId1"/>
   </p:sldMasterIdLst>
+  <p:notesMasterIdLst>
+    <p:notesMasterId r:id="rId12"/>
+  </p:notesMasterIdLst>
   <p:sldIdLst>
     <p:sldId id="256" r:id="rId2"/>
     <p:sldId id="257" r:id="rId3"/>
@@ -16,9 +19,6 @@
     <p:sldId id="264" r:id="rId10"/>
     <p:sldId id="265" r:id="rId11"/>
   </p:sldIdLst>
-  <p:notesMasterIdLst>
-    <p:notesMasterId r:id="rId12"/>
-  </p:notesMasterIdLst>
   <p:sldSz cx="12192000" cy="6858000"/>
   <p:notesSz cx="6858000" cy="12192000"/>
   <p:defaultTextStyle>
@@ -113,18 +113,26 @@
       </a:defRPr>
     </a:lvl9pPr>
   </p:defaultTextStyle>
+  <p:extLst>
+    <p:ext uri="{EFAFB233-063F-42B5-8137-9DF3F51BA10A}">
+      <p15:sldGuideLst xmlns:p15="http://schemas.microsoft.com/office/powerpoint/2012/main"/>
+    </p:ext>
+  </p:extLst>
 </p:presentation>
 </file>
 
 <file path=ppt/charts/chart1.xml><?xml version="1.0" encoding="utf-8"?>
-<c:chartSpace xmlns:c="http://schemas.openxmlformats.org/drawingml/2006/chart" xmlns:a="http://schemas.openxmlformats.org/drawingml/2006/main" xmlns:r="http://schemas.openxmlformats.org/officeDocument/2006/relationships">
+<c:chartSpace xmlns:c="http://schemas.openxmlformats.org/drawingml/2006/chart" xmlns:a="http://schemas.openxmlformats.org/drawingml/2006/main" xmlns:r="http://schemas.openxmlformats.org/officeDocument/2006/relationships" xmlns:c16r2="http://schemas.microsoft.com/office/drawing/2015/06/chart">
   <c:date1904 val="0"/>
+  <c:lang val="fr-FR"/>
   <c:roundedCorners val="1"/>
+  <c:style val="2"/>
   <c:chart>
     <c:autoTitleDeleted val="1"/>
     <c:plotArea>
       <c:layout/>
       <c:lineChart>
+        <c:grouping val="standard"/>
         <c:varyColors val="0"/>
         <c:ser>
           <c:idx val="0"/>
@@ -141,9 +149,6 @@
             </c:strRef>
           </c:tx>
           <c:spPr>
-            <a:solidFill>
-              <a:srgbClr val="0E9F6E"/>
-            </a:solidFill>
             <a:ln w="38100" cap="flat">
               <a:solidFill>
                 <a:srgbClr val="0E9F6E"/>
@@ -153,132 +158,91 @@
             </a:ln>
             <a:effectLst/>
           </c:spPr>
-          <c:invertIfNegative val="0"/>
-          <c:dLbls>
-            <c:numFmt formatCode="#,##0" sourceLinked="0"/>
-            <c:txPr>
-              <a:bodyPr/>
-              <a:lstStyle/>
-              <a:p>
-                <a:pPr>
-                  <a:defRPr b="0" i="0" strike="noStrike" sz="1200" u="none">
-                    <a:solidFill>
-                      <a:srgbClr val="000000"/>
-                    </a:solidFill>
-                    <a:latin typeface="Arial"/>
-                  </a:defRPr>
-                </a:pPr>
-              </a:p>
-            </c:txPr>
-            <c:showLegendKey val="0"/>
-            <c:showVal val="0"/>
-            <c:showCatName val="0"/>
-            <c:showSerName val="0"/>
-            <c:showPercent val="0"/>
-            <c:showBubbleSize val="0"/>
-            <c:showLeaderLines val="0"/>
-          </c:dLbls>
           <c:marker>
             <c:symbol val="none"/>
-            <c:size val="6"/>
-            <c:spPr>
-              <a:solidFill>
-                <a:srgbClr val="0E9F6E"/>
-              </a:solidFill>
-              <a:ln w="9525" cap="flat">
-                <a:solidFill>
-                  <a:srgbClr val="0E9F6E"/>
-                </a:solidFill>
-                <a:prstDash val="solid"/>
-                <a:round/>
-              </a:ln>
-              <a:effectLst/>
-            </c:spPr>
           </c:marker>
           <c:cat>
-            <c:multiLvlStrRef>
+            <c:strRef>
               <c:f>Sheet1!$A$2:$A$26</c:f>
-              <c:multiLvlStrCache>
+              <c:strCache>
                 <c:ptCount val="25"/>
-                <c:lvl>
-                  <c:pt idx="0">
-                    <c:v>2000</c:v>
-                  </c:pt>
-                  <c:pt idx="1">
-                    <c:v> </c:v>
-                  </c:pt>
-                  <c:pt idx="2">
-                    <c:v>  </c:v>
-                  </c:pt>
-                  <c:pt idx="3">
-                    <c:v>   </c:v>
-                  </c:pt>
-                  <c:pt idx="4">
-                    <c:v>2004</c:v>
-                  </c:pt>
-                  <c:pt idx="5">
-                    <c:v> </c:v>
-                  </c:pt>
-                  <c:pt idx="6">
-                    <c:v>  </c:v>
-                  </c:pt>
-                  <c:pt idx="7">
-                    <c:v>   </c:v>
-                  </c:pt>
-                  <c:pt idx="8">
-                    <c:v>2008</c:v>
-                  </c:pt>
-                  <c:pt idx="9">
-                    <c:v> </c:v>
-                  </c:pt>
-                  <c:pt idx="10">
-                    <c:v>  </c:v>
-                  </c:pt>
-                  <c:pt idx="11">
-                    <c:v>   </c:v>
-                  </c:pt>
-                  <c:pt idx="12">
-                    <c:v>2012</c:v>
-                  </c:pt>
-                  <c:pt idx="13">
-                    <c:v> </c:v>
-                  </c:pt>
-                  <c:pt idx="14">
-                    <c:v>  </c:v>
-                  </c:pt>
-                  <c:pt idx="15">
-                    <c:v>   </c:v>
-                  </c:pt>
-                  <c:pt idx="16">
-                    <c:v>2016</c:v>
-                  </c:pt>
-                  <c:pt idx="17">
-                    <c:v> </c:v>
-                  </c:pt>
-                  <c:pt idx="18">
-                    <c:v>  </c:v>
-                  </c:pt>
-                  <c:pt idx="19">
-                    <c:v>   </c:v>
-                  </c:pt>
-                  <c:pt idx="20">
-                    <c:v>2020</c:v>
-                  </c:pt>
-                  <c:pt idx="21">
-                    <c:v> </c:v>
-                  </c:pt>
-                  <c:pt idx="22">
-                    <c:v>  </c:v>
-                  </c:pt>
-                  <c:pt idx="23">
-                    <c:v>   </c:v>
-                  </c:pt>
-                  <c:pt idx="24">
-                    <c:v>2024</c:v>
-                  </c:pt>
-                </c:lvl>
-              </c:multiLvlStrCache>
-            </c:multiLvlStrRef>
+                <c:pt idx="0">
+                  <c:v>2000</c:v>
+                </c:pt>
+                <c:pt idx="1">
+                  <c:v> </c:v>
+                </c:pt>
+                <c:pt idx="2">
+                  <c:v>  </c:v>
+                </c:pt>
+                <c:pt idx="3">
+                  <c:v>   </c:v>
+                </c:pt>
+                <c:pt idx="4">
+                  <c:v>2004</c:v>
+                </c:pt>
+                <c:pt idx="5">
+                  <c:v> </c:v>
+                </c:pt>
+                <c:pt idx="6">
+                  <c:v>  </c:v>
+                </c:pt>
+                <c:pt idx="7">
+                  <c:v>   </c:v>
+                </c:pt>
+                <c:pt idx="8">
+                  <c:v>2008</c:v>
+                </c:pt>
+                <c:pt idx="9">
+                  <c:v> </c:v>
+                </c:pt>
+                <c:pt idx="10">
+                  <c:v>  </c:v>
+                </c:pt>
+                <c:pt idx="11">
+                  <c:v>   </c:v>
+                </c:pt>
+                <c:pt idx="12">
+                  <c:v>2012</c:v>
+                </c:pt>
+                <c:pt idx="13">
+                  <c:v> </c:v>
+                </c:pt>
+                <c:pt idx="14">
+                  <c:v>  </c:v>
+                </c:pt>
+                <c:pt idx="15">
+                  <c:v>   </c:v>
+                </c:pt>
+                <c:pt idx="16">
+                  <c:v>2016</c:v>
+                </c:pt>
+                <c:pt idx="17">
+                  <c:v> </c:v>
+                </c:pt>
+                <c:pt idx="18">
+                  <c:v>  </c:v>
+                </c:pt>
+                <c:pt idx="19">
+                  <c:v>   </c:v>
+                </c:pt>
+                <c:pt idx="20">
+                  <c:v>2020</c:v>
+                </c:pt>
+                <c:pt idx="21">
+                  <c:v> </c:v>
+                </c:pt>
+                <c:pt idx="22">
+                  <c:v>  </c:v>
+                </c:pt>
+                <c:pt idx="23">
+                  <c:v>   </c:v>
+                </c:pt>
+                <c:pt idx="24">
+                  <c:v>2024</c:v>
+                </c:pt>
+              </c:strCache>
+            </c:strRef>
           </c:cat>
           <c:val>
             <c:numRef>
@@ -308,7 +272,7 @@
                   <c:v>2</c:v>
                 </c:pt>
                 <c:pt idx="7">
-                  <c:v>2.2</c:v>
+                  <c:v>2.2000000000000002</c:v>
                 </c:pt>
                 <c:pt idx="8">
                   <c:v>2.4</c:v>
@@ -359,41 +323,29 @@
                   <c:v>37.57</c:v>
                 </c:pt>
                 <c:pt idx="24">
-                  <c:v>39.48</c:v>
+                  <c:v>39.479999999999997</c:v>
                 </c:pt>
               </c:numCache>
             </c:numRef>
           </c:val>
           <c:smooth val="0"/>
+          <c:extLst>
+            <c:ext xmlns:c16="http://schemas.microsoft.com/office/drawing/2014/chart" uri="{C3380CC4-5D6E-409C-BE32-E72D297353CC}">
+              <c16:uniqueId val="{00000000-FE24-42F0-90FE-C6645E98318A}"/>
+            </c:ext>
+          </c:extLst>
         </c:ser>
         <c:dLbls>
-          <c:numFmt formatCode="#,##0" sourceLinked="0"/>
-          <c:txPr>
-            <a:bodyPr/>
-            <a:lstStyle/>
-            <a:p>
-              <a:pPr>
-                <a:defRPr b="0" i="0" strike="noStrike" sz="1200" u="none">
-                  <a:solidFill>
-                    <a:srgbClr val="000000"/>
-                  </a:solidFill>
-                  <a:latin typeface="Arial"/>
-                </a:defRPr>
-              </a:pPr>
-            </a:p>
-          </c:txPr>
           <c:showLegendKey val="0"/>
           <c:showVal val="0"/>
           <c:showCatName val="0"/>
           <c:showSerName val="0"/>
           <c:showPercent val="0"/>
           <c:showBubbleSize val="0"/>
-          <c:showLeaderLines val="0"/>
         </c:dLbls>
-        <c:marker val="1"/>
+        <c:smooth val="0"/>
         <c:axId val="2094734554"/>
         <c:axId val="2094734552"/>
-        <c:axId val="2094734556"/>
       </c:lineChart>
       <c:catAx>
         <c:axId val="2094734554"/>
@@ -434,6 +386,7 @@
         <c:crosses val="autoZero"/>
         <c:auto val="1"/>
         <c:lblAlgn val="ctr"/>
+        <c:lblOffset val="100"/>
         <c:noMultiLvlLbl val="1"/>
       </c:catAx>
       <c:valAx>
@@ -498,6 +451,7 @@
     </c:plotArea>
     <c:plotVisOnly val="1"/>
     <c:dispBlanksAs val="span"/>
+    <c:showDLblsOverMax val="1"/>
   </c:chart>
   <c:spPr>
     <a:noFill/>
@@ -513,9 +467,11 @@
 </file>
 
 <file path=ppt/charts/chart2.xml><?xml version="1.0" encoding="utf-8"?>
-<c:chartSpace xmlns:c="http://schemas.openxmlformats.org/drawingml/2006/chart" xmlns:a="http://schemas.openxmlformats.org/drawingml/2006/main" xmlns:r="http://schemas.openxmlformats.org/officeDocument/2006/relationships">
+<c:chartSpace xmlns:c="http://schemas.openxmlformats.org/drawingml/2006/chart" xmlns:a="http://schemas.openxmlformats.org/drawingml/2006/main" xmlns:r="http://schemas.openxmlformats.org/officeDocument/2006/relationships" xmlns:c16r2="http://schemas.microsoft.com/office/drawing/2015/06/chart">
   <c:date1904 val="0"/>
+  <c:lang val="fr-FR"/>
   <c:roundedCorners val="1"/>
+  <c:style val="2"/>
   <c:chart>
     <c:autoTitleDeleted val="1"/>
     <c:plotArea>
@@ -545,60 +501,34 @@
             <a:effectLst/>
           </c:spPr>
           <c:invertIfNegative val="0"/>
-          <c:dLbls>
-            <c:numFmt formatCode="#,##0" sourceLinked="0"/>
-            <c:txPr>
-              <a:bodyPr/>
-              <a:lstStyle/>
-              <a:p>
-                <a:pPr>
-                  <a:defRPr b="0" i="0" strike="noStrike" sz="1200" u="none">
-                    <a:solidFill>
-                      <a:srgbClr val="000000"/>
-                    </a:solidFill>
-                    <a:latin typeface="Arial"/>
-                  </a:defRPr>
-                </a:pPr>
-              </a:p>
-            </c:txPr>
-            <c:showLegendKey val="0"/>
-            <c:showVal val="0"/>
-            <c:showCatName val="0"/>
-            <c:showSerName val="0"/>
-            <c:showPercent val="0"/>
-            <c:showBubbleSize val="0"/>
-            <c:showLeaderLines val="0"/>
-          </c:dLbls>
           <c:cat>
-            <c:multiLvlStrRef>
+            <c:strRef>
               <c:f>Sheet1!$A$2:$A$8</c:f>
-              <c:multiLvlStrCache>
+              <c:strCache>
                 <c:ptCount val="7"/>
-                <c:lvl>
-                  <c:pt idx="0">
-                    <c:v>2013</c:v>
-                  </c:pt>
-                  <c:pt idx="1">
-                    <c:v>2014</c:v>
-                  </c:pt>
-                  <c:pt idx="2">
-                    <c:v>2015</c:v>
-                  </c:pt>
-                  <c:pt idx="3">
-                    <c:v>2016</c:v>
-                  </c:pt>
-                  <c:pt idx="4">
-                    <c:v>2017</c:v>
-                  </c:pt>
-                  <c:pt idx="5">
-                    <c:v>2018</c:v>
-                  </c:pt>
-                  <c:pt idx="6">
-                    <c:v>2019</c:v>
-                  </c:pt>
-                </c:lvl>
-              </c:multiLvlStrCache>
-            </c:multiLvlStrRef>
+                <c:pt idx="0">
+                  <c:v>2013</c:v>
+                </c:pt>
+                <c:pt idx="1">
+                  <c:v>2014</c:v>
+                </c:pt>
+                <c:pt idx="2">
+                  <c:v>2015</c:v>
+                </c:pt>
+                <c:pt idx="3">
+                  <c:v>2016</c:v>
+                </c:pt>
+                <c:pt idx="4">
+                  <c:v>2017</c:v>
+                </c:pt>
+                <c:pt idx="5">
+                  <c:v>2018</c:v>
+                </c:pt>
+                <c:pt idx="6">
+                  <c:v>2019</c:v>
+                </c:pt>
+              </c:strCache>
+            </c:strRef>
           </c:cat>
           <c:val>
             <c:numRef>
@@ -625,11 +555,16 @@
                   <c:v>31.03</c:v>
                 </c:pt>
                 <c:pt idx="6">
-                  <c:v>39.34</c:v>
+                  <c:v>39.340000000000003</c:v>
                 </c:pt>
               </c:numCache>
             </c:numRef>
           </c:val>
+          <c:extLst>
+            <c:ext xmlns:c16="http://schemas.microsoft.com/office/drawing/2014/chart" uri="{C3380CC4-5D6E-409C-BE32-E72D297353CC}">
+              <c16:uniqueId val="{00000000-01C4-4281-8610-CD4B38073F01}"/>
+            </c:ext>
+          </c:extLst>
         </c:ser>
         <c:ser>
           <c:idx val="1"/>
@@ -652,60 +587,34 @@
             <a:effectLst/>
           </c:spPr>
           <c:invertIfNegative val="0"/>
-          <c:dLbls>
-            <c:numFmt formatCode="#,##0" sourceLinked="0"/>
-            <c:txPr>
-              <a:bodyPr/>
-              <a:lstStyle/>
-              <a:p>
-                <a:pPr>
-                  <a:defRPr b="0" i="0" strike="noStrike" sz="1200" u="none">
-                    <a:solidFill>
-                      <a:srgbClr val="000000"/>
-                    </a:solidFill>
-                    <a:latin typeface="Arial"/>
-                  </a:defRPr>
-                </a:pPr>
-              </a:p>
-            </c:txPr>
-            <c:showLegendKey val="0"/>
-            <c:showVal val="0"/>
-            <c:showCatName val="0"/>
-            <c:showSerName val="0"/>
-            <c:showPercent val="0"/>
-            <c:showBubbleSize val="0"/>
-            <c:showLeaderLines val="0"/>
-          </c:dLbls>
           <c:cat>
-            <c:multiLvlStrRef>
+            <c:strRef>
               <c:f>Sheet1!$A$2:$A$8</c:f>
-              <c:multiLvlStrCache>
+              <c:strCache>
                 <c:ptCount val="7"/>
-                <c:lvl>
-                  <c:pt idx="0">
-                    <c:v>2013</c:v>
-                  </c:pt>
-                  <c:pt idx="1">
-                    <c:v>2014</c:v>
-                  </c:pt>
-                  <c:pt idx="2">
-                    <c:v>2015</c:v>
-                  </c:pt>
-                  <c:pt idx="3">
-                    <c:v>2016</c:v>
-                  </c:pt>
-                  <c:pt idx="4">
-                    <c:v>2017</c:v>
-                  </c:pt>
-                  <c:pt idx="5">
-                    <c:v>2018</c:v>
-                  </c:pt>
-                  <c:pt idx="6">
-                    <c:v>2019</c:v>
-                  </c:pt>
-                </c:lvl>
-              </c:multiLvlStrCache>
-            </c:multiLvlStrRef>
+                <c:pt idx="0">
+                  <c:v>2013</c:v>
+                </c:pt>
+                <c:pt idx="1">
+                  <c:v>2014</c:v>
+                </c:pt>
+                <c:pt idx="2">
+                  <c:v>2015</c:v>
+                </c:pt>
+                <c:pt idx="3">
+                  <c:v>2016</c:v>
+                </c:pt>
+                <c:pt idx="4">
+                  <c:v>2017</c:v>
+                </c:pt>
+                <c:pt idx="5">
+                  <c:v>2018</c:v>
+                </c:pt>
+                <c:pt idx="6">
+                  <c:v>2019</c:v>
+                </c:pt>
+              </c:strCache>
+            </c:strRef>
           </c:cat>
           <c:val>
             <c:numRef>
@@ -737,6 +646,11 @@
               </c:numCache>
             </c:numRef>
           </c:val>
+          <c:extLst>
+            <c:ext xmlns:c16="http://schemas.microsoft.com/office/drawing/2014/chart" uri="{C3380CC4-5D6E-409C-BE32-E72D297353CC}">
+              <c16:uniqueId val="{00000001-01C4-4281-8610-CD4B38073F01}"/>
+            </c:ext>
+          </c:extLst>
         </c:ser>
         <c:ser>
           <c:idx val="2"/>
@@ -759,60 +673,34 @@
             <a:effectLst/>
           </c:spPr>
           <c:invertIfNegative val="0"/>
-          <c:dLbls>
-            <c:numFmt formatCode="#,##0" sourceLinked="0"/>
-            <c:txPr>
-              <a:bodyPr/>
-              <a:lstStyle/>
-              <a:p>
-                <a:pPr>
-                  <a:defRPr b="0" i="0" strike="noStrike" sz="1200" u="none">
-                    <a:solidFill>
-                      <a:srgbClr val="000000"/>
-                    </a:solidFill>
-                    <a:latin typeface="Arial"/>
-                  </a:defRPr>
-                </a:pPr>
-              </a:p>
-            </c:txPr>
-            <c:showLegendKey val="0"/>
-            <c:showVal val="0"/>
-            <c:showCatName val="0"/>
-            <c:showSerName val="0"/>
-            <c:showPercent val="0"/>
-            <c:showBubbleSize val="0"/>
-            <c:showLeaderLines val="0"/>
-          </c:dLbls>
           <c:cat>
-            <c:multiLvlStrRef>
+            <c:strRef>
               <c:f>Sheet1!$A$2:$A$8</c:f>
-              <c:multiLvlStrCache>
+              <c:strCache>
                 <c:ptCount val="7"/>
-                <c:lvl>
-                  <c:pt idx="0">
-                    <c:v>2013</c:v>
-                  </c:pt>
-                  <c:pt idx="1">
-                    <c:v>2014</c:v>
-                  </c:pt>
-                  <c:pt idx="2">
-                    <c:v>2015</c:v>
-                  </c:pt>
-                  <c:pt idx="3">
-                    <c:v>2016</c:v>
-                  </c:pt>
-                  <c:pt idx="4">
-                    <c:v>2017</c:v>
-                  </c:pt>
-                  <c:pt idx="5">
-                    <c:v>2018</c:v>
-                  </c:pt>
-                  <c:pt idx="6">
-                    <c:v>2019</c:v>
-                  </c:pt>
-                </c:lvl>
-              </c:multiLvlStrCache>
-            </c:multiLvlStrRef>
+                <c:pt idx="0">
+                  <c:v>2013</c:v>
+                </c:pt>
+                <c:pt idx="1">
+                  <c:v>2014</c:v>
+                </c:pt>
+                <c:pt idx="2">
+                  <c:v>2015</c:v>
+                </c:pt>
+                <c:pt idx="3">
+                  <c:v>2016</c:v>
+                </c:pt>
+                <c:pt idx="4">
+                  <c:v>2017</c:v>
+                </c:pt>
+                <c:pt idx="5">
+                  <c:v>2018</c:v>
+                </c:pt>
+                <c:pt idx="6">
+                  <c:v>2019</c:v>
+                </c:pt>
+              </c:strCache>
+            </c:strRef>
           </c:cat>
           <c:val>
             <c:numRef>
@@ -844,36 +732,24 @@
               </c:numCache>
             </c:numRef>
           </c:val>
+          <c:extLst>
+            <c:ext xmlns:c16="http://schemas.microsoft.com/office/drawing/2014/chart" uri="{C3380CC4-5D6E-409C-BE32-E72D297353CC}">
+              <c16:uniqueId val="{00000002-01C4-4281-8610-CD4B38073F01}"/>
+            </c:ext>
+          </c:extLst>
         </c:ser>
         <c:dLbls>
-          <c:numFmt formatCode="#,##0" sourceLinked="0"/>
-          <c:txPr>
-            <a:bodyPr/>
-            <a:lstStyle/>
-            <a:p>
-              <a:pPr>
-                <a:defRPr b="0" i="0" strike="noStrike" sz="1200" u="none">
-                  <a:solidFill>
-                    <a:srgbClr val="000000"/>
-                  </a:solidFill>
-                  <a:latin typeface="Arial"/>
-                </a:defRPr>
-              </a:pPr>
-            </a:p>
-          </c:txPr>
           <c:showLegendKey val="0"/>
           <c:showVal val="0"/>
           <c:showCatName val="0"/>
           <c:showSerName val="0"/>
           <c:showPercent val="0"/>
           <c:showBubbleSize val="0"/>
-          <c:showLeaderLines val="0"/>
         </c:dLbls>
         <c:gapWidth val="50"/>
         <c:overlap val="100"/>
         <c:axId val="2094734554"/>
         <c:axId val="2094734552"/>
-        <c:axId val="2094734556"/>
       </c:barChart>
       <c:catAx>
         <c:axId val="2094734554"/>
@@ -914,6 +790,7 @@
         <c:crosses val="autoZero"/>
         <c:auto val="1"/>
         <c:lblAlgn val="ctr"/>
+        <c:lblOffset val="100"/>
         <c:noMultiLvlLbl val="1"/>
       </c:catAx>
       <c:valAx>
@@ -996,6 +873,7 @@
     </c:legend>
     <c:plotVisOnly val="1"/>
     <c:dispBlanksAs val="span"/>
+    <c:showDLblsOverMax val="1"/>
   </c:chart>
   <c:spPr>
     <a:noFill/>
@@ -1011,14 +889,17 @@
 </file>
 
 <file path=ppt/charts/chart3.xml><?xml version="1.0" encoding="utf-8"?>
-<c:chartSpace xmlns:c="http://schemas.openxmlformats.org/drawingml/2006/chart" xmlns:a="http://schemas.openxmlformats.org/drawingml/2006/main" xmlns:r="http://schemas.openxmlformats.org/officeDocument/2006/relationships">
+<c:chartSpace xmlns:c="http://schemas.openxmlformats.org/drawingml/2006/chart" xmlns:a="http://schemas.openxmlformats.org/drawingml/2006/main" xmlns:r="http://schemas.openxmlformats.org/officeDocument/2006/relationships" xmlns:c16r2="http://schemas.microsoft.com/office/drawing/2015/06/chart">
   <c:date1904 val="0"/>
+  <c:lang val="fr-FR"/>
   <c:roundedCorners val="1"/>
+  <c:style val="2"/>
   <c:chart>
     <c:autoTitleDeleted val="1"/>
     <c:plotArea>
       <c:layout/>
       <c:lineChart>
+        <c:grouping val="standard"/>
         <c:varyColors val="0"/>
         <c:ser>
           <c:idx val="0"/>
@@ -1035,9 +916,6 @@
             </c:strRef>
           </c:tx>
           <c:spPr>
-            <a:solidFill>
-              <a:srgbClr val="0E9F6E"/>
-            </a:solidFill>
             <a:ln w="38100" cap="flat">
               <a:solidFill>
                 <a:srgbClr val="0E9F6E"/>
@@ -1047,31 +925,6 @@
             </a:ln>
             <a:effectLst/>
           </c:spPr>
-          <c:invertIfNegative val="0"/>
-          <c:dLbls>
-            <c:numFmt formatCode="#,##0" sourceLinked="0"/>
-            <c:txPr>
-              <a:bodyPr/>
-              <a:lstStyle/>
-              <a:p>
-                <a:pPr>
-                  <a:defRPr b="0" i="0" strike="noStrike" sz="1200" u="none">
-                    <a:solidFill>
-                      <a:srgbClr val="000000"/>
-                    </a:solidFill>
-                    <a:latin typeface="Arial"/>
-                  </a:defRPr>
-                </a:pPr>
-              </a:p>
-            </c:txPr>
-            <c:showLegendKey val="0"/>
-            <c:showVal val="0"/>
-            <c:showCatName val="0"/>
-            <c:showSerName val="0"/>
-            <c:showPercent val="0"/>
-            <c:showBubbleSize val="0"/>
-            <c:showLeaderLines val="0"/>
-          </c:dLbls>
           <c:marker>
             <c:symbol val="circle"/>
             <c:size val="6"/>
@@ -1090,35 +943,33 @@
             </c:spPr>
           </c:marker>
           <c:cat>
-            <c:multiLvlStrRef>
+            <c:strRef>
               <c:f>Sheet1!$A$2:$A$8</c:f>
-              <c:multiLvlStrCache>
+              <c:strCache>
                 <c:ptCount val="7"/>
-                <c:lvl>
-                  <c:pt idx="0">
-                    <c:v>2013</c:v>
-                  </c:pt>
-                  <c:pt idx="1">
-                    <c:v>2014</c:v>
-                  </c:pt>
-                  <c:pt idx="2">
-                    <c:v>2015</c:v>
-                  </c:pt>
-                  <c:pt idx="3">
-                    <c:v>2016</c:v>
-                  </c:pt>
-                  <c:pt idx="4">
-                    <c:v>2017</c:v>
-                  </c:pt>
-                  <c:pt idx="5">
-                    <c:v>2018</c:v>
-                  </c:pt>
-                  <c:pt idx="6">
-                    <c:v>2019</c:v>
-                  </c:pt>
-                </c:lvl>
-              </c:multiLvlStrCache>
-            </c:multiLvlStrRef>
+                <c:pt idx="0">
+                  <c:v>2013</c:v>
+                </c:pt>
+                <c:pt idx="1">
+                  <c:v>2014</c:v>
+                </c:pt>
+                <c:pt idx="2">
+                  <c:v>2015</c:v>
+                </c:pt>
+                <c:pt idx="3">
+                  <c:v>2016</c:v>
+                </c:pt>
+                <c:pt idx="4">
+                  <c:v>2017</c:v>
+                </c:pt>
+                <c:pt idx="5">
+                  <c:v>2018</c:v>
+                </c:pt>
+                <c:pt idx="6">
+                  <c:v>2019</c:v>
+                </c:pt>
+              </c:strCache>
+            </c:strRef>
           </c:cat>
           <c:val>
             <c:numRef>
@@ -1151,6 +1002,11 @@
             </c:numRef>
           </c:val>
           <c:smooth val="0"/>
+          <c:extLst>
+            <c:ext xmlns:c16="http://schemas.microsoft.com/office/drawing/2014/chart" uri="{C3380CC4-5D6E-409C-BE32-E72D297353CC}">
+              <c16:uniqueId val="{00000000-D26C-464D-9D18-BDB2504F9B1A}"/>
+            </c:ext>
+          </c:extLst>
         </c:ser>
         <c:ser>
           <c:idx val="1"/>
@@ -1167,9 +1023,6 @@
             </c:strRef>
           </c:tx>
           <c:spPr>
-            <a:solidFill>
-              <a:srgbClr val="D21034"/>
-            </a:solidFill>
             <a:ln w="38100" cap="flat">
               <a:solidFill>
                 <a:srgbClr val="D21034"/>
@@ -1179,31 +1032,6 @@
             </a:ln>
             <a:effectLst/>
           </c:spPr>
-          <c:invertIfNegative val="0"/>
-          <c:dLbls>
-            <c:numFmt formatCode="#,##0" sourceLinked="0"/>
-            <c:txPr>
-              <a:bodyPr/>
-              <a:lstStyle/>
-              <a:p>
-                <a:pPr>
-                  <a:defRPr b="0" i="0" strike="noStrike" sz="1200" u="none">
-                    <a:solidFill>
-                      <a:srgbClr val="000000"/>
-                    </a:solidFill>
-                    <a:latin typeface="Arial"/>
-                  </a:defRPr>
-                </a:pPr>
-              </a:p>
-            </c:txPr>
-            <c:showLegendKey val="0"/>
-            <c:showVal val="0"/>
-            <c:showCatName val="0"/>
-            <c:showSerName val="0"/>
-            <c:showPercent val="0"/>
-            <c:showBubbleSize val="0"/>
-            <c:showLeaderLines val="0"/>
-          </c:dLbls>
           <c:marker>
             <c:symbol val="circle"/>
             <c:size val="6"/>
@@ -1222,35 +1050,33 @@
             </c:spPr>
           </c:marker>
           <c:cat>
-            <c:multiLvlStrRef>
+            <c:strRef>
               <c:f>Sheet1!$A$2:$A$8</c:f>
-              <c:multiLvlStrCache>
+              <c:strCache>
                 <c:ptCount val="7"/>
-                <c:lvl>
-                  <c:pt idx="0">
-                    <c:v>2013</c:v>
-                  </c:pt>
-                  <c:pt idx="1">
-                    <c:v>2014</c:v>
-                  </c:pt>
-                  <c:pt idx="2">
-                    <c:v>2015</c:v>
-                  </c:pt>
-                  <c:pt idx="3">
-                    <c:v>2016</c:v>
-                  </c:pt>
-                  <c:pt idx="4">
-                    <c:v>2017</c:v>
-                  </c:pt>
-                  <c:pt idx="5">
-                    <c:v>2018</c:v>
-                  </c:pt>
-                  <c:pt idx="6">
-                    <c:v>2019</c:v>
-                  </c:pt>
-                </c:lvl>
-              </c:multiLvlStrCache>
-            </c:multiLvlStrRef>
+                <c:pt idx="0">
+                  <c:v>2013</c:v>
+                </c:pt>
+                <c:pt idx="1">
+                  <c:v>2014</c:v>
+                </c:pt>
+                <c:pt idx="2">
+                  <c:v>2015</c:v>
+                </c:pt>
+                <c:pt idx="3">
+                  <c:v>2016</c:v>
+                </c:pt>
+                <c:pt idx="4">
+                  <c:v>2017</c:v>
+                </c:pt>
+                <c:pt idx="5">
+                  <c:v>2018</c:v>
+                </c:pt>
+                <c:pt idx="6">
+                  <c:v>2019</c:v>
+                </c:pt>
+              </c:strCache>
+            </c:strRef>
           </c:cat>
           <c:val>
             <c:numRef>
@@ -1283,35 +1109,24 @@
             </c:numRef>
           </c:val>
           <c:smooth val="0"/>
+          <c:extLst>
+            <c:ext xmlns:c16="http://schemas.microsoft.com/office/drawing/2014/chart" uri="{C3380CC4-5D6E-409C-BE32-E72D297353CC}">
+              <c16:uniqueId val="{00000001-D26C-464D-9D18-BDB2504F9B1A}"/>
+            </c:ext>
+          </c:extLst>
         </c:ser>
         <c:dLbls>
-          <c:numFmt formatCode="#,##0" sourceLinked="0"/>
-          <c:txPr>
-            <a:bodyPr/>
-            <a:lstStyle/>
-            <a:p>
-              <a:pPr>
-                <a:defRPr b="0" i="0" strike="noStrike" sz="1200" u="none">
-                  <a:solidFill>
-                    <a:srgbClr val="000000"/>
-                  </a:solidFill>
-                  <a:latin typeface="Arial"/>
-                </a:defRPr>
-              </a:pPr>
-            </a:p>
-          </c:txPr>
           <c:showLegendKey val="0"/>
           <c:showVal val="0"/>
           <c:showCatName val="0"/>
           <c:showSerName val="0"/>
           <c:showPercent val="0"/>
           <c:showBubbleSize val="0"/>
-          <c:showLeaderLines val="0"/>
         </c:dLbls>
         <c:marker val="1"/>
+        <c:smooth val="0"/>
         <c:axId val="2094734554"/>
         <c:axId val="2094734552"/>
-        <c:axId val="2094734556"/>
       </c:lineChart>
       <c:catAx>
         <c:axId val="2094734554"/>
@@ -1352,6 +1167,7 @@
         <c:crosses val="autoZero"/>
         <c:auto val="1"/>
         <c:lblAlgn val="ctr"/>
+        <c:lblOffset val="100"/>
         <c:noMultiLvlLbl val="1"/>
       </c:catAx>
       <c:valAx>
@@ -1436,6 +1252,7 @@
     </c:legend>
     <c:plotVisOnly val="1"/>
     <c:dispBlanksAs val="span"/>
+    <c:showDLblsOverMax val="1"/>
   </c:chart>
   <c:spPr>
     <a:noFill/>
@@ -1451,9 +1268,11 @@
 </file>
 
 <file path=ppt/charts/chart4.xml><?xml version="1.0" encoding="utf-8"?>
-<c:chartSpace xmlns:c="http://schemas.openxmlformats.org/drawingml/2006/chart" xmlns:a="http://schemas.openxmlformats.org/drawingml/2006/main" xmlns:r="http://schemas.openxmlformats.org/officeDocument/2006/relationships">
+<c:chartSpace xmlns:c="http://schemas.openxmlformats.org/drawingml/2006/chart" xmlns:a="http://schemas.openxmlformats.org/drawingml/2006/main" xmlns:r="http://schemas.openxmlformats.org/officeDocument/2006/relationships" xmlns:c16r2="http://schemas.microsoft.com/office/drawing/2015/06/chart">
   <c:date1904 val="0"/>
+  <c:lang val="fr-FR"/>
   <c:roundedCorners val="1"/>
+  <c:style val="2"/>
   <c:chart>
     <c:autoTitleDeleted val="1"/>
     <c:plotArea>
@@ -1485,18 +1304,26 @@
           <c:invertIfNegative val="0"/>
           <c:dLbls>
             <c:numFmt formatCode="0.0" sourceLinked="0"/>
+            <c:spPr>
+              <a:noFill/>
+              <a:ln>
+                <a:noFill/>
+              </a:ln>
+              <a:effectLst/>
+            </c:spPr>
             <c:txPr>
               <a:bodyPr/>
               <a:lstStyle/>
               <a:p>
                 <a:pPr>
-                  <a:defRPr b="0" i="0" strike="noStrike" sz="900" u="none">
+                  <a:defRPr sz="900" b="0" i="0" u="none" strike="noStrike">
                     <a:solidFill>
                       <a:srgbClr val="334155"/>
                     </a:solidFill>
                     <a:latin typeface="Calibri"/>
                   </a:defRPr>
                 </a:pPr>
+                <a:endParaRPr lang="fr-FR"/>
               </a:p>
             </c:txPr>
             <c:showLegendKey val="0"/>
@@ -1506,34 +1333,37 @@
             <c:showPercent val="0"/>
             <c:showBubbleSize val="0"/>
             <c:showLeaderLines val="0"/>
+            <c:extLst>
+              <c:ext xmlns:c15="http://schemas.microsoft.com/office/drawing/2012/chart" uri="{CE6537A1-D6FC-4f65-9D91-7224C49458BB}">
+                <c15:showLeaderLines val="0"/>
+              </c:ext>
+            </c:extLst>
           </c:dLbls>
           <c:cat>
-            <c:multiLvlStrRef>
+            <c:strRef>
               <c:f>Sheet1!$A$2:$A$7</c:f>
-              <c:multiLvlStrCache>
+              <c:strCache>
                 <c:ptCount val="6"/>
-                <c:lvl>
-                  <c:pt idx="0">
-                    <c:v>Savanes</c:v>
-                  </c:pt>
-                  <c:pt idx="1">
-                    <c:v>Kara</c:v>
-                  </c:pt>
-                  <c:pt idx="2">
-                    <c:v>Centrale</c:v>
-                  </c:pt>
-                  <c:pt idx="3">
-                    <c:v>Plateaux</c:v>
-                  </c:pt>
-                  <c:pt idx="4">
-                    <c:v>Maritime int.</c:v>
-                  </c:pt>
-                  <c:pt idx="5">
-                    <c:v>Grand Lomé</c:v>
-                  </c:pt>
-                </c:lvl>
-              </c:multiLvlStrCache>
-            </c:multiLvlStrRef>
+                <c:pt idx="0">
+                  <c:v>Savanes</c:v>
+                </c:pt>
+                <c:pt idx="1">
+                  <c:v>Kara</c:v>
+                </c:pt>
+                <c:pt idx="2">
+                  <c:v>Centrale</c:v>
+                </c:pt>
+                <c:pt idx="3">
+                  <c:v>Plateaux</c:v>
+                </c:pt>
+                <c:pt idx="4">
+                  <c:v>Maritime int.</c:v>
+                </c:pt>
+                <c:pt idx="5">
+                  <c:v>Grand Lomé</c:v>
+                </c:pt>
+              </c:strCache>
+            </c:strRef>
           </c:cat>
           <c:val>
             <c:numRef>
@@ -1548,13 +1378,13 @@
                   <c:v>12.2</c:v>
                 </c:pt>
                 <c:pt idx="2">
-                  <c:v>9.8</c:v>
+                  <c:v>9.8000000000000007</c:v>
                 </c:pt>
                 <c:pt idx="3">
                   <c:v>20.2</c:v>
                 </c:pt>
                 <c:pt idx="4">
-                  <c:v>16.6</c:v>
+                  <c:v>16.600000000000001</c:v>
                 </c:pt>
                 <c:pt idx="5">
                   <c:v>27</c:v>
@@ -1562,6 +1392,11 @@
               </c:numCache>
             </c:numRef>
           </c:val>
+          <c:extLst>
+            <c:ext xmlns:c16="http://schemas.microsoft.com/office/drawing/2014/chart" uri="{C3380CC4-5D6E-409C-BE32-E72D297353CC}">
+              <c16:uniqueId val="{00000000-DFCA-4E7A-8B05-A9743A394FB4}"/>
+            </c:ext>
+          </c:extLst>
         </c:ser>
         <c:ser>
           <c:idx val="1"/>
@@ -1586,18 +1421,26 @@
           <c:invertIfNegative val="0"/>
           <c:dLbls>
             <c:numFmt formatCode="0.0" sourceLinked="0"/>
+            <c:spPr>
+              <a:noFill/>
+              <a:ln>
+                <a:noFill/>
+              </a:ln>
+              <a:effectLst/>
+            </c:spPr>
             <c:txPr>
               <a:bodyPr/>
               <a:lstStyle/>
               <a:p>
                 <a:pPr>
-                  <a:defRPr b="0" i="0" strike="noStrike" sz="900" u="none">
+                  <a:defRPr sz="900" b="0" i="0" u="none" strike="noStrike">
                     <a:solidFill>
                       <a:srgbClr val="334155"/>
                     </a:solidFill>
                     <a:latin typeface="Calibri"/>
                   </a:defRPr>
                 </a:pPr>
+                <a:endParaRPr lang="fr-FR"/>
               </a:p>
             </c:txPr>
             <c:showLegendKey val="0"/>
@@ -1607,34 +1450,37 @@
             <c:showPercent val="0"/>
             <c:showBubbleSize val="0"/>
             <c:showLeaderLines val="0"/>
+            <c:extLst>
+              <c:ext xmlns:c15="http://schemas.microsoft.com/office/drawing/2012/chart" uri="{CE6537A1-D6FC-4f65-9D91-7224C49458BB}">
+                <c15:showLeaderLines val="0"/>
+              </c:ext>
+            </c:extLst>
           </c:dLbls>
           <c:cat>
-            <c:multiLvlStrRef>
+            <c:strRef>
               <c:f>Sheet1!$A$2:$A$7</c:f>
-              <c:multiLvlStrCache>
+              <c:strCache>
                 <c:ptCount val="6"/>
-                <c:lvl>
-                  <c:pt idx="0">
-                    <c:v>Savanes</c:v>
-                  </c:pt>
-                  <c:pt idx="1">
-                    <c:v>Kara</c:v>
-                  </c:pt>
-                  <c:pt idx="2">
-                    <c:v>Centrale</c:v>
-                  </c:pt>
-                  <c:pt idx="3">
-                    <c:v>Plateaux</c:v>
-                  </c:pt>
-                  <c:pt idx="4">
-                    <c:v>Maritime int.</c:v>
-                  </c:pt>
-                  <c:pt idx="5">
-                    <c:v>Grand Lomé</c:v>
-                  </c:pt>
-                </c:lvl>
-              </c:multiLvlStrCache>
-            </c:multiLvlStrRef>
+                <c:pt idx="0">
+                  <c:v>Savanes</c:v>
+                </c:pt>
+                <c:pt idx="1">
+                  <c:v>Kara</c:v>
+                </c:pt>
+                <c:pt idx="2">
+                  <c:v>Centrale</c:v>
+                </c:pt>
+                <c:pt idx="3">
+                  <c:v>Plateaux</c:v>
+                </c:pt>
+                <c:pt idx="4">
+                  <c:v>Maritime int.</c:v>
+                </c:pt>
+                <c:pt idx="5">
+                  <c:v>Grand Lomé</c:v>
+                </c:pt>
+              </c:strCache>
+            </c:strRef>
           </c:cat>
           <c:val>
             <c:numRef>
@@ -1663,36 +1509,23 @@
               </c:numCache>
             </c:numRef>
           </c:val>
+          <c:extLst>
+            <c:ext xmlns:c16="http://schemas.microsoft.com/office/drawing/2014/chart" uri="{C3380CC4-5D6E-409C-BE32-E72D297353CC}">
+              <c16:uniqueId val="{00000001-DFCA-4E7A-8B05-A9743A394FB4}"/>
+            </c:ext>
+          </c:extLst>
         </c:ser>
         <c:dLbls>
-          <c:numFmt formatCode="0.0" sourceLinked="0"/>
-          <c:txPr>
-            <a:bodyPr/>
-            <a:lstStyle/>
-            <a:p>
-              <a:pPr>
-                <a:defRPr b="0" i="0" strike="noStrike" sz="900" u="none">
-                  <a:solidFill>
-                    <a:srgbClr val="334155"/>
-                  </a:solidFill>
-                  <a:latin typeface="Calibri"/>
-                </a:defRPr>
-              </a:pPr>
-            </a:p>
-          </c:txPr>
           <c:showLegendKey val="0"/>
           <c:showVal val="1"/>
           <c:showCatName val="0"/>
           <c:showSerName val="0"/>
           <c:showPercent val="0"/>
           <c:showBubbleSize val="0"/>
-          <c:showLeaderLines val="0"/>
         </c:dLbls>
         <c:gapWidth val="150"/>
-        <c:overlap val="0"/>
         <c:axId val="2094734554"/>
         <c:axId val="2094734552"/>
-        <c:axId val="2094734556"/>
       </c:barChart>
       <c:catAx>
         <c:axId val="2094734554"/>
@@ -1733,6 +1566,7 @@
         <c:crosses val="autoZero"/>
         <c:auto val="1"/>
         <c:lblAlgn val="ctr"/>
+        <c:lblOffset val="100"/>
         <c:noMultiLvlLbl val="1"/>
       </c:catAx>
       <c:valAx>
@@ -1746,30 +1580,6 @@
         <c:majorTickMark val="out"/>
         <c:minorTickMark val="none"/>
         <c:tickLblPos val="nextTo"/>
-        <c:spPr>
-          <a:ln w="12700" cap="flat">
-            <a:solidFill>
-              <a:srgbClr val="888888"/>
-            </a:solidFill>
-            <a:prstDash val="solid"/>
-            <a:round/>
-          </a:ln>
-        </c:spPr>
-        <c:txPr>
-          <a:bodyPr/>
-          <a:lstStyle/>
-          <a:p>
-            <a:pPr>
-              <a:defRPr sz="1200" b="0" i="0" u="none" strike="noStrike">
-                <a:solidFill>
-                  <a:srgbClr val="000000"/>
-                </a:solidFill>
-                <a:latin typeface="Arial"/>
-              </a:defRPr>
-            </a:pPr>
-            <a:endParaRPr lang="en-US"/>
-          </a:p>
-        </c:txPr>
         <c:crossAx val="2094734554"/>
         <c:crosses val="autoZero"/>
         <c:crossBetween val="between"/>
@@ -1804,6 +1614,7 @@
     </c:legend>
     <c:plotVisOnly val="1"/>
     <c:dispBlanksAs val="span"/>
+    <c:showDLblsOverMax val="1"/>
   </c:chart>
   <c:spPr>
     <a:noFill/>
@@ -1819,9 +1630,11 @@
 </file>
 
 <file path=ppt/charts/chart5.xml><?xml version="1.0" encoding="utf-8"?>
-<c:chartSpace xmlns:c="http://schemas.openxmlformats.org/drawingml/2006/chart" xmlns:a="http://schemas.openxmlformats.org/drawingml/2006/main" xmlns:r="http://schemas.openxmlformats.org/officeDocument/2006/relationships">
+<c:chartSpace xmlns:c="http://schemas.openxmlformats.org/drawingml/2006/chart" xmlns:a="http://schemas.openxmlformats.org/drawingml/2006/main" xmlns:r="http://schemas.openxmlformats.org/officeDocument/2006/relationships" xmlns:c16r2="http://schemas.microsoft.com/office/drawing/2015/06/chart">
   <c:date1904 val="0"/>
+  <c:lang val="fr-FR"/>
   <c:roundedCorners val="1"/>
+  <c:style val="2"/>
   <c:chart>
     <c:autoTitleDeleted val="1"/>
     <c:plotArea>
@@ -1864,6 +1677,11 @@
               </a:solidFill>
               <a:effectLst/>
             </c:spPr>
+            <c:extLst>
+              <c:ext xmlns:c16="http://schemas.microsoft.com/office/drawing/2014/chart" uri="{C3380CC4-5D6E-409C-BE32-E72D297353CC}">
+                <c16:uniqueId val="{00000001-0F9C-4648-9301-77F5237FE1E2}"/>
+              </c:ext>
+            </c:extLst>
           </c:dPt>
           <c:dPt>
             <c:idx val="1"/>
@@ -1874,6 +1692,11 @@
               </a:solidFill>
               <a:effectLst/>
             </c:spPr>
+            <c:extLst>
+              <c:ext xmlns:c16="http://schemas.microsoft.com/office/drawing/2014/chart" uri="{C3380CC4-5D6E-409C-BE32-E72D297353CC}">
+                <c16:uniqueId val="{00000003-0F9C-4648-9301-77F5237FE1E2}"/>
+              </c:ext>
+            </c:extLst>
           </c:dPt>
           <c:dPt>
             <c:idx val="2"/>
@@ -1884,6 +1707,11 @@
               </a:solidFill>
               <a:effectLst/>
             </c:spPr>
+            <c:extLst>
+              <c:ext xmlns:c16="http://schemas.microsoft.com/office/drawing/2014/chart" uri="{C3380CC4-5D6E-409C-BE32-E72D297353CC}">
+                <c16:uniqueId val="{00000005-0F9C-4648-9301-77F5237FE1E2}"/>
+              </c:ext>
+            </c:extLst>
           </c:dPt>
           <c:dPt>
             <c:idx val="3"/>
@@ -1894,6 +1722,11 @@
               </a:solidFill>
               <a:effectLst/>
             </c:spPr>
+            <c:extLst>
+              <c:ext xmlns:c16="http://schemas.microsoft.com/office/drawing/2014/chart" uri="{C3380CC4-5D6E-409C-BE32-E72D297353CC}">
+                <c16:uniqueId val="{00000007-0F9C-4648-9301-77F5237FE1E2}"/>
+              </c:ext>
+            </c:extLst>
           </c:dPt>
           <c:dLbls>
             <c:dLbl>
@@ -1912,6 +1745,7 @@
                       <a:latin typeface="Calibri"/>
                     </a:defRPr>
                   </a:pPr>
+                  <a:endParaRPr lang="fr-FR"/>
                 </a:p>
               </c:txPr>
               <c:showLegendKey val="0"/>
@@ -1920,6 +1754,12 @@
               <c:showSerName val="0"/>
               <c:showPercent val="1"/>
               <c:showBubbleSize val="0"/>
+              <c:extLst>
+                <c:ext xmlns:c15="http://schemas.microsoft.com/office/drawing/2012/chart" uri="{CE6537A1-D6FC-4f65-9D91-7224C49458BB}"/>
+                <c:ext xmlns:c16="http://schemas.microsoft.com/office/drawing/2014/chart" uri="{C3380CC4-5D6E-409C-BE32-E72D297353CC}">
+                  <c16:uniqueId val="{00000001-0F9C-4648-9301-77F5237FE1E2}"/>
+                </c:ext>
+              </c:extLst>
             </c:dLbl>
             <c:dLbl>
               <c:idx val="1"/>
@@ -1937,6 +1777,7 @@
                       <a:latin typeface="Calibri"/>
                     </a:defRPr>
                   </a:pPr>
+                  <a:endParaRPr lang="fr-FR"/>
                 </a:p>
               </c:txPr>
               <c:showLegendKey val="0"/>
@@ -1945,6 +1786,12 @@
               <c:showSerName val="0"/>
               <c:showPercent val="1"/>
               <c:showBubbleSize val="0"/>
+              <c:extLst>
+                <c:ext xmlns:c15="http://schemas.microsoft.com/office/drawing/2012/chart" uri="{CE6537A1-D6FC-4f65-9D91-7224C49458BB}"/>
+                <c:ext xmlns:c16="http://schemas.microsoft.com/office/drawing/2014/chart" uri="{C3380CC4-5D6E-409C-BE32-E72D297353CC}">
+                  <c16:uniqueId val="{00000003-0F9C-4648-9301-77F5237FE1E2}"/>
+                </c:ext>
+              </c:extLst>
             </c:dLbl>
             <c:dLbl>
               <c:idx val="2"/>
@@ -1962,6 +1809,7 @@
                       <a:latin typeface="Calibri"/>
                     </a:defRPr>
                   </a:pPr>
+                  <a:endParaRPr lang="fr-FR"/>
                 </a:p>
               </c:txPr>
               <c:showLegendKey val="0"/>
@@ -1970,6 +1818,12 @@
               <c:showSerName val="0"/>
               <c:showPercent val="1"/>
               <c:showBubbleSize val="0"/>
+              <c:extLst>
+                <c:ext xmlns:c15="http://schemas.microsoft.com/office/drawing/2012/chart" uri="{CE6537A1-D6FC-4f65-9D91-7224C49458BB}"/>
+                <c:ext xmlns:c16="http://schemas.microsoft.com/office/drawing/2014/chart" uri="{C3380CC4-5D6E-409C-BE32-E72D297353CC}">
+                  <c16:uniqueId val="{00000005-0F9C-4648-9301-77F5237FE1E2}"/>
+                </c:ext>
+              </c:extLst>
             </c:dLbl>
             <c:dLbl>
               <c:idx val="3"/>
@@ -1987,6 +1841,7 @@
                       <a:latin typeface="Calibri"/>
                     </a:defRPr>
                   </a:pPr>
+                  <a:endParaRPr lang="fr-FR"/>
                 </a:p>
               </c:txPr>
               <c:showLegendKey val="0"/>
@@ -1995,8 +1850,21 @@
               <c:showSerName val="0"/>
               <c:showPercent val="1"/>
               <c:showBubbleSize val="0"/>
+              <c:extLst>
+                <c:ext xmlns:c15="http://schemas.microsoft.com/office/drawing/2012/chart" uri="{CE6537A1-D6FC-4f65-9D91-7224C49458BB}"/>
+                <c:ext xmlns:c16="http://schemas.microsoft.com/office/drawing/2014/chart" uri="{C3380CC4-5D6E-409C-BE32-E72D297353CC}">
+                  <c16:uniqueId val="{00000007-0F9C-4648-9301-77F5237FE1E2}"/>
+                </c:ext>
+              </c:extLst>
             </c:dLbl>
             <c:numFmt formatCode="0%" sourceLinked="0"/>
+            <c:spPr>
+              <a:noFill/>
+              <a:ln>
+                <a:noFill/>
+              </a:ln>
+              <a:effectLst/>
+            </c:spPr>
             <c:txPr>
               <a:bodyPr/>
               <a:lstStyle/>
@@ -2009,6 +1877,7 @@
                     <a:latin typeface="Arial"/>
                   </a:defRPr>
                 </a:pPr>
+                <a:endParaRPr lang="fr-FR"/>
               </a:p>
             </c:txPr>
             <c:showLegendKey val="0"/>
@@ -2018,6 +1887,9 @@
             <c:showPercent val="1"/>
             <c:showBubbleSize val="0"/>
             <c:showLeaderLines val="0"/>
+            <c:extLst>
+              <c:ext xmlns:c15="http://schemas.microsoft.com/office/drawing/2012/chart" uri="{CE6537A1-D6FC-4f65-9D91-7224C49458BB}"/>
+            </c:extLst>
           </c:dLbls>
           <c:cat>
             <c:strRef>
@@ -2043,6 +1915,7 @@
             <c:numRef>
               <c:f>Sheet1!$B$2:$B$5</c:f>
               <c:numCache>
+                <c:formatCode>General</c:formatCode>
                 <c:ptCount val="4"/>
                 <c:pt idx="0">
                   <c:v>12649</c:v>
@@ -2059,7 +1932,21 @@
               </c:numCache>
             </c:numRef>
           </c:val>
+          <c:extLst>
+            <c:ext xmlns:c16="http://schemas.microsoft.com/office/drawing/2014/chart" uri="{C3380CC4-5D6E-409C-BE32-E72D297353CC}">
+              <c16:uniqueId val="{00000008-0F9C-4648-9301-77F5237FE1E2}"/>
+            </c:ext>
+          </c:extLst>
         </c:ser>
+        <c:dLbls>
+          <c:showLegendKey val="0"/>
+          <c:showVal val="0"/>
+          <c:showCatName val="0"/>
+          <c:showSerName val="0"/>
+          <c:showPercent val="0"/>
+          <c:showBubbleSize val="0"/>
+          <c:showLeaderLines val="0"/>
+        </c:dLbls>
         <c:firstSliceAng val="0"/>
         <c:holeSize val="55"/>
       </c:doughnutChart>
@@ -2093,6 +1980,7 @@
     </c:legend>
     <c:plotVisOnly val="1"/>
     <c:dispBlanksAs val="span"/>
+    <c:showDLblsOverMax val="1"/>
   </c:chart>
   <c:spPr>
     <a:noFill/>
@@ -2108,9 +1996,11 @@
 </file>
 
 <file path=ppt/charts/chart6.xml><?xml version="1.0" encoding="utf-8"?>
-<c:chartSpace xmlns:c="http://schemas.openxmlformats.org/drawingml/2006/chart" xmlns:a="http://schemas.openxmlformats.org/drawingml/2006/main" xmlns:r="http://schemas.openxmlformats.org/officeDocument/2006/relationships">
+<c:chartSpace xmlns:c="http://schemas.openxmlformats.org/drawingml/2006/chart" xmlns:a="http://schemas.openxmlformats.org/drawingml/2006/main" xmlns:r="http://schemas.openxmlformats.org/officeDocument/2006/relationships" xmlns:c16r2="http://schemas.microsoft.com/office/drawing/2015/06/chart">
   <c:date1904 val="0"/>
+  <c:lang val="fr-FR"/>
   <c:roundedCorners val="1"/>
+  <c:style val="2"/>
   <c:chart>
     <c:autoTitleDeleted val="1"/>
     <c:plotArea>
@@ -2142,18 +2032,26 @@
           <c:invertIfNegative val="0"/>
           <c:dLbls>
             <c:numFmt formatCode="#,##0" sourceLinked="0"/>
+            <c:spPr>
+              <a:noFill/>
+              <a:ln>
+                <a:noFill/>
+              </a:ln>
+              <a:effectLst/>
+            </c:spPr>
             <c:txPr>
               <a:bodyPr/>
               <a:lstStyle/>
               <a:p>
                 <a:pPr>
-                  <a:defRPr b="0" i="0" strike="noStrike" sz="1000" u="none">
+                  <a:defRPr sz="1000" b="0" i="0" u="none" strike="noStrike">
                     <a:solidFill>
                       <a:srgbClr val="334155"/>
                     </a:solidFill>
                     <a:latin typeface="Calibri"/>
                   </a:defRPr>
                 </a:pPr>
+                <a:endParaRPr lang="fr-FR"/>
               </a:p>
             </c:txPr>
             <c:showLegendKey val="0"/>
@@ -2163,28 +2061,31 @@
             <c:showPercent val="0"/>
             <c:showBubbleSize val="0"/>
             <c:showLeaderLines val="0"/>
+            <c:extLst>
+              <c:ext xmlns:c15="http://schemas.microsoft.com/office/drawing/2012/chart" uri="{CE6537A1-D6FC-4f65-9D91-7224C49458BB}">
+                <c15:showLeaderLines val="0"/>
+              </c:ext>
+            </c:extLst>
           </c:dLbls>
           <c:cat>
-            <c:multiLvlStrRef>
+            <c:strRef>
               <c:f>Sheet1!$A$2:$A$5</c:f>
-              <c:multiLvlStrCache>
+              <c:strCache>
                 <c:ptCount val="4"/>
-                <c:lvl>
-                  <c:pt idx="0">
-                    <c:v>Kara</c:v>
-                  </c:pt>
-                  <c:pt idx="1">
-                    <c:v>Plateaux</c:v>
-                  </c:pt>
-                  <c:pt idx="2">
-                    <c:v>Savanes</c:v>
-                  </c:pt>
-                  <c:pt idx="3">
-                    <c:v>Centrale</c:v>
-                  </c:pt>
-                </c:lvl>
-              </c:multiLvlStrCache>
-            </c:multiLvlStrRef>
+                <c:pt idx="0">
+                  <c:v>Kara</c:v>
+                </c:pt>
+                <c:pt idx="1">
+                  <c:v>Plateaux</c:v>
+                </c:pt>
+                <c:pt idx="2">
+                  <c:v>Savanes</c:v>
+                </c:pt>
+                <c:pt idx="3">
+                  <c:v>Centrale</c:v>
+                </c:pt>
+              </c:strCache>
+            </c:strRef>
           </c:cat>
           <c:val>
             <c:numRef>
@@ -2207,36 +2108,23 @@
               </c:numCache>
             </c:numRef>
           </c:val>
+          <c:extLst>
+            <c:ext xmlns:c16="http://schemas.microsoft.com/office/drawing/2014/chart" uri="{C3380CC4-5D6E-409C-BE32-E72D297353CC}">
+              <c16:uniqueId val="{00000000-2294-4D8D-ADAC-4282E3EA1E6C}"/>
+            </c:ext>
+          </c:extLst>
         </c:ser>
         <c:dLbls>
-          <c:numFmt formatCode="#,##0" sourceLinked="0"/>
-          <c:txPr>
-            <a:bodyPr/>
-            <a:lstStyle/>
-            <a:p>
-              <a:pPr>
-                <a:defRPr b="0" i="0" strike="noStrike" sz="1000" u="none">
-                  <a:solidFill>
-                    <a:srgbClr val="334155"/>
-                  </a:solidFill>
-                  <a:latin typeface="Calibri"/>
-                </a:defRPr>
-              </a:pPr>
-            </a:p>
-          </c:txPr>
           <c:showLegendKey val="0"/>
           <c:showVal val="1"/>
           <c:showCatName val="0"/>
           <c:showSerName val="0"/>
           <c:showPercent val="0"/>
           <c:showBubbleSize val="0"/>
-          <c:showLeaderLines val="0"/>
         </c:dLbls>
         <c:gapWidth val="40"/>
-        <c:overlap val="0"/>
         <c:axId val="2094734554"/>
         <c:axId val="2094734552"/>
-        <c:axId val="2094734556"/>
       </c:barChart>
       <c:catAx>
         <c:axId val="2094734554"/>
@@ -2277,6 +2165,7 @@
         <c:crosses val="autoZero"/>
         <c:auto val="1"/>
         <c:lblAlgn val="ctr"/>
+        <c:lblOffset val="100"/>
         <c:noMultiLvlLbl val="1"/>
       </c:catAx>
       <c:valAx>
@@ -2285,35 +2174,11 @@
           <c:orientation val="minMax"/>
         </c:scaling>
         <c:delete val="1"/>
-        <c:axPos val="b"/>
+        <c:axPos val="t"/>
         <c:numFmt formatCode="General" sourceLinked="0"/>
         <c:majorTickMark val="out"/>
         <c:minorTickMark val="none"/>
         <c:tickLblPos val="low"/>
-        <c:spPr>
-          <a:ln w="12700" cap="flat">
-            <a:solidFill>
-              <a:srgbClr val="888888"/>
-            </a:solidFill>
-            <a:prstDash val="solid"/>
-            <a:round/>
-          </a:ln>
-        </c:spPr>
-        <c:txPr>
-          <a:bodyPr/>
-          <a:lstStyle/>
-          <a:p>
-            <a:pPr>
-              <a:defRPr sz="1200" b="0" i="0" u="none" strike="noStrike">
-                <a:solidFill>
-                  <a:srgbClr val="000000"/>
-                </a:solidFill>
-                <a:latin typeface="Arial"/>
-              </a:defRPr>
-            </a:pPr>
-            <a:endParaRPr lang="en-US"/>
-          </a:p>
-        </c:txPr>
         <c:crossAx val="2094734554"/>
         <c:crosses val="autoZero"/>
         <c:crossBetween val="between"/>
@@ -2328,6 +2193,7 @@
     </c:plotArea>
     <c:plotVisOnly val="1"/>
     <c:dispBlanksAs val="span"/>
+    <c:showDLblsOverMax val="1"/>
   </c:chart>
   <c:spPr>
     <a:noFill/>
@@ -2343,9 +2209,11 @@
 </file>
 
 <file path=ppt/charts/chart7.xml><?xml version="1.0" encoding="utf-8"?>
-<c:chartSpace xmlns:c="http://schemas.openxmlformats.org/drawingml/2006/chart" xmlns:a="http://schemas.openxmlformats.org/drawingml/2006/main" xmlns:r="http://schemas.openxmlformats.org/officeDocument/2006/relationships">
+<c:chartSpace xmlns:c="http://schemas.openxmlformats.org/drawingml/2006/chart" xmlns:a="http://schemas.openxmlformats.org/drawingml/2006/main" xmlns:r="http://schemas.openxmlformats.org/officeDocument/2006/relationships" xmlns:c16r2="http://schemas.microsoft.com/office/drawing/2015/06/chart">
   <c:date1904 val="0"/>
+  <c:lang val="fr-FR"/>
   <c:roundedCorners val="1"/>
+  <c:style val="2"/>
   <c:chart>
     <c:autoTitleDeleted val="1"/>
     <c:plotArea>
@@ -2375,40 +2243,15 @@
             <a:effectLst/>
           </c:spPr>
           <c:invertIfNegative val="0"/>
-          <c:dLbls>
-            <c:numFmt formatCode="0.0" sourceLinked="0"/>
-            <c:txPr>
-              <a:bodyPr/>
-              <a:lstStyle/>
-              <a:p>
-                <a:pPr>
-                  <a:defRPr b="0" i="0" strike="noStrike" sz="950" u="none">
-                    <a:solidFill>
-                      <a:srgbClr val="334155"/>
-                    </a:solidFill>
-                    <a:latin typeface="Calibri"/>
-                  </a:defRPr>
-                </a:pPr>
-              </a:p>
-            </c:txPr>
-            <c:showLegendKey val="0"/>
-            <c:showVal val="1"/>
-            <c:showCatName val="0"/>
-            <c:showSerName val="0"/>
-            <c:showPercent val="0"/>
-            <c:showBubbleSize val="0"/>
-            <c:showLeaderLines val="0"/>
-          </c:dLbls>
           <c:dPt>
             <c:idx val="0"/>
             <c:invertIfNegative val="0"/>
             <c:bubble3D val="0"/>
-            <c:spPr>
-              <a:solidFill>
-                <a:srgbClr val="F28C28"/>
-              </a:solidFill>
-              <a:effectLst/>
-            </c:spPr>
+            <c:extLst>
+              <c:ext xmlns:c16="http://schemas.microsoft.com/office/drawing/2014/chart" uri="{C3380CC4-5D6E-409C-BE32-E72D297353CC}">
+                <c16:uniqueId val="{00000001-09AF-4ADA-940A-B434429607E1}"/>
+              </c:ext>
+            </c:extLst>
           </c:dPt>
           <c:dPt>
             <c:idx val="1"/>
@@ -2420,17 +2263,21 @@
               </a:solidFill>
               <a:effectLst/>
             </c:spPr>
+            <c:extLst>
+              <c:ext xmlns:c16="http://schemas.microsoft.com/office/drawing/2014/chart" uri="{C3380CC4-5D6E-409C-BE32-E72D297353CC}">
+                <c16:uniqueId val="{00000003-09AF-4ADA-940A-B434429607E1}"/>
+              </c:ext>
+            </c:extLst>
           </c:dPt>
           <c:dPt>
             <c:idx val="2"/>
             <c:invertIfNegative val="0"/>
             <c:bubble3D val="0"/>
-            <c:spPr>
-              <a:solidFill>
-                <a:srgbClr val="F28C28"/>
-              </a:solidFill>
-              <a:effectLst/>
-            </c:spPr>
+            <c:extLst>
+              <c:ext xmlns:c16="http://schemas.microsoft.com/office/drawing/2014/chart" uri="{C3380CC4-5D6E-409C-BE32-E72D297353CC}">
+                <c16:uniqueId val="{00000005-09AF-4ADA-940A-B434429607E1}"/>
+              </c:ext>
+            </c:extLst>
           </c:dPt>
           <c:dPt>
             <c:idx val="3"/>
@@ -2442,112 +2289,146 @@
               </a:solidFill>
               <a:effectLst/>
             </c:spPr>
+            <c:extLst>
+              <c:ext xmlns:c16="http://schemas.microsoft.com/office/drawing/2014/chart" uri="{C3380CC4-5D6E-409C-BE32-E72D297353CC}">
+                <c16:uniqueId val="{00000007-09AF-4ADA-940A-B434429607E1}"/>
+              </c:ext>
+            </c:extLst>
           </c:dPt>
           <c:dPt>
             <c:idx val="4"/>
             <c:invertIfNegative val="0"/>
             <c:bubble3D val="0"/>
-            <c:spPr>
-              <a:solidFill>
-                <a:srgbClr val="F28C28"/>
-              </a:solidFill>
-              <a:effectLst/>
-            </c:spPr>
+            <c:extLst>
+              <c:ext xmlns:c16="http://schemas.microsoft.com/office/drawing/2014/chart" uri="{C3380CC4-5D6E-409C-BE32-E72D297353CC}">
+                <c16:uniqueId val="{00000009-09AF-4ADA-940A-B434429607E1}"/>
+              </c:ext>
+            </c:extLst>
           </c:dPt>
           <c:dPt>
             <c:idx val="5"/>
             <c:invertIfNegative val="0"/>
             <c:bubble3D val="0"/>
-            <c:spPr>
-              <a:solidFill>
-                <a:srgbClr val="F28C28"/>
-              </a:solidFill>
-              <a:effectLst/>
-            </c:spPr>
+            <c:extLst>
+              <c:ext xmlns:c16="http://schemas.microsoft.com/office/drawing/2014/chart" uri="{C3380CC4-5D6E-409C-BE32-E72D297353CC}">
+                <c16:uniqueId val="{0000000B-09AF-4ADA-940A-B434429607E1}"/>
+              </c:ext>
+            </c:extLst>
           </c:dPt>
           <c:dPt>
             <c:idx val="6"/>
             <c:invertIfNegative val="0"/>
             <c:bubble3D val="0"/>
-            <c:spPr>
-              <a:solidFill>
-                <a:srgbClr val="F28C28"/>
-              </a:solidFill>
-              <a:effectLst/>
-            </c:spPr>
+            <c:extLst>
+              <c:ext xmlns:c16="http://schemas.microsoft.com/office/drawing/2014/chart" uri="{C3380CC4-5D6E-409C-BE32-E72D297353CC}">
+                <c16:uniqueId val="{0000000D-09AF-4ADA-940A-B434429607E1}"/>
+              </c:ext>
+            </c:extLst>
           </c:dPt>
           <c:dPt>
             <c:idx val="7"/>
             <c:invertIfNegative val="0"/>
             <c:bubble3D val="0"/>
-            <c:spPr>
-              <a:solidFill>
-                <a:srgbClr val="F28C28"/>
-              </a:solidFill>
-              <a:effectLst/>
-            </c:spPr>
+            <c:extLst>
+              <c:ext xmlns:c16="http://schemas.microsoft.com/office/drawing/2014/chart" uri="{C3380CC4-5D6E-409C-BE32-E72D297353CC}">
+                <c16:uniqueId val="{0000000F-09AF-4ADA-940A-B434429607E1}"/>
+              </c:ext>
+            </c:extLst>
           </c:dPt>
           <c:dPt>
             <c:idx val="8"/>
             <c:invertIfNegative val="0"/>
             <c:bubble3D val="0"/>
-            <c:spPr>
-              <a:solidFill>
-                <a:srgbClr val="F28C28"/>
-              </a:solidFill>
-              <a:effectLst/>
-            </c:spPr>
+            <c:extLst>
+              <c:ext xmlns:c16="http://schemas.microsoft.com/office/drawing/2014/chart" uri="{C3380CC4-5D6E-409C-BE32-E72D297353CC}">
+                <c16:uniqueId val="{00000011-09AF-4ADA-940A-B434429607E1}"/>
+              </c:ext>
+            </c:extLst>
           </c:dPt>
           <c:dPt>
             <c:idx val="9"/>
             <c:invertIfNegative val="0"/>
             <c:bubble3D val="0"/>
+            <c:extLst>
+              <c:ext xmlns:c16="http://schemas.microsoft.com/office/drawing/2014/chart" uri="{C3380CC4-5D6E-409C-BE32-E72D297353CC}">
+                <c16:uniqueId val="{00000013-09AF-4ADA-940A-B434429607E1}"/>
+              </c:ext>
+            </c:extLst>
+          </c:dPt>
+          <c:dLbls>
+            <c:numFmt formatCode="0.0" sourceLinked="0"/>
             <c:spPr>
-              <a:solidFill>
-                <a:srgbClr val="F28C28"/>
-              </a:solidFill>
+              <a:noFill/>
+              <a:ln>
+                <a:noFill/>
+              </a:ln>
               <a:effectLst/>
             </c:spPr>
-          </c:dPt>
+            <c:txPr>
+              <a:bodyPr/>
+              <a:lstStyle/>
+              <a:p>
+                <a:pPr>
+                  <a:defRPr sz="950" b="0" i="0" u="none" strike="noStrike">
+                    <a:solidFill>
+                      <a:srgbClr val="334155"/>
+                    </a:solidFill>
+                    <a:latin typeface="Calibri"/>
+                  </a:defRPr>
+                </a:pPr>
+                <a:endParaRPr lang="fr-FR"/>
+              </a:p>
+            </c:txPr>
+            <c:showLegendKey val="0"/>
+            <c:showVal val="1"/>
+            <c:showCatName val="0"/>
+            <c:showSerName val="0"/>
+            <c:showPercent val="0"/>
+            <c:showBubbleSize val="0"/>
+            <c:showLeaderLines val="0"/>
+            <c:extLst>
+              <c:ext xmlns:c15="http://schemas.microsoft.com/office/drawing/2012/chart" uri="{CE6537A1-D6FC-4f65-9D91-7224C49458BB}">
+                <c15:showLeaderLines val="0"/>
+              </c:ext>
+            </c:extLst>
+          </c:dLbls>
           <c:cat>
-            <c:multiLvlStrRef>
+            <c:strRef>
               <c:f>Sheet1!$A$2:$A$11</c:f>
-              <c:multiLvlStrCache>
+              <c:strCache>
                 <c:ptCount val="10"/>
-                <c:lvl>
-                  <c:pt idx="0">
-                    <c:v>Dankpen 3</c:v>
-                  </c:pt>
-                  <c:pt idx="1">
-                    <c:v>Tone 4</c:v>
-                  </c:pt>
-                  <c:pt idx="2">
-                    <c:v>Keran 2</c:v>
-                  </c:pt>
-                  <c:pt idx="3">
-                    <c:v>Haho 3</c:v>
-                  </c:pt>
-                  <c:pt idx="4">
-                    <c:v>Kpendjal 1</c:v>
-                  </c:pt>
-                  <c:pt idx="5">
-                    <c:v>Blitta 3</c:v>
-                  </c:pt>
-                  <c:pt idx="6">
-                    <c:v>Tone 2</c:v>
-                  </c:pt>
-                  <c:pt idx="7">
-                    <c:v>Kpendjal 2</c:v>
-                  </c:pt>
-                  <c:pt idx="8">
-                    <c:v>Keran 3</c:v>
-                  </c:pt>
-                  <c:pt idx="9">
-                    <c:v>Akebou 2</c:v>
-                  </c:pt>
-                </c:lvl>
-              </c:multiLvlStrCache>
-            </c:multiLvlStrRef>
+                <c:pt idx="0">
+                  <c:v>Dankpen 3</c:v>
+                </c:pt>
+                <c:pt idx="1">
+                  <c:v>Tone 4</c:v>
+                </c:pt>
+                <c:pt idx="2">
+                  <c:v>Keran 2</c:v>
+                </c:pt>
+                <c:pt idx="3">
+                  <c:v>Haho 3</c:v>
+                </c:pt>
+                <c:pt idx="4">
+                  <c:v>Kpendjal 1</c:v>
+                </c:pt>
+                <c:pt idx="5">
+                  <c:v>Blitta 3</c:v>
+                </c:pt>
+                <c:pt idx="6">
+                  <c:v>Tone 2</c:v>
+                </c:pt>
+                <c:pt idx="7">
+                  <c:v>Kpendjal 2</c:v>
+                </c:pt>
+                <c:pt idx="8">
+                  <c:v>Keran 3</c:v>
+                </c:pt>
+                <c:pt idx="9">
+                  <c:v>Akebou 2</c:v>
+                </c:pt>
+              </c:strCache>
+            </c:strRef>
           </c:cat>
           <c:val>
             <c:numRef>
@@ -2583,41 +2464,28 @@
                   <c:v>79.7</c:v>
                 </c:pt>
                 <c:pt idx="9">
-                  <c:v>79.6</c:v>
+                  <c:v>79.599999999999994</c:v>
                 </c:pt>
               </c:numCache>
             </c:numRef>
           </c:val>
+          <c:extLst>
+            <c:ext xmlns:c16="http://schemas.microsoft.com/office/drawing/2014/chart" uri="{C3380CC4-5D6E-409C-BE32-E72D297353CC}">
+              <c16:uniqueId val="{00000014-09AF-4ADA-940A-B434429607E1}"/>
+            </c:ext>
+          </c:extLst>
         </c:ser>
         <c:dLbls>
-          <c:numFmt formatCode="0.0" sourceLinked="0"/>
-          <c:txPr>
-            <a:bodyPr/>
-            <a:lstStyle/>
-            <a:p>
-              <a:pPr>
-                <a:defRPr b="0" i="0" strike="noStrike" sz="950" u="none">
-                  <a:solidFill>
-                    <a:srgbClr val="334155"/>
-                  </a:solidFill>
-                  <a:latin typeface="Calibri"/>
-                </a:defRPr>
-              </a:pPr>
-            </a:p>
-          </c:txPr>
           <c:showLegendKey val="0"/>
           <c:showVal val="1"/>
           <c:showCatName val="0"/>
           <c:showSerName val="0"/>
           <c:showPercent val="0"/>
           <c:showBubbleSize val="0"/>
-          <c:showLeaderLines val="0"/>
         </c:dLbls>
         <c:gapWidth val="35"/>
-        <c:overlap val="0"/>
         <c:axId val="2094734554"/>
         <c:axId val="2094734552"/>
-        <c:axId val="2094734556"/>
       </c:barChart>
       <c:catAx>
         <c:axId val="2094734554"/>
@@ -2658,6 +2526,7 @@
         <c:crosses val="autoZero"/>
         <c:auto val="1"/>
         <c:lblAlgn val="ctr"/>
+        <c:lblOffset val="100"/>
         <c:noMultiLvlLbl val="1"/>
       </c:catAx>
       <c:valAx>
@@ -2668,35 +2537,11 @@
           <c:min val="0"/>
         </c:scaling>
         <c:delete val="1"/>
-        <c:axPos val="b"/>
+        <c:axPos val="t"/>
         <c:numFmt formatCode="General" sourceLinked="0"/>
         <c:majorTickMark val="out"/>
         <c:minorTickMark val="none"/>
         <c:tickLblPos val="low"/>
-        <c:spPr>
-          <a:ln w="12700" cap="flat">
-            <a:solidFill>
-              <a:srgbClr val="888888"/>
-            </a:solidFill>
-            <a:prstDash val="solid"/>
-            <a:round/>
-          </a:ln>
-        </c:spPr>
-        <c:txPr>
-          <a:bodyPr/>
-          <a:lstStyle/>
-          <a:p>
-            <a:pPr>
-              <a:defRPr sz="1200" b="0" i="0" u="none" strike="noStrike">
-                <a:solidFill>
-                  <a:srgbClr val="000000"/>
-                </a:solidFill>
-                <a:latin typeface="Arial"/>
-              </a:defRPr>
-            </a:pPr>
-            <a:endParaRPr lang="en-US"/>
-          </a:p>
-        </c:txPr>
         <c:crossAx val="2094734554"/>
         <c:crosses val="autoZero"/>
         <c:crossBetween val="between"/>
@@ -2711,6 +2556,7 @@
     </c:plotArea>
     <c:plotVisOnly val="1"/>
     <c:dispBlanksAs val="span"/>
+    <c:showDLblsOverMax val="1"/>
   </c:chart>
   <c:spPr>
     <a:noFill/>
@@ -2726,9 +2572,11 @@
 </file>
 
 <file path=ppt/charts/chart8.xml><?xml version="1.0" encoding="utf-8"?>
-<c:chartSpace xmlns:c="http://schemas.openxmlformats.org/drawingml/2006/chart" xmlns:a="http://schemas.openxmlformats.org/drawingml/2006/main" xmlns:r="http://schemas.openxmlformats.org/officeDocument/2006/relationships">
+<c:chartSpace xmlns:c="http://schemas.openxmlformats.org/drawingml/2006/chart" xmlns:a="http://schemas.openxmlformats.org/drawingml/2006/main" xmlns:r="http://schemas.openxmlformats.org/officeDocument/2006/relationships" xmlns:c16r2="http://schemas.microsoft.com/office/drawing/2015/06/chart">
   <c:date1904 val="0"/>
+  <c:lang val="fr-FR"/>
   <c:roundedCorners val="1"/>
+  <c:style val="2"/>
   <c:chart>
     <c:autoTitleDeleted val="1"/>
     <c:plotArea>
@@ -2759,19 +2607,27 @@
           </c:spPr>
           <c:invertIfNegative val="0"/>
           <c:dLbls>
-            <c:numFmt formatCode="# ##0" sourceLinked="0"/>
+            <c:numFmt formatCode="#\ ##0" sourceLinked="0"/>
+            <c:spPr>
+              <a:noFill/>
+              <a:ln>
+                <a:noFill/>
+              </a:ln>
+              <a:effectLst/>
+            </c:spPr>
             <c:txPr>
               <a:bodyPr/>
               <a:lstStyle/>
               <a:p>
                 <a:pPr>
-                  <a:defRPr b="0" i="0" strike="noStrike" sz="950" u="none">
+                  <a:defRPr sz="950" b="0" i="0" u="none" strike="noStrike">
                     <a:solidFill>
                       <a:srgbClr val="334155"/>
                     </a:solidFill>
                     <a:latin typeface="Calibri"/>
                   </a:defRPr>
                 </a:pPr>
+                <a:endParaRPr lang="fr-FR"/>
               </a:p>
             </c:txPr>
             <c:showLegendKey val="0"/>
@@ -2781,31 +2637,34 @@
             <c:showPercent val="0"/>
             <c:showBubbleSize val="0"/>
             <c:showLeaderLines val="0"/>
+            <c:extLst>
+              <c:ext xmlns:c15="http://schemas.microsoft.com/office/drawing/2012/chart" uri="{CE6537A1-D6FC-4f65-9D91-7224C49458BB}">
+                <c15:showLeaderLines val="0"/>
+              </c:ext>
+            </c:extLst>
           </c:dLbls>
           <c:cat>
-            <c:multiLvlStrRef>
+            <c:strRef>
               <c:f>Sheet1!$A$2:$A$6</c:f>
-              <c:multiLvlStrCache>
+              <c:strCache>
                 <c:ptCount val="5"/>
-                <c:lvl>
-                  <c:pt idx="0">
-                    <c:v>Plateaux</c:v>
-                  </c:pt>
-                  <c:pt idx="1">
-                    <c:v>Savanes</c:v>
-                  </c:pt>
-                  <c:pt idx="2">
-                    <c:v>Kara</c:v>
-                  </c:pt>
-                  <c:pt idx="3">
-                    <c:v>Centrale</c:v>
-                  </c:pt>
-                  <c:pt idx="4">
-                    <c:v>Grand Lomé</c:v>
-                  </c:pt>
-                </c:lvl>
-              </c:multiLvlStrCache>
-            </c:multiLvlStrRef>
+                <c:pt idx="0">
+                  <c:v>Plateaux</c:v>
+                </c:pt>
+                <c:pt idx="1">
+                  <c:v>Savanes</c:v>
+                </c:pt>
+                <c:pt idx="2">
+                  <c:v>Kara</c:v>
+                </c:pt>
+                <c:pt idx="3">
+                  <c:v>Centrale</c:v>
+                </c:pt>
+                <c:pt idx="4">
+                  <c:v>Grand Lomé</c:v>
+                </c:pt>
+              </c:strCache>
+            </c:strRef>
           </c:cat>
           <c:val>
             <c:numRef>
@@ -2831,36 +2690,23 @@
               </c:numCache>
             </c:numRef>
           </c:val>
+          <c:extLst>
+            <c:ext xmlns:c16="http://schemas.microsoft.com/office/drawing/2014/chart" uri="{C3380CC4-5D6E-409C-BE32-E72D297353CC}">
+              <c16:uniqueId val="{00000000-E953-4CAF-8069-046F1DF1184F}"/>
+            </c:ext>
+          </c:extLst>
         </c:ser>
         <c:dLbls>
-          <c:numFmt formatCode="# ##0" sourceLinked="0"/>
-          <c:txPr>
-            <a:bodyPr/>
-            <a:lstStyle/>
-            <a:p>
-              <a:pPr>
-                <a:defRPr b="0" i="0" strike="noStrike" sz="950" u="none">
-                  <a:solidFill>
-                    <a:srgbClr val="334155"/>
-                  </a:solidFill>
-                  <a:latin typeface="Calibri"/>
-                </a:defRPr>
-              </a:pPr>
-            </a:p>
-          </c:txPr>
           <c:showLegendKey val="0"/>
           <c:showVal val="1"/>
           <c:showCatName val="0"/>
           <c:showSerName val="0"/>
           <c:showPercent val="0"/>
           <c:showBubbleSize val="0"/>
-          <c:showLeaderLines val="0"/>
         </c:dLbls>
         <c:gapWidth val="35"/>
-        <c:overlap val="0"/>
         <c:axId val="2094734554"/>
         <c:axId val="2094734552"/>
-        <c:axId val="2094734556"/>
       </c:barChart>
       <c:catAx>
         <c:axId val="2094734554"/>
@@ -2901,6 +2747,7 @@
         <c:crosses val="autoZero"/>
         <c:auto val="1"/>
         <c:lblAlgn val="ctr"/>
+        <c:lblOffset val="100"/>
         <c:noMultiLvlLbl val="1"/>
       </c:catAx>
       <c:valAx>
@@ -2910,35 +2757,11 @@
           <c:max val="560000"/>
         </c:scaling>
         <c:delete val="1"/>
-        <c:axPos val="b"/>
+        <c:axPos val="t"/>
         <c:numFmt formatCode="General" sourceLinked="0"/>
         <c:majorTickMark val="out"/>
         <c:minorTickMark val="none"/>
         <c:tickLblPos val="low"/>
-        <c:spPr>
-          <a:ln w="12700" cap="flat">
-            <a:solidFill>
-              <a:srgbClr val="888888"/>
-            </a:solidFill>
-            <a:prstDash val="solid"/>
-            <a:round/>
-          </a:ln>
-        </c:spPr>
-        <c:txPr>
-          <a:bodyPr/>
-          <a:lstStyle/>
-          <a:p>
-            <a:pPr>
-              <a:defRPr sz="1200" b="0" i="0" u="none" strike="noStrike">
-                <a:solidFill>
-                  <a:srgbClr val="000000"/>
-                </a:solidFill>
-                <a:latin typeface="Arial"/>
-              </a:defRPr>
-            </a:pPr>
-            <a:endParaRPr lang="en-US"/>
-          </a:p>
-        </c:txPr>
         <c:crossAx val="2094734554"/>
         <c:crosses val="autoZero"/>
         <c:crossBetween val="between"/>
@@ -2953,6 +2776,7 @@
     </c:plotArea>
     <c:plotVisOnly val="1"/>
     <c:dispBlanksAs val="span"/>
+    <c:showDLblsOverMax val="1"/>
   </c:chart>
   <c:spPr>
     <a:noFill/>
@@ -2989,234 +2813,10 @@
           <a:chExt cx="0" cy="0"/>
         </a:xfrm>
       </p:grpSpPr>
-      <p:sp>
-        <p:nvSpPr>
-          <p:cNvPr id="2" name="Header Placeholder 1"/>
-          <p:cNvSpPr>
-            <a:spLocks noGrp="1"/>
-          </p:cNvSpPr>
-          <p:nvPr>
-            <p:ph type="hdr" sz="quarter"/>
-          </p:nvPr>
-        </p:nvSpPr>
-        <p:spPr>
-          <a:xfrm>
-            <a:off x="0" y="0"/>
-            <a:ext cx="2971800" cy="458788"/>
-          </a:xfrm>
-          <a:prstGeom prst="rect">
-            <a:avLst/>
-          </a:prstGeom>
-        </p:spPr>
-        <p:txBody>
-          <a:bodyPr vert="horz" lIns="91440" tIns="45720" rIns="91440" bIns="45720" rtlCol="0"/>
-          <a:lstStyle>
-            <a:lvl1pPr algn="l">
-              <a:defRPr sz="1200"/>
-            </a:lvl1pPr>
-          </a:lstStyle>
-          <a:p>
-            <a:endParaRPr lang="en-US"/>
-          </a:p>
-        </p:txBody>
-      </p:sp>
-      <p:sp>
-        <p:nvSpPr>
-          <p:cNvPr id="3" name="Date Placeholder 2"/>
-          <p:cNvSpPr>
-            <a:spLocks noGrp="1"/>
-          </p:cNvSpPr>
-          <p:nvPr>
-            <p:ph type="dt" idx="1"/>
-          </p:nvPr>
-        </p:nvSpPr>
-        <p:spPr>
-          <a:xfrm>
-            <a:off x="3884613" y="0"/>
-            <a:ext cx="2971800" cy="458788"/>
-          </a:xfrm>
-          <a:prstGeom prst="rect">
-            <a:avLst/>
-          </a:prstGeom>
-        </p:spPr>
-        <p:txBody>
-          <a:bodyPr vert="horz" lIns="91440" tIns="45720" rIns="91440" bIns="45720" rtlCol="0"/>
-          <a:lstStyle>
-            <a:lvl1pPr algn="r">
-              <a:defRPr sz="1200"/>
-            </a:lvl1pPr>
-          </a:lstStyle>
-          <a:p>
-            <a:fld id="{5282F153-3F37-0F45-9E97-73ACFA13230C}" type="datetimeFigureOut">
-              <a:rPr lang="en-US"/>
-              <a:t>7/23/19</a:t>
-            </a:fld>
-            <a:endParaRPr lang="en-US"/>
-          </a:p>
-        </p:txBody>
-      </p:sp>
-      <p:sp>
-        <p:nvSpPr>
-          <p:cNvPr id="4" name="Slide Image Placeholder 3"/>
-          <p:cNvSpPr>
-            <a:spLocks noGrp="1" noRot="1" noChangeAspect="1"/>
-          </p:cNvSpPr>
-          <p:nvPr>
-            <p:ph type="sldImg" idx="2"/>
-          </p:nvPr>
-        </p:nvSpPr>
-        <p:spPr>
-          <a:xfrm>
-            <a:off x="685800" y="1143000"/>
-            <a:ext cx="5486400" cy="3086100"/>
-          </a:xfrm>
-          <a:prstGeom prst="rect">
-            <a:avLst/>
-          </a:prstGeom>
-          <a:noFill/>
-          <a:ln w="12700">
-            <a:solidFill>
-              <a:prstClr val="black"/>
-            </a:solidFill>
-          </a:ln>
-        </p:spPr>
-        <p:txBody>
-          <a:bodyPr vert="horz" lIns="91440" tIns="45720" rIns="91440" bIns="45720" rtlCol="0" anchor="ctr"/>
-          <a:lstStyle/>
-          <a:p>
-            <a:endParaRPr lang="en-US"/>
-          </a:p>
-        </p:txBody>
-      </p:sp>
-      <p:sp>
-        <p:nvSpPr>
-          <p:cNvPr id="5" name="Notes Placeholder 4"/>
-          <p:cNvSpPr>
-            <a:spLocks noGrp="1"/>
-          </p:cNvSpPr>
-          <p:nvPr>
-            <p:ph type="body" sz="quarter" idx="3"/>
-          </p:nvPr>
-        </p:nvSpPr>
-        <p:spPr>
-          <a:xfrm>
-            <a:off x="685800" y="4400550"/>
-            <a:ext cx="5486400" cy="3600450"/>
-          </a:xfrm>
-          <a:prstGeom prst="rect">
-            <a:avLst/>
-          </a:prstGeom>
-        </p:spPr>
-        <p:txBody>
-          <a:bodyPr vert="horz" lIns="91440" tIns="45720" rIns="91440" bIns="45720" rtlCol="0"/>
-          <a:lstStyle/>
-          <a:p>
-            <a:pPr lvl="0"/>
-            <a:r>
-              <a:rPr lang="en-US"/>
-              <a:t>Click to edit Master text styles</a:t>
-            </a:r>
-          </a:p>
-          <a:p>
-            <a:pPr lvl="1"/>
-            <a:r>
-              <a:rPr lang="en-US"/>
-              <a:t>Second level</a:t>
-            </a:r>
-          </a:p>
-          <a:p>
-            <a:pPr lvl="2"/>
-            <a:r>
-              <a:rPr lang="en-US"/>
-              <a:t>Third level</a:t>
-            </a:r>
-          </a:p>
-          <a:p>
-            <a:pPr lvl="3"/>
-            <a:r>
-              <a:rPr lang="en-US"/>
-              <a:t>Fourth level</a:t>
-            </a:r>
-          </a:p>
-          <a:p>
-            <a:pPr lvl="4"/>
-            <a:r>
-              <a:rPr lang="en-US"/>
-              <a:t>Fifth level</a:t>
-            </a:r>
-          </a:p>
-        </p:txBody>
-      </p:sp>
-      <p:sp>
-        <p:nvSpPr>
-          <p:cNvPr id="6" name="Footer Placeholder 5"/>
-          <p:cNvSpPr>
-            <a:spLocks noGrp="1"/>
-          </p:cNvSpPr>
-          <p:nvPr>
-            <p:ph type="ftr" sz="quarter" idx="4"/>
-          </p:nvPr>
-        </p:nvSpPr>
-        <p:spPr>
-          <a:xfrm>
-            <a:off x="0" y="8685213"/>
-            <a:ext cx="2971800" cy="458787"/>
-          </a:xfrm>
-          <a:prstGeom prst="rect">
-            <a:avLst/>
-          </a:prstGeom>
-        </p:spPr>
-        <p:txBody>
-          <a:bodyPr vert="horz" lIns="91440" tIns="45720" rIns="91440" bIns="45720" rtlCol="0" anchor="b"/>
-          <a:lstStyle>
-            <a:lvl1pPr algn="l">
-              <a:defRPr sz="1200"/>
-            </a:lvl1pPr>
-          </a:lstStyle>
-          <a:p>
-            <a:endParaRPr lang="en-US"/>
-          </a:p>
-        </p:txBody>
-      </p:sp>
-      <p:sp>
-        <p:nvSpPr>
-          <p:cNvPr id="7" name="Slide Number Placeholder 6"/>
-          <p:cNvSpPr>
-            <a:spLocks noGrp="1"/>
-          </p:cNvSpPr>
-          <p:nvPr>
-            <p:ph type="sldNum" sz="quarter" idx="5"/>
-          </p:nvPr>
-        </p:nvSpPr>
-        <p:spPr>
-          <a:xfrm>
-            <a:off x="3884613" y="8685213"/>
-            <a:ext cx="2971800" cy="458787"/>
-          </a:xfrm>
-          <a:prstGeom prst="rect">
-            <a:avLst/>
-          </a:prstGeom>
-        </p:spPr>
-        <p:txBody>
-          <a:bodyPr vert="horz" lIns="91440" tIns="45720" rIns="91440" bIns="45720" rtlCol="0" anchor="b"/>
-          <a:lstStyle>
-            <a:lvl1pPr algn="r">
-              <a:defRPr sz="1200"/>
-            </a:lvl1pPr>
-          </a:lstStyle>
-          <a:p>
-            <a:fld id="{CE5E9CC1-C706-0F49-92D6-E571CC5EEA8F}" type="slidenum">
-              <a:rPr lang="en-US"/>
-              <a:t>‹#›</a:t>
-            </a:fld>
-            <a:endParaRPr lang="en-US"/>
-          </a:p>
-        </p:txBody>
-      </p:sp>
     </p:spTree>
     <p:extLst>
       <p:ext uri="{BB962C8B-B14F-4D97-AF65-F5344CB8AC3E}">
-        <p14:creationId xmlns:p14="http://schemas.microsoft.com/office/powerpoint/2010/main" val="1024086991"/>
+        <p14:creationId xmlns:p14="http://schemas.microsoft.com/office/powerpoint/2010/main" val="758802983"/>
       </p:ext>
     </p:extLst>
   </p:cSld>
@@ -3364,7 +2964,6 @@
               <a:rPr lang="en-US" dirty="0"/>
               <a:t>Présentation : rapport du Data Challenge Économie Numérique, Défi 2, sur le Mobile Money et l'inclusion financière au Togo.</a:t>
             </a:r>
-            <a:endParaRPr lang="en-US" dirty="0"/>
           </a:p>
         </p:txBody>
       </p:sp>
@@ -3452,7 +3051,6 @@
               <a:rPr lang="en-US" dirty="0"/>
               <a:t>Réponse à la problématique : le Mobile Money élargit fortement l'accès de proximité, mais l'accès physique n'est pas l'inclusion financière complète. Les 29 communes prioritaires concentrent les déficits. Prochaine étape : pilote R-F1 sur les communes P1, enquête TIC (R-I1) et audit (R-I5). Ouverture : 244 des 373 cantons sans établissement formel recensé.</a:t>
             </a:r>
-            <a:endParaRPr lang="en-US" dirty="0"/>
           </a:p>
         </p:txBody>
       </p:sp>
@@ -3540,7 +3138,6 @@
               <a:rPr lang="en-US" dirty="0"/>
               <a:t>Le Togo connaît une accélération d'Internet (rupture de tendance en 2015, 3,6 points par an contre 0,4 auparavant). Le mobile porte 99 % des abonnements Internet. Le Mobile Money compte 19 788 agents contre 724 établissements formels. La question centrale : quel rôle dans l'inclusion financière, et où des populations restent-elles à l'écart ?</a:t>
             </a:r>
-            <a:endParaRPr lang="en-US" dirty="0"/>
           </a:p>
         </p:txBody>
       </p:sp>
@@ -3628,7 +3225,6 @@
               <a:rPr lang="en-US" dirty="0"/>
               <a:t>Séries télécom disponibles de 2013 à 2019 uniquement : pas de données de couverture par technologie ni de 5G. Le chiffre d'affaires et l'investissement sont sectoriels, pas par opérateur.</a:t>
             </a:r>
-            <a:endParaRPr lang="en-US" dirty="0"/>
           </a:p>
         </p:txBody>
       </p:sp>
@@ -3716,7 +3312,6 @@
               <a:rPr lang="en-US" dirty="0"/>
               <a:t>Établissements retenus après audit (14 exclus car non opérationnels), export du 08/01/2025. Population : RGPH-5 2022. Absence dans la donnée ne signifie pas absence réelle sur le terrain.</a:t>
             </a:r>
-            <a:endParaRPr lang="en-US" dirty="0"/>
           </a:p>
         </p:txBody>
       </p:sp>
@@ -3804,7 +3399,6 @@
               <a:rPr lang="en-US" dirty="0"/>
               <a:t>Le contraste : 1 établissement formel pour 27,3 agents Mobile Money. 64 % des agents (12 649) proposent Moov et Togocom. Message prudent : le Mobile Money apporte de la proximité, il ne prouve pas à lui seul l'inclusion financière (usage, qualité, produits).</a:t>
             </a:r>
-            <a:endParaRPr lang="en-US" dirty="0"/>
           </a:p>
         </p:txBody>
       </p:sp>
@@ -3892,7 +3486,6 @@
               <a:rPr lang="en-US" dirty="0"/>
               <a:t>Les 22 communes « MM-only » sont les communes où aucun établissement formel n'est recensé. Le maillage Mobile Money est dit ténu quand la densité d'agents est inférieure à la moitié de la moyenne nationale. Les distances sont calculées à vol d'oiseau.</a:t>
             </a:r>
-            <a:endParaRPr lang="en-US" dirty="0"/>
           </a:p>
         </p:txBody>
       </p:sp>
@@ -3980,7 +3573,6 @@
               <a:rPr lang="en-US" dirty="0"/>
               <a:t>Pondérations vérifiées : IB = 35 % C1 + 25 % C2 + 20 % C3 + 20 % C4 (recalcul exact sur la table des communes). C3 vaut 1 pour toute commune sans établissement formel. Le niveau de Mobile Money n'entre pas dans C3 : il sert au levier numérique qui départage P1 et P2.</a:t>
             </a:r>
-            <a:endParaRPr lang="en-US" dirty="0"/>
           </a:p>
         </p:txBody>
       </p:sp>
@@ -4068,7 +3660,6 @@
               <a:rPr lang="en-US" dirty="0"/>
               <a:t>Le noyau stable (10 communes dans le top 15 dans au moins 80 % de 2 000 tirages de pondérations, loi de Dirichlet uniforme) n'est pas identique au groupe P1 : P1 est défini par l'IB et le levier numérique. Population RGPH-5 2022, services 2024-2025.</a:t>
             </a:r>
-            <a:endParaRPr lang="en-US" dirty="0"/>
           </a:p>
         </p:txBody>
       </p:sp>
@@ -4156,7 +3747,6 @@
               <a:rPr lang="en-US" dirty="0"/>
               <a:t>Budgets en FCFA, valeurs centrales avec fourchette basse-haute. Le budget de R-F2 est conditionnel à l'étude de viabilité et n'est pas inclus dans le budget ferme. Le budget de S2 (685,7 M FCFA central, 391,8 à 1 119,5 M) est celui du scénario, non la somme des lignes. Les enquêtes et audits sont ponctuels. Les cibles chiffrées sont des repères relatifs (moyenne nationale), pas des normes.</a:t>
             </a:r>
-            <a:endParaRPr lang="en-US" dirty="0"/>
           </a:p>
         </p:txBody>
       </p:sp>
@@ -4229,6 +3819,11 @@
 <file path=ppt/slideMasters/slideMaster1.xml><?xml version="1.0" encoding="utf-8"?>
 <p:sldMaster xmlns:a="http://schemas.openxmlformats.org/drawingml/2006/main" xmlns:r="http://schemas.openxmlformats.org/officeDocument/2006/relationships" xmlns:p="http://schemas.openxmlformats.org/presentationml/2006/main">
   <p:cSld>
+    <p:bg>
+      <p:bgRef idx="1001">
+        <a:schemeClr val="bg1"/>
+      </p:bgRef>
+    </p:bg>
     <p:spTree>
       <p:nvGrpSpPr>
         <p:cNvPr id="1" name=""/>
@@ -4680,7 +4275,7 @@
         </p:nvSpPr>
         <p:spPr>
           <a:xfrm>
-            <a:off x="731520" y="5074920"/>
+            <a:off x="731672" y="5467739"/>
             <a:ext cx="10728655" cy="365760"/>
           </a:xfrm>
           <a:prstGeom prst="rect">
@@ -4719,7 +4314,7 @@
         </p:nvSpPr>
         <p:spPr>
           <a:xfrm>
-            <a:off x="731520" y="5413248"/>
+            <a:off x="731672" y="5806067"/>
             <a:ext cx="10728655" cy="320040"/>
           </a:xfrm>
           <a:prstGeom prst="rect">
@@ -4848,7 +4443,7 @@
         </p:nvSpPr>
         <p:spPr>
           <a:xfrm>
-            <a:off x="731520" y="5779839"/>
+            <a:off x="731672" y="6172658"/>
             <a:ext cx="10728655" cy="618099"/>
           </a:xfrm>
           <a:prstGeom prst="rect">
@@ -4898,6 +4493,55 @@
               <a:t> 2026</a:t>
             </a:r>
             <a:endParaRPr lang="en-US" sz="1200" b="1" dirty="0">
+              <a:solidFill>
+                <a:schemeClr val="bg1"/>
+              </a:solidFill>
+            </a:endParaRPr>
+          </a:p>
+        </p:txBody>
+      </p:sp>
+      <p:sp>
+        <p:nvSpPr>
+          <p:cNvPr id="12" name="Text 3">
+            <a:extLst>
+              <a:ext uri="{FF2B5EF4-FFF2-40B4-BE49-F238E27FC236}">
+                <a16:creationId xmlns:a16="http://schemas.microsoft.com/office/drawing/2014/main" id="{946A8DBC-96E6-2BA6-B9E5-8A18660FDA36}"/>
+              </a:ext>
+            </a:extLst>
+          </p:cNvPr>
+          <p:cNvSpPr/>
+          <p:nvPr/>
+        </p:nvSpPr>
+        <p:spPr>
+          <a:xfrm>
+            <a:off x="883920" y="4857103"/>
+            <a:ext cx="10728655" cy="365760"/>
+          </a:xfrm>
+          <a:prstGeom prst="rect">
+            <a:avLst/>
+          </a:prstGeom>
+          <a:noFill/>
+          <a:ln/>
+        </p:spPr>
+        <p:txBody>
+          <a:bodyPr wrap="square" lIns="0" tIns="0" rIns="0" bIns="0" rtlCol="0" anchor="ctr"/>
+          <a:lstStyle/>
+          <a:p>
+            <a:pPr marL="0" indent="0" algn="ctr">
+              <a:buNone/>
+            </a:pPr>
+            <a:r>
+              <a:rPr lang="en-US" sz="1500" b="1" kern="0" spc="100" dirty="0">
+                <a:solidFill>
+                  <a:schemeClr val="bg1"/>
+                </a:solidFill>
+                <a:latin typeface="Calibri" pitchFamily="34" charset="0"/>
+                <a:ea typeface="Calibri" pitchFamily="34" charset="-122"/>
+                <a:cs typeface="Calibri" pitchFamily="34" charset="-120"/>
+              </a:rPr>
+              <a:t>RAPPORT DU DASHBOARD</a:t>
+            </a:r>
+            <a:endParaRPr lang="en-US" sz="1500" b="1" dirty="0">
               <a:solidFill>
                 <a:schemeClr val="bg1"/>
               </a:solidFill>
@@ -4921,6 +4565,7 @@
         <a:solidFill>
           <a:srgbClr val="0B1F33"/>
         </a:solidFill>
+        <a:effectLst/>
       </p:bgPr>
     </p:bg>
     <p:spTree>
@@ -4958,11 +4603,11 @@
           <a:bodyPr wrap="square" lIns="0" tIns="0" rIns="0" bIns="0" rtlCol="0" anchor="ctr"/>
           <a:lstStyle/>
           <a:p>
-            <a:pPr indent="0" marL="0">
-              <a:buNone/>
-            </a:pPr>
-            <a:r>
-              <a:rPr lang="en-US" sz="1050" b="1" spc="300" kern="0" dirty="0">
+            <a:pPr marL="0" indent="0">
+              <a:buNone/>
+            </a:pPr>
+            <a:r>
+              <a:rPr lang="en-US" sz="1050" b="1" kern="0" spc="300" dirty="0">
                 <a:solidFill>
                   <a:srgbClr val="FFCE00"/>
                 </a:solidFill>
@@ -4999,7 +4644,7 @@
           </a:bodyPr>
           <a:lstStyle/>
           <a:p>
-            <a:pPr indent="0" marL="0">
+            <a:pPr marL="0" indent="0">
               <a:buNone/>
             </a:pPr>
             <a:r>
@@ -5088,7 +4733,7 @@
           <a:bodyPr wrap="square" lIns="0" tIns="0" rIns="0" bIns="0" rtlCol="0" anchor="ctr"/>
           <a:lstStyle/>
           <a:p>
-            <a:pPr algn="ctr" indent="0" marL="0">
+            <a:pPr marL="0" indent="0" algn="ctr">
               <a:buNone/>
             </a:pPr>
             <a:r>
@@ -5129,7 +4774,7 @@
           </a:bodyPr>
           <a:lstStyle/>
           <a:p>
-            <a:pPr indent="0" marL="0">
+            <a:pPr marL="0" indent="0">
               <a:buNone/>
             </a:pPr>
             <a:r>
@@ -5146,7 +4791,7 @@
             <a:endParaRPr lang="en-US" sz="1300" dirty="0"/>
           </a:p>
           <a:p>
-            <a:pPr indent="0" marL="0">
+            <a:pPr marL="0" indent="0">
               <a:buNone/>
             </a:pPr>
             <a:r>
@@ -5235,7 +4880,7 @@
           <a:bodyPr wrap="square" lIns="0" tIns="0" rIns="0" bIns="0" rtlCol="0" anchor="ctr"/>
           <a:lstStyle/>
           <a:p>
-            <a:pPr algn="ctr" indent="0" marL="0">
+            <a:pPr marL="0" indent="0" algn="ctr">
               <a:buNone/>
             </a:pPr>
             <a:r>
@@ -5276,7 +4921,7 @@
           </a:bodyPr>
           <a:lstStyle/>
           <a:p>
-            <a:pPr indent="0" marL="0">
+            <a:pPr marL="0" indent="0">
               <a:buNone/>
             </a:pPr>
             <a:r>
@@ -5293,7 +4938,7 @@
             <a:endParaRPr lang="en-US" sz="1300" dirty="0"/>
           </a:p>
           <a:p>
-            <a:pPr indent="0" marL="0">
+            <a:pPr marL="0" indent="0">
               <a:buNone/>
             </a:pPr>
             <a:r>
@@ -5382,7 +5027,7 @@
           <a:bodyPr wrap="square" lIns="0" tIns="0" rIns="0" bIns="0" rtlCol="0" anchor="ctr"/>
           <a:lstStyle/>
           <a:p>
-            <a:pPr algn="ctr" indent="0" marL="0">
+            <a:pPr marL="0" indent="0" algn="ctr">
               <a:buNone/>
             </a:pPr>
             <a:r>
@@ -5423,7 +5068,7 @@
           </a:bodyPr>
           <a:lstStyle/>
           <a:p>
-            <a:pPr indent="0" marL="0">
+            <a:pPr marL="0" indent="0">
               <a:buNone/>
             </a:pPr>
             <a:r>
@@ -5440,7 +5085,7 @@
             <a:endParaRPr lang="en-US" sz="1300" dirty="0"/>
           </a:p>
           <a:p>
-            <a:pPr indent="0" marL="0">
+            <a:pPr marL="0" indent="0">
               <a:buNone/>
             </a:pPr>
             <a:r>
@@ -5529,7 +5174,7 @@
           <a:bodyPr wrap="square" lIns="0" tIns="0" rIns="0" bIns="0" rtlCol="0" anchor="ctr"/>
           <a:lstStyle/>
           <a:p>
-            <a:pPr algn="ctr" indent="0" marL="0">
+            <a:pPr marL="0" indent="0" algn="ctr">
               <a:buNone/>
             </a:pPr>
             <a:r>
@@ -5570,7 +5215,7 @@
           </a:bodyPr>
           <a:lstStyle/>
           <a:p>
-            <a:pPr indent="0" marL="0">
+            <a:pPr marL="0" indent="0">
               <a:buNone/>
             </a:pPr>
             <a:r>
@@ -5587,7 +5232,7 @@
             <a:endParaRPr lang="en-US" sz="1300" dirty="0"/>
           </a:p>
           <a:p>
-            <a:pPr indent="0" marL="0">
+            <a:pPr marL="0" indent="0">
               <a:buNone/>
             </a:pPr>
             <a:r>
@@ -5676,7 +5321,7 @@
           <a:bodyPr wrap="square" lIns="0" tIns="0" rIns="0" bIns="0" rtlCol="0" anchor="ctr"/>
           <a:lstStyle/>
           <a:p>
-            <a:pPr algn="ctr" indent="0" marL="0">
+            <a:pPr marL="0" indent="0" algn="ctr">
               <a:buNone/>
             </a:pPr>
             <a:r>
@@ -5717,7 +5362,7 @@
           </a:bodyPr>
           <a:lstStyle/>
           <a:p>
-            <a:pPr indent="0" marL="0">
+            <a:pPr marL="0" indent="0">
               <a:buNone/>
             </a:pPr>
             <a:r>
@@ -5734,7 +5379,7 @@
             <a:endParaRPr lang="en-US" sz="1300" dirty="0"/>
           </a:p>
           <a:p>
-            <a:pPr indent="0" marL="0">
+            <a:pPr marL="0" indent="0">
               <a:buNone/>
             </a:pPr>
             <a:r>
@@ -5800,7 +5445,7 @@
           </a:bodyPr>
           <a:lstStyle/>
           <a:p>
-            <a:pPr indent="0" marL="0">
+            <a:pPr marL="0" indent="0">
               <a:buNone/>
             </a:pPr>
             <a:r>
@@ -5864,11 +5509,11 @@
           <a:bodyPr wrap="square" lIns="0" tIns="0" rIns="0" bIns="0" rtlCol="0" anchor="ctr"/>
           <a:lstStyle/>
           <a:p>
-            <a:pPr indent="0" marL="0">
-              <a:buNone/>
-            </a:pPr>
-            <a:r>
-              <a:rPr lang="en-US" sz="1000" b="1" spc="200" kern="0" dirty="0">
+            <a:pPr marL="0" indent="0">
+              <a:buNone/>
+            </a:pPr>
+            <a:r>
+              <a:rPr lang="en-US" sz="1000" b="1" kern="0" spc="200" dirty="0">
                 <a:solidFill>
                   <a:srgbClr val="FFCE00"/>
                 </a:solidFill>
@@ -6011,7 +5656,7 @@
           <a:bodyPr wrap="square" lIns="0" tIns="0" rIns="0" bIns="0" rtlCol="0" anchor="ctr"/>
           <a:lstStyle/>
           <a:p>
-            <a:pPr indent="0" marL="0">
+            <a:pPr marL="0" indent="0">
               <a:buNone/>
             </a:pPr>
             <a:r>
@@ -6050,7 +5695,7 @@
           <a:bodyPr wrap="square" lIns="0" tIns="0" rIns="0" bIns="0" rtlCol="0" anchor="ctr"/>
           <a:lstStyle/>
           <a:p>
-            <a:pPr algn="r" indent="0" marL="0">
+            <a:pPr marL="0" indent="0" algn="r">
               <a:buNone/>
             </a:pPr>
             <a:r>
@@ -6084,6 +5729,7 @@
         <a:solidFill>
           <a:srgbClr val="F5F7FA"/>
         </a:solidFill>
+        <a:effectLst/>
       </p:bgPr>
     </p:bg>
     <p:spTree>
@@ -6121,11 +5767,11 @@
           <a:bodyPr wrap="square" lIns="0" tIns="0" rIns="0" bIns="0" rtlCol="0" anchor="ctr"/>
           <a:lstStyle/>
           <a:p>
-            <a:pPr indent="0" marL="0">
-              <a:buNone/>
-            </a:pPr>
-            <a:r>
-              <a:rPr lang="en-US" sz="1050" b="1" spc="300" kern="0" dirty="0">
+            <a:pPr marL="0" indent="0">
+              <a:buNone/>
+            </a:pPr>
+            <a:r>
+              <a:rPr lang="en-US" sz="1050" b="1" kern="0" spc="300" dirty="0">
                 <a:solidFill>
                   <a:srgbClr val="006A4E"/>
                 </a:solidFill>
@@ -6162,7 +5808,7 @@
           </a:bodyPr>
           <a:lstStyle/>
           <a:p>
-            <a:pPr indent="0" marL="0">
+            <a:pPr marL="0" indent="0">
               <a:buNone/>
             </a:pPr>
             <a:r>
@@ -6201,7 +5847,7 @@
           <a:bodyPr wrap="square" lIns="0" tIns="0" rIns="0" bIns="0" rtlCol="0" anchor="ctr"/>
           <a:lstStyle/>
           <a:p>
-            <a:pPr indent="0" marL="0">
+            <a:pPr marL="0" indent="0">
               <a:buNone/>
             </a:pPr>
             <a:r>
@@ -6240,7 +5886,7 @@
           <a:bodyPr wrap="square" lIns="0" tIns="0" rIns="0" bIns="0" rtlCol="0" anchor="ctr"/>
           <a:lstStyle/>
           <a:p>
-            <a:pPr algn="r" indent="0" marL="0">
+            <a:pPr marL="0" indent="0" algn="r">
               <a:buNone/>
             </a:pPr>
             <a:r>
@@ -6282,7 +5928,7 @@
             <a:prstDash val="solid"/>
           </a:ln>
           <a:effectLst>
-            <a:outerShdw sx="100000" sy="100000" kx="0" ky="0" algn="bl" rotWithShape="0" blurRad="76200" dist="19050" dir="5400000">
+            <a:outerShdw blurRad="76200" dist="19050" dir="5400000" algn="bl" rotWithShape="0">
               <a:srgbClr val="0B1F33">
                 <a:alpha val="10000"/>
               </a:srgbClr>
@@ -6311,7 +5957,7 @@
           <a:bodyPr wrap="square" lIns="0" tIns="0" rIns="0" bIns="0" rtlCol="0" anchor="ctr"/>
           <a:lstStyle/>
           <a:p>
-            <a:pPr indent="0" marL="0">
+            <a:pPr marL="0" indent="0">
               <a:buNone/>
             </a:pPr>
             <a:r>
@@ -6331,7 +5977,7 @@
       </p:sp>
       <p:graphicFrame>
         <p:nvGraphicFramePr>
-          <p:cNvPr id="8" name="Chart 0" descr=""/>
+          <p:cNvPr id="8" name="Chart 0"/>
           <p:cNvGraphicFramePr/>
           <p:nvPr/>
         </p:nvGraphicFramePr>
@@ -6339,9 +5985,9 @@
           <a:off x="548640" y="1810512"/>
           <a:ext cx="5760720" cy="2743200"/>
         </p:xfrm>
-        <a:graphic xmlns:a="http://schemas.openxmlformats.org/drawingml/2006/main">
+        <a:graphic>
           <a:graphicData uri="http://schemas.openxmlformats.org/drawingml/2006/chart">
-            <c:chart xmlns:c="http://schemas.openxmlformats.org/drawingml/2006/chart" r:id="rId1"/>
+            <c:chart xmlns:c="http://schemas.openxmlformats.org/drawingml/2006/chart" xmlns:r="http://schemas.openxmlformats.org/officeDocument/2006/relationships" r:id="rId3"/>
           </a:graphicData>
         </a:graphic>
       </p:graphicFrame>
@@ -6366,7 +6012,7 @@
           <a:bodyPr wrap="square" lIns="0" tIns="0" rIns="0" bIns="0" rtlCol="0" anchor="ctr"/>
           <a:lstStyle/>
           <a:p>
-            <a:pPr algn="r" indent="0" marL="0">
+            <a:pPr marL="0" indent="0" algn="r">
               <a:buNone/>
             </a:pPr>
             <a:r>
@@ -6405,7 +6051,7 @@
           <a:bodyPr wrap="square" lIns="0" tIns="0" rIns="0" bIns="0" rtlCol="0" anchor="ctr"/>
           <a:lstStyle/>
           <a:p>
-            <a:pPr algn="r" indent="0" marL="0">
+            <a:pPr marL="0" indent="0" algn="r">
               <a:buNone/>
             </a:pPr>
             <a:r>
@@ -6447,7 +6093,7 @@
             <a:prstDash val="solid"/>
           </a:ln>
           <a:effectLst>
-            <a:outerShdw sx="100000" sy="100000" kx="0" ky="0" algn="bl" rotWithShape="0" blurRad="76200" dist="19050" dir="5400000">
+            <a:outerShdw blurRad="76200" dist="19050" dir="5400000" algn="bl" rotWithShape="0">
               <a:srgbClr val="0B1F33">
                 <a:alpha val="10000"/>
               </a:srgbClr>
@@ -6478,7 +6124,7 @@
           </a:bodyPr>
           <a:lstStyle/>
           <a:p>
-            <a:pPr indent="0" marL="0">
+            <a:pPr marL="0" indent="0">
               <a:buNone/>
             </a:pPr>
             <a:r>
@@ -6519,7 +6165,7 @@
           </a:bodyPr>
           <a:lstStyle/>
           <a:p>
-            <a:pPr indent="0" marL="0">
+            <a:pPr marL="0" indent="0">
               <a:buNone/>
             </a:pPr>
             <a:r>
@@ -6561,7 +6207,7 @@
             <a:prstDash val="solid"/>
           </a:ln>
           <a:effectLst>
-            <a:outerShdw sx="100000" sy="100000" kx="0" ky="0" algn="bl" rotWithShape="0" blurRad="76200" dist="19050" dir="5400000">
+            <a:outerShdw blurRad="76200" dist="19050" dir="5400000" algn="bl" rotWithShape="0">
               <a:srgbClr val="0B1F33">
                 <a:alpha val="10000"/>
               </a:srgbClr>
@@ -6592,7 +6238,7 @@
           </a:bodyPr>
           <a:lstStyle/>
           <a:p>
-            <a:pPr indent="0" marL="0">
+            <a:pPr marL="0" indent="0">
               <a:buNone/>
             </a:pPr>
             <a:r>
@@ -6633,7 +6279,7 @@
           </a:bodyPr>
           <a:lstStyle/>
           <a:p>
-            <a:pPr indent="0" marL="0">
+            <a:pPr marL="0" indent="0">
               <a:buNone/>
             </a:pPr>
             <a:r>
@@ -6675,7 +6321,7 @@
             <a:prstDash val="solid"/>
           </a:ln>
           <a:effectLst>
-            <a:outerShdw sx="100000" sy="100000" kx="0" ky="0" algn="bl" rotWithShape="0" blurRad="76200" dist="19050" dir="5400000">
+            <a:outerShdw blurRad="76200" dist="19050" dir="5400000" algn="bl" rotWithShape="0">
               <a:srgbClr val="0B1F33">
                 <a:alpha val="10000"/>
               </a:srgbClr>
@@ -6706,7 +6352,7 @@
           </a:bodyPr>
           <a:lstStyle/>
           <a:p>
-            <a:pPr indent="0" marL="0">
+            <a:pPr marL="0" indent="0">
               <a:buNone/>
             </a:pPr>
             <a:r>
@@ -6747,7 +6393,7 @@
           </a:bodyPr>
           <a:lstStyle/>
           <a:p>
-            <a:pPr indent="0" marL="0">
+            <a:pPr marL="0" indent="0">
               <a:buNone/>
             </a:pPr>
             <a:r>
@@ -6789,7 +6435,7 @@
             <a:prstDash val="solid"/>
           </a:ln>
           <a:effectLst>
-            <a:outerShdw sx="100000" sy="100000" kx="0" ky="0" algn="bl" rotWithShape="0" blurRad="76200" dist="19050" dir="5400000">
+            <a:outerShdw blurRad="76200" dist="19050" dir="5400000" algn="bl" rotWithShape="0">
               <a:srgbClr val="0B1F33">
                 <a:alpha val="10000"/>
               </a:srgbClr>
@@ -6820,7 +6466,7 @@
           </a:bodyPr>
           <a:lstStyle/>
           <a:p>
-            <a:pPr indent="0" marL="0">
+            <a:pPr marL="0" indent="0">
               <a:buNone/>
             </a:pPr>
             <a:r>
@@ -6861,7 +6507,7 @@
           </a:bodyPr>
           <a:lstStyle/>
           <a:p>
-            <a:pPr indent="0" marL="0">
+            <a:pPr marL="0" indent="0">
               <a:buNone/>
             </a:pPr>
             <a:r>
@@ -6927,11 +6573,11 @@
           </a:bodyPr>
           <a:lstStyle/>
           <a:p>
-            <a:pPr indent="0" marL="0">
-              <a:buNone/>
-            </a:pPr>
-            <a:r>
-              <a:rPr lang="en-US" sz="1050" b="1" spc="200" kern="0" dirty="0">
+            <a:pPr marL="0" indent="0">
+              <a:buNone/>
+            </a:pPr>
+            <a:r>
+              <a:rPr lang="en-US" sz="1050" b="1" kern="0" spc="200" dirty="0">
                 <a:solidFill>
                   <a:srgbClr val="FFCE00"/>
                 </a:solidFill>
@@ -6941,9 +6587,6 @@
               </a:rPr>
               <a:t>PROBLÉMATIQUE  </a:t>
             </a:r>
-            <a:pPr indent="0" marL="0">
-              <a:buNone/>
-            </a:pPr>
             <a:r>
               <a:rPr lang="en-US" sz="1300" b="1" dirty="0">
                 <a:solidFill>
@@ -6983,7 +6626,7 @@
             <a:prstDash val="solid"/>
           </a:ln>
           <a:effectLst>
-            <a:outerShdw sx="100000" sy="100000" kx="0" ky="0" algn="bl" rotWithShape="0" blurRad="76200" dist="19050" dir="5400000">
+            <a:outerShdw blurRad="76200" dist="19050" dir="5400000" algn="bl" rotWithShape="0">
               <a:srgbClr val="0B1F33">
                 <a:alpha val="10000"/>
               </a:srgbClr>
@@ -7012,11 +6655,11 @@
           <a:bodyPr wrap="square" lIns="0" tIns="0" rIns="0" bIns="0" rtlCol="0" anchor="ctr"/>
           <a:lstStyle/>
           <a:p>
-            <a:pPr indent="0" marL="0">
-              <a:buNone/>
-            </a:pPr>
-            <a:r>
-              <a:rPr lang="en-US" sz="900" b="1" spc="200" kern="0" dirty="0">
+            <a:pPr marL="0" indent="0">
+              <a:buNone/>
+            </a:pPr>
+            <a:r>
+              <a:rPr lang="en-US" sz="900" b="1" kern="0" spc="200" dirty="0">
                 <a:solidFill>
                   <a:srgbClr val="0E9F6E"/>
                 </a:solidFill>
@@ -7053,7 +6696,7 @@
           </a:bodyPr>
           <a:lstStyle/>
           <a:p>
-            <a:pPr indent="0" marL="0">
+            <a:pPr marL="0" indent="0">
               <a:buNone/>
             </a:pPr>
             <a:r>
@@ -7095,7 +6738,7 @@
             <a:prstDash val="solid"/>
           </a:ln>
           <a:effectLst>
-            <a:outerShdw sx="100000" sy="100000" kx="0" ky="0" algn="bl" rotWithShape="0" blurRad="76200" dist="19050" dir="5400000">
+            <a:outerShdw blurRad="76200" dist="19050" dir="5400000" algn="bl" rotWithShape="0">
               <a:srgbClr val="0B1F33">
                 <a:alpha val="10000"/>
               </a:srgbClr>
@@ -7124,11 +6767,11 @@
           <a:bodyPr wrap="square" lIns="0" tIns="0" rIns="0" bIns="0" rtlCol="0" anchor="ctr"/>
           <a:lstStyle/>
           <a:p>
-            <a:pPr indent="0" marL="0">
-              <a:buNone/>
-            </a:pPr>
-            <a:r>
-              <a:rPr lang="en-US" sz="900" b="1" spc="200" kern="0" dirty="0">
+            <a:pPr marL="0" indent="0">
+              <a:buNone/>
+            </a:pPr>
+            <a:r>
+              <a:rPr lang="en-US" sz="900" b="1" kern="0" spc="200" dirty="0">
                 <a:solidFill>
                   <a:srgbClr val="F28C28"/>
                 </a:solidFill>
@@ -7165,7 +6808,7 @@
           </a:bodyPr>
           <a:lstStyle/>
           <a:p>
-            <a:pPr indent="0" marL="0">
+            <a:pPr marL="0" indent="0">
               <a:buNone/>
             </a:pPr>
             <a:r>
@@ -7207,7 +6850,7 @@
             <a:prstDash val="solid"/>
           </a:ln>
           <a:effectLst>
-            <a:outerShdw sx="100000" sy="100000" kx="0" ky="0" algn="bl" rotWithShape="0" blurRad="76200" dist="19050" dir="5400000">
+            <a:outerShdw blurRad="76200" dist="19050" dir="5400000" algn="bl" rotWithShape="0">
               <a:srgbClr val="0B1F33">
                 <a:alpha val="10000"/>
               </a:srgbClr>
@@ -7236,11 +6879,11 @@
           <a:bodyPr wrap="square" lIns="0" tIns="0" rIns="0" bIns="0" rtlCol="0" anchor="ctr"/>
           <a:lstStyle/>
           <a:p>
-            <a:pPr indent="0" marL="0">
-              <a:buNone/>
-            </a:pPr>
-            <a:r>
-              <a:rPr lang="en-US" sz="900" b="1" spc="200" kern="0" dirty="0">
+            <a:pPr marL="0" indent="0">
+              <a:buNone/>
+            </a:pPr>
+            <a:r>
+              <a:rPr lang="en-US" sz="900" b="1" kern="0" spc="200" dirty="0">
                 <a:solidFill>
                   <a:srgbClr val="0B1F33"/>
                 </a:solidFill>
@@ -7277,7 +6920,7 @@
           </a:bodyPr>
           <a:lstStyle/>
           <a:p>
-            <a:pPr indent="0" marL="0">
+            <a:pPr marL="0" indent="0">
               <a:buNone/>
             </a:pPr>
             <a:r>
@@ -7311,6 +6954,7 @@
         <a:solidFill>
           <a:srgbClr val="F5F7FA"/>
         </a:solidFill>
+        <a:effectLst/>
       </p:bgPr>
     </p:bg>
     <p:spTree>
@@ -7348,11 +6992,11 @@
           <a:bodyPr wrap="square" lIns="0" tIns="0" rIns="0" bIns="0" rtlCol="0" anchor="ctr"/>
           <a:lstStyle/>
           <a:p>
-            <a:pPr indent="0" marL="0">
-              <a:buNone/>
-            </a:pPr>
-            <a:r>
-              <a:rPr lang="en-US" sz="1050" b="1" spc="300" kern="0" dirty="0">
+            <a:pPr marL="0" indent="0">
+              <a:buNone/>
+            </a:pPr>
+            <a:r>
+              <a:rPr lang="en-US" sz="1050" b="1" kern="0" spc="300" dirty="0">
                 <a:solidFill>
                   <a:srgbClr val="006A4E"/>
                 </a:solidFill>
@@ -7389,7 +7033,7 @@
           </a:bodyPr>
           <a:lstStyle/>
           <a:p>
-            <a:pPr indent="0" marL="0">
+            <a:pPr marL="0" indent="0">
               <a:buNone/>
             </a:pPr>
             <a:r>
@@ -7428,7 +7072,7 @@
           <a:bodyPr wrap="square" lIns="0" tIns="0" rIns="0" bIns="0" rtlCol="0" anchor="ctr"/>
           <a:lstStyle/>
           <a:p>
-            <a:pPr indent="0" marL="0">
+            <a:pPr marL="0" indent="0">
               <a:buNone/>
             </a:pPr>
             <a:r>
@@ -7467,7 +7111,7 @@
           <a:bodyPr wrap="square" lIns="0" tIns="0" rIns="0" bIns="0" rtlCol="0" anchor="ctr"/>
           <a:lstStyle/>
           <a:p>
-            <a:pPr algn="r" indent="0" marL="0">
+            <a:pPr marL="0" indent="0" algn="r">
               <a:buNone/>
             </a:pPr>
             <a:r>
@@ -7509,7 +7153,7 @@
             <a:prstDash val="solid"/>
           </a:ln>
           <a:effectLst>
-            <a:outerShdw sx="100000" sy="100000" kx="0" ky="0" algn="bl" rotWithShape="0" blurRad="76200" dist="19050" dir="5400000">
+            <a:outerShdw blurRad="76200" dist="19050" dir="5400000" algn="bl" rotWithShape="0">
               <a:srgbClr val="0B1F33">
                 <a:alpha val="10000"/>
               </a:srgbClr>
@@ -7538,7 +7182,7 @@
           <a:bodyPr wrap="square" lIns="0" tIns="0" rIns="0" bIns="0" rtlCol="0" anchor="ctr"/>
           <a:lstStyle/>
           <a:p>
-            <a:pPr indent="0" marL="0">
+            <a:pPr marL="0" indent="0">
               <a:buNone/>
             </a:pPr>
             <a:r>
@@ -7558,7 +7202,7 @@
       </p:sp>
       <p:graphicFrame>
         <p:nvGraphicFramePr>
-          <p:cNvPr id="8" name="Chart 0" descr=""/>
+          <p:cNvPr id="8" name="Chart 0"/>
           <p:cNvGraphicFramePr/>
           <p:nvPr/>
         </p:nvGraphicFramePr>
@@ -7566,9 +7210,9 @@
           <a:off x="502920" y="1828800"/>
           <a:ext cx="3886200" cy="3474720"/>
         </p:xfrm>
-        <a:graphic xmlns:a="http://schemas.openxmlformats.org/drawingml/2006/main">
+        <a:graphic>
           <a:graphicData uri="http://schemas.openxmlformats.org/drawingml/2006/chart">
-            <c:chart xmlns:c="http://schemas.openxmlformats.org/drawingml/2006/chart" r:id="rId1"/>
+            <c:chart xmlns:c="http://schemas.openxmlformats.org/drawingml/2006/chart" xmlns:r="http://schemas.openxmlformats.org/officeDocument/2006/relationships" r:id="rId3"/>
           </a:graphicData>
         </a:graphic>
       </p:graphicFrame>
@@ -7596,7 +7240,7 @@
             <a:prstDash val="solid"/>
           </a:ln>
           <a:effectLst>
-            <a:outerShdw sx="100000" sy="100000" kx="0" ky="0" algn="bl" rotWithShape="0" blurRad="76200" dist="19050" dir="5400000">
+            <a:outerShdw blurRad="76200" dist="19050" dir="5400000" algn="bl" rotWithShape="0">
               <a:srgbClr val="0B1F33">
                 <a:alpha val="10000"/>
               </a:srgbClr>
@@ -7625,7 +7269,7 @@
           <a:bodyPr wrap="square" lIns="0" tIns="0" rIns="0" bIns="0" rtlCol="0" anchor="ctr"/>
           <a:lstStyle/>
           <a:p>
-            <a:pPr indent="0" marL="0">
+            <a:pPr marL="0" indent="0">
               <a:buNone/>
             </a:pPr>
             <a:r>
@@ -7645,7 +7289,7 @@
       </p:sp>
       <p:graphicFrame>
         <p:nvGraphicFramePr>
-          <p:cNvPr id="11" name="Chart 1" descr=""/>
+          <p:cNvPr id="11" name="Chart 1"/>
           <p:cNvGraphicFramePr/>
           <p:nvPr/>
         </p:nvGraphicFramePr>
@@ -7653,9 +7297,9 @@
           <a:off x="4663440" y="1828800"/>
           <a:ext cx="3886200" cy="3474720"/>
         </p:xfrm>
-        <a:graphic xmlns:a="http://schemas.openxmlformats.org/drawingml/2006/main">
+        <a:graphic>
           <a:graphicData uri="http://schemas.openxmlformats.org/drawingml/2006/chart">
-            <c:chart xmlns:c="http://schemas.openxmlformats.org/drawingml/2006/chart" r:id="rId2"/>
+            <c:chart xmlns:c="http://schemas.openxmlformats.org/drawingml/2006/chart" xmlns:r="http://schemas.openxmlformats.org/officeDocument/2006/relationships" r:id="rId4"/>
           </a:graphicData>
         </a:graphic>
       </p:graphicFrame>
@@ -7683,7 +7327,7 @@
             <a:prstDash val="solid"/>
           </a:ln>
           <a:effectLst>
-            <a:outerShdw sx="100000" sy="100000" kx="0" ky="0" algn="bl" rotWithShape="0" blurRad="76200" dist="19050" dir="5400000">
+            <a:outerShdw blurRad="76200" dist="19050" dir="5400000" algn="bl" rotWithShape="0">
               <a:srgbClr val="0B1F33">
                 <a:alpha val="10000"/>
               </a:srgbClr>
@@ -7714,7 +7358,7 @@
           </a:bodyPr>
           <a:lstStyle/>
           <a:p>
-            <a:pPr indent="0" marL="0">
+            <a:pPr marL="0" indent="0">
               <a:buNone/>
             </a:pPr>
             <a:r>
@@ -7755,7 +7399,7 @@
           </a:bodyPr>
           <a:lstStyle/>
           <a:p>
-            <a:pPr indent="0" marL="0">
+            <a:pPr marL="0" indent="0">
               <a:buNone/>
             </a:pPr>
             <a:r>
@@ -7797,7 +7441,7 @@
             <a:prstDash val="solid"/>
           </a:ln>
           <a:effectLst>
-            <a:outerShdw sx="100000" sy="100000" kx="0" ky="0" algn="bl" rotWithShape="0" blurRad="76200" dist="19050" dir="5400000">
+            <a:outerShdw blurRad="76200" dist="19050" dir="5400000" algn="bl" rotWithShape="0">
               <a:srgbClr val="0B1F33">
                 <a:alpha val="10000"/>
               </a:srgbClr>
@@ -7828,7 +7472,7 @@
           </a:bodyPr>
           <a:lstStyle/>
           <a:p>
-            <a:pPr indent="0" marL="0">
+            <a:pPr marL="0" indent="0">
               <a:buNone/>
             </a:pPr>
             <a:r>
@@ -7869,7 +7513,7 @@
           </a:bodyPr>
           <a:lstStyle/>
           <a:p>
-            <a:pPr indent="0" marL="0">
+            <a:pPr marL="0" indent="0">
               <a:buNone/>
             </a:pPr>
             <a:r>
@@ -7911,7 +7555,7 @@
             <a:prstDash val="solid"/>
           </a:ln>
           <a:effectLst>
-            <a:outerShdw sx="100000" sy="100000" kx="0" ky="0" algn="bl" rotWithShape="0" blurRad="76200" dist="19050" dir="5400000">
+            <a:outerShdw blurRad="76200" dist="19050" dir="5400000" algn="bl" rotWithShape="0">
               <a:srgbClr val="0B1F33">
                 <a:alpha val="10000"/>
               </a:srgbClr>
@@ -7942,7 +7586,7 @@
           </a:bodyPr>
           <a:lstStyle/>
           <a:p>
-            <a:pPr indent="0" marL="0">
+            <a:pPr marL="0" indent="0">
               <a:buNone/>
             </a:pPr>
             <a:r>
@@ -7983,7 +7627,7 @@
           </a:bodyPr>
           <a:lstStyle/>
           <a:p>
-            <a:pPr indent="0" marL="0">
+            <a:pPr marL="0" indent="0">
               <a:buNone/>
             </a:pPr>
             <a:r>
@@ -8025,7 +7669,7 @@
             <a:prstDash val="solid"/>
           </a:ln>
           <a:effectLst>
-            <a:outerShdw sx="100000" sy="100000" kx="0" ky="0" algn="bl" rotWithShape="0" blurRad="76200" dist="19050" dir="5400000">
+            <a:outerShdw blurRad="76200" dist="19050" dir="5400000" algn="bl" rotWithShape="0">
               <a:srgbClr val="0B1F33">
                 <a:alpha val="10000"/>
               </a:srgbClr>
@@ -8056,7 +7700,7 @@
           </a:bodyPr>
           <a:lstStyle/>
           <a:p>
-            <a:pPr indent="0" marL="0">
+            <a:pPr marL="0" indent="0">
               <a:buNone/>
             </a:pPr>
             <a:r>
@@ -8097,7 +7741,7 @@
           </a:bodyPr>
           <a:lstStyle/>
           <a:p>
-            <a:pPr indent="0" marL="0">
+            <a:pPr marL="0" indent="0">
               <a:buNone/>
             </a:pPr>
             <a:r>
@@ -8139,7 +7783,7 @@
             <a:prstDash val="solid"/>
           </a:ln>
           <a:effectLst>
-            <a:outerShdw sx="100000" sy="100000" kx="0" ky="0" algn="bl" rotWithShape="0" blurRad="76200" dist="19050" dir="5400000">
+            <a:outerShdw blurRad="76200" dist="19050" dir="5400000" algn="bl" rotWithShape="0">
               <a:srgbClr val="0B1F33">
                 <a:alpha val="10000"/>
               </a:srgbClr>
@@ -8168,11 +7812,11 @@
           <a:bodyPr wrap="square" lIns="0" tIns="0" rIns="0" bIns="0" rtlCol="0" anchor="ctr"/>
           <a:lstStyle/>
           <a:p>
-            <a:pPr indent="0" marL="0">
-              <a:buNone/>
-            </a:pPr>
-            <a:r>
-              <a:rPr lang="en-US" sz="900" b="1" spc="200" kern="0" dirty="0">
+            <a:pPr marL="0" indent="0">
+              <a:buNone/>
+            </a:pPr>
+            <a:r>
+              <a:rPr lang="en-US" sz="900" b="1" kern="0" spc="200" dirty="0">
                 <a:solidFill>
                   <a:srgbClr val="0E9F6E"/>
                 </a:solidFill>
@@ -8209,7 +7853,7 @@
           </a:bodyPr>
           <a:lstStyle/>
           <a:p>
-            <a:pPr indent="0" marL="0">
+            <a:pPr marL="0" indent="0">
               <a:buNone/>
             </a:pPr>
             <a:r>
@@ -8251,7 +7895,7 @@
             <a:prstDash val="solid"/>
           </a:ln>
           <a:effectLst>
-            <a:outerShdw sx="100000" sy="100000" kx="0" ky="0" algn="bl" rotWithShape="0" blurRad="76200" dist="19050" dir="5400000">
+            <a:outerShdw blurRad="76200" dist="19050" dir="5400000" algn="bl" rotWithShape="0">
               <a:srgbClr val="0B1F33">
                 <a:alpha val="10000"/>
               </a:srgbClr>
@@ -8280,11 +7924,11 @@
           <a:bodyPr wrap="square" lIns="0" tIns="0" rIns="0" bIns="0" rtlCol="0" anchor="ctr"/>
           <a:lstStyle/>
           <a:p>
-            <a:pPr indent="0" marL="0">
-              <a:buNone/>
-            </a:pPr>
-            <a:r>
-              <a:rPr lang="en-US" sz="900" b="1" spc="200" kern="0" dirty="0">
+            <a:pPr marL="0" indent="0">
+              <a:buNone/>
+            </a:pPr>
+            <a:r>
+              <a:rPr lang="en-US" sz="900" b="1" kern="0" spc="200" dirty="0">
                 <a:solidFill>
                   <a:srgbClr val="F28C28"/>
                 </a:solidFill>
@@ -8321,7 +7965,7 @@
           </a:bodyPr>
           <a:lstStyle/>
           <a:p>
-            <a:pPr indent="0" marL="0">
+            <a:pPr marL="0" indent="0">
               <a:buNone/>
             </a:pPr>
             <a:r>
@@ -8363,7 +8007,7 @@
             <a:prstDash val="solid"/>
           </a:ln>
           <a:effectLst>
-            <a:outerShdw sx="100000" sy="100000" kx="0" ky="0" algn="bl" rotWithShape="0" blurRad="76200" dist="19050" dir="5400000">
+            <a:outerShdw blurRad="76200" dist="19050" dir="5400000" algn="bl" rotWithShape="0">
               <a:srgbClr val="0B1F33">
                 <a:alpha val="10000"/>
               </a:srgbClr>
@@ -8392,11 +8036,11 @@
           <a:bodyPr wrap="square" lIns="0" tIns="0" rIns="0" bIns="0" rtlCol="0" anchor="ctr"/>
           <a:lstStyle/>
           <a:p>
-            <a:pPr indent="0" marL="0">
-              <a:buNone/>
-            </a:pPr>
-            <a:r>
-              <a:rPr lang="en-US" sz="900" b="1" spc="200" kern="0" dirty="0">
+            <a:pPr marL="0" indent="0">
+              <a:buNone/>
+            </a:pPr>
+            <a:r>
+              <a:rPr lang="en-US" sz="900" b="1" kern="0" spc="200" dirty="0">
                 <a:solidFill>
                   <a:srgbClr val="0B1F33"/>
                 </a:solidFill>
@@ -8433,7 +8077,7 @@
           </a:bodyPr>
           <a:lstStyle/>
           <a:p>
-            <a:pPr indent="0" marL="0">
+            <a:pPr marL="0" indent="0">
               <a:buNone/>
             </a:pPr>
             <a:r>
@@ -8467,6 +8111,7 @@
         <a:solidFill>
           <a:srgbClr val="F5F7FA"/>
         </a:solidFill>
+        <a:effectLst/>
       </p:bgPr>
     </p:bg>
     <p:spTree>
@@ -8504,11 +8149,11 @@
           <a:bodyPr wrap="square" lIns="0" tIns="0" rIns="0" bIns="0" rtlCol="0" anchor="ctr"/>
           <a:lstStyle/>
           <a:p>
-            <a:pPr indent="0" marL="0">
-              <a:buNone/>
-            </a:pPr>
-            <a:r>
-              <a:rPr lang="en-US" sz="1050" b="1" spc="300" kern="0" dirty="0">
+            <a:pPr marL="0" indent="0">
+              <a:buNone/>
+            </a:pPr>
+            <a:r>
+              <a:rPr lang="en-US" sz="1050" b="1" kern="0" spc="300" dirty="0">
                 <a:solidFill>
                   <a:srgbClr val="006A4E"/>
                 </a:solidFill>
@@ -8545,7 +8190,7 @@
           </a:bodyPr>
           <a:lstStyle/>
           <a:p>
-            <a:pPr indent="0" marL="0">
+            <a:pPr marL="0" indent="0">
               <a:buNone/>
             </a:pPr>
             <a:r>
@@ -8584,7 +8229,7 @@
           <a:bodyPr wrap="square" lIns="0" tIns="0" rIns="0" bIns="0" rtlCol="0" anchor="ctr"/>
           <a:lstStyle/>
           <a:p>
-            <a:pPr indent="0" marL="0">
+            <a:pPr marL="0" indent="0">
               <a:buNone/>
             </a:pPr>
             <a:r>
@@ -8623,7 +8268,7 @@
           <a:bodyPr wrap="square" lIns="0" tIns="0" rIns="0" bIns="0" rtlCol="0" anchor="ctr"/>
           <a:lstStyle/>
           <a:p>
-            <a:pPr algn="r" indent="0" marL="0">
+            <a:pPr marL="0" indent="0" algn="r">
               <a:buNone/>
             </a:pPr>
             <a:r>
@@ -8665,7 +8310,7 @@
             <a:prstDash val="solid"/>
           </a:ln>
           <a:effectLst>
-            <a:outerShdw sx="100000" sy="100000" kx="0" ky="0" algn="bl" rotWithShape="0" blurRad="76200" dist="19050" dir="5400000">
+            <a:outerShdw blurRad="76200" dist="19050" dir="5400000" algn="bl" rotWithShape="0">
               <a:srgbClr val="0B1F33">
                 <a:alpha val="10000"/>
               </a:srgbClr>
@@ -8694,7 +8339,7 @@
           <a:bodyPr wrap="square" lIns="0" tIns="0" rIns="0" bIns="0" rtlCol="0" anchor="ctr"/>
           <a:lstStyle/>
           <a:p>
-            <a:pPr indent="0" marL="0">
+            <a:pPr marL="0" indent="0">
               <a:buNone/>
             </a:pPr>
             <a:r>
@@ -8733,7 +8378,7 @@
           <a:bodyPr wrap="square" lIns="0" tIns="0" rIns="0" bIns="0" rtlCol="0" anchor="ctr"/>
           <a:lstStyle/>
           <a:p>
-            <a:pPr indent="0" marL="0">
+            <a:pPr marL="0" indent="0">
               <a:buNone/>
             </a:pPr>
             <a:r>
@@ -8897,7 +8542,7 @@
           <a:bodyPr wrap="square" lIns="0" tIns="0" rIns="0" bIns="0" rtlCol="0" anchor="ctr"/>
           <a:lstStyle/>
           <a:p>
-            <a:pPr indent="0" marL="0">
+            <a:pPr marL="0" indent="0">
               <a:buNone/>
             </a:pPr>
             <a:r>
@@ -8936,7 +8581,7 @@
           <a:bodyPr wrap="square" lIns="0" tIns="0" rIns="0" bIns="0" rtlCol="0" anchor="ctr"/>
           <a:lstStyle/>
           <a:p>
-            <a:pPr algn="r" indent="0" marL="0">
+            <a:pPr marL="0" indent="0" algn="r">
               <a:buNone/>
             </a:pPr>
             <a:r>
@@ -9000,7 +8645,7 @@
           <a:bodyPr wrap="square" lIns="0" tIns="0" rIns="0" bIns="0" rtlCol="0" anchor="ctr"/>
           <a:lstStyle/>
           <a:p>
-            <a:pPr indent="0" marL="0">
+            <a:pPr marL="0" indent="0">
               <a:buNone/>
             </a:pPr>
             <a:r>
@@ -9039,7 +8684,7 @@
           <a:bodyPr wrap="square" lIns="0" tIns="0" rIns="0" bIns="0" rtlCol="0" anchor="ctr"/>
           <a:lstStyle/>
           <a:p>
-            <a:pPr algn="r" indent="0" marL="0">
+            <a:pPr marL="0" indent="0" algn="r">
               <a:buNone/>
             </a:pPr>
             <a:r>
@@ -9103,7 +8748,7 @@
           <a:bodyPr wrap="square" lIns="0" tIns="0" rIns="0" bIns="0" rtlCol="0" anchor="ctr"/>
           <a:lstStyle/>
           <a:p>
-            <a:pPr indent="0" marL="0">
+            <a:pPr marL="0" indent="0">
               <a:buNone/>
             </a:pPr>
             <a:r>
@@ -9142,7 +8787,7 @@
           <a:bodyPr wrap="square" lIns="0" tIns="0" rIns="0" bIns="0" rtlCol="0" anchor="ctr"/>
           <a:lstStyle/>
           <a:p>
-            <a:pPr algn="r" indent="0" marL="0">
+            <a:pPr marL="0" indent="0" algn="r">
               <a:buNone/>
             </a:pPr>
             <a:r>
@@ -9206,7 +8851,7 @@
           <a:bodyPr wrap="square" lIns="0" tIns="0" rIns="0" bIns="0" rtlCol="0" anchor="ctr"/>
           <a:lstStyle/>
           <a:p>
-            <a:pPr indent="0" marL="0">
+            <a:pPr marL="0" indent="0">
               <a:buNone/>
             </a:pPr>
             <a:r>
@@ -9245,7 +8890,7 @@
           <a:bodyPr wrap="square" lIns="0" tIns="0" rIns="0" bIns="0" rtlCol="0" anchor="ctr"/>
           <a:lstStyle/>
           <a:p>
-            <a:pPr algn="r" indent="0" marL="0">
+            <a:pPr marL="0" indent="0" algn="r">
               <a:buNone/>
             </a:pPr>
             <a:r>
@@ -9284,7 +8929,7 @@
           <a:bodyPr wrap="square" lIns="0" tIns="0" rIns="0" bIns="0" rtlCol="0" anchor="t"/>
           <a:lstStyle/>
           <a:p>
-            <a:pPr indent="0" marL="0">
+            <a:pPr marL="0" indent="0">
               <a:buNone/>
             </a:pPr>
             <a:r>
@@ -9326,7 +8971,7 @@
             <a:prstDash val="solid"/>
           </a:ln>
           <a:effectLst>
-            <a:outerShdw sx="100000" sy="100000" kx="0" ky="0" algn="bl" rotWithShape="0" blurRad="76200" dist="19050" dir="5400000">
+            <a:outerShdw blurRad="76200" dist="19050" dir="5400000" algn="bl" rotWithShape="0">
               <a:srgbClr val="0B1F33">
                 <a:alpha val="10000"/>
               </a:srgbClr>
@@ -9355,7 +9000,7 @@
           <a:bodyPr wrap="square" lIns="0" tIns="0" rIns="0" bIns="0" rtlCol="0" anchor="ctr"/>
           <a:lstStyle/>
           <a:p>
-            <a:pPr indent="0" marL="0">
+            <a:pPr marL="0" indent="0">
               <a:buNone/>
             </a:pPr>
             <a:r>
@@ -9375,7 +9020,7 @@
       </p:sp>
       <p:graphicFrame>
         <p:nvGraphicFramePr>
-          <p:cNvPr id="28" name="Chart 0" descr=""/>
+          <p:cNvPr id="28" name="Chart 0"/>
           <p:cNvGraphicFramePr/>
           <p:nvPr/>
         </p:nvGraphicFramePr>
@@ -9383,9 +9028,9 @@
           <a:off x="4251960" y="1828800"/>
           <a:ext cx="4480560" cy="3520440"/>
         </p:xfrm>
-        <a:graphic xmlns:a="http://schemas.openxmlformats.org/drawingml/2006/main">
+        <a:graphic>
           <a:graphicData uri="http://schemas.openxmlformats.org/drawingml/2006/chart">
-            <c:chart xmlns:c="http://schemas.openxmlformats.org/drawingml/2006/chart" r:id="rId1"/>
+            <c:chart xmlns:c="http://schemas.openxmlformats.org/drawingml/2006/chart" xmlns:r="http://schemas.openxmlformats.org/officeDocument/2006/relationships" r:id="rId3"/>
           </a:graphicData>
         </a:graphic>
       </p:graphicFrame>
@@ -9413,7 +9058,7 @@
             <a:prstDash val="solid"/>
           </a:ln>
           <a:effectLst>
-            <a:outerShdw sx="100000" sy="100000" kx="0" ky="0" algn="bl" rotWithShape="0" blurRad="76200" dist="19050" dir="5400000">
+            <a:outerShdw blurRad="76200" dist="19050" dir="5400000" algn="bl" rotWithShape="0">
               <a:srgbClr val="0B1F33">
                 <a:alpha val="10000"/>
               </a:srgbClr>
@@ -9444,7 +9089,7 @@
           </a:bodyPr>
           <a:lstStyle/>
           <a:p>
-            <a:pPr indent="0" marL="0">
+            <a:pPr marL="0" indent="0">
               <a:buNone/>
             </a:pPr>
             <a:r>
@@ -9485,7 +9130,7 @@
           </a:bodyPr>
           <a:lstStyle/>
           <a:p>
-            <a:pPr indent="0" marL="0">
+            <a:pPr marL="0" indent="0">
               <a:buNone/>
             </a:pPr>
             <a:r>
@@ -9527,7 +9172,7 @@
             <a:prstDash val="solid"/>
           </a:ln>
           <a:effectLst>
-            <a:outerShdw sx="100000" sy="100000" kx="0" ky="0" algn="bl" rotWithShape="0" blurRad="76200" dist="19050" dir="5400000">
+            <a:outerShdw blurRad="76200" dist="19050" dir="5400000" algn="bl" rotWithShape="0">
               <a:srgbClr val="0B1F33">
                 <a:alpha val="10000"/>
               </a:srgbClr>
@@ -9558,7 +9203,7 @@
           </a:bodyPr>
           <a:lstStyle/>
           <a:p>
-            <a:pPr indent="0" marL="0">
+            <a:pPr marL="0" indent="0">
               <a:buNone/>
             </a:pPr>
             <a:r>
@@ -9599,7 +9244,7 @@
           </a:bodyPr>
           <a:lstStyle/>
           <a:p>
-            <a:pPr indent="0" marL="0">
+            <a:pPr marL="0" indent="0">
               <a:buNone/>
             </a:pPr>
             <a:r>
@@ -9641,7 +9286,7 @@
             <a:prstDash val="solid"/>
           </a:ln>
           <a:effectLst>
-            <a:outerShdw sx="100000" sy="100000" kx="0" ky="0" algn="bl" rotWithShape="0" blurRad="76200" dist="19050" dir="5400000">
+            <a:outerShdw blurRad="76200" dist="19050" dir="5400000" algn="bl" rotWithShape="0">
               <a:srgbClr val="0B1F33">
                 <a:alpha val="10000"/>
               </a:srgbClr>
@@ -9672,7 +9317,7 @@
           </a:bodyPr>
           <a:lstStyle/>
           <a:p>
-            <a:pPr indent="0" marL="0">
+            <a:pPr marL="0" indent="0">
               <a:buNone/>
             </a:pPr>
             <a:r>
@@ -9713,7 +9358,7 @@
           </a:bodyPr>
           <a:lstStyle/>
           <a:p>
-            <a:pPr indent="0" marL="0">
+            <a:pPr marL="0" indent="0">
               <a:buNone/>
             </a:pPr>
             <a:r>
@@ -9755,7 +9400,7 @@
             <a:prstDash val="solid"/>
           </a:ln>
           <a:effectLst>
-            <a:outerShdw sx="100000" sy="100000" kx="0" ky="0" algn="bl" rotWithShape="0" blurRad="76200" dist="19050" dir="5400000">
+            <a:outerShdw blurRad="76200" dist="19050" dir="5400000" algn="bl" rotWithShape="0">
               <a:srgbClr val="0B1F33">
                 <a:alpha val="10000"/>
               </a:srgbClr>
@@ -9784,11 +9429,11 @@
           <a:bodyPr wrap="square" lIns="0" tIns="0" rIns="0" bIns="0" rtlCol="0" anchor="ctr"/>
           <a:lstStyle/>
           <a:p>
-            <a:pPr indent="0" marL="0">
-              <a:buNone/>
-            </a:pPr>
-            <a:r>
-              <a:rPr lang="en-US" sz="900" b="1" spc="200" kern="0" dirty="0">
+            <a:pPr marL="0" indent="0">
+              <a:buNone/>
+            </a:pPr>
+            <a:r>
+              <a:rPr lang="en-US" sz="900" b="1" kern="0" spc="200" dirty="0">
                 <a:solidFill>
                   <a:srgbClr val="0E9F6E"/>
                 </a:solidFill>
@@ -9825,7 +9470,7 @@
           </a:bodyPr>
           <a:lstStyle/>
           <a:p>
-            <a:pPr indent="0" marL="0">
+            <a:pPr marL="0" indent="0">
               <a:buNone/>
             </a:pPr>
             <a:r>
@@ -9867,7 +9512,7 @@
             <a:prstDash val="solid"/>
           </a:ln>
           <a:effectLst>
-            <a:outerShdw sx="100000" sy="100000" kx="0" ky="0" algn="bl" rotWithShape="0" blurRad="76200" dist="19050" dir="5400000">
+            <a:outerShdw blurRad="76200" dist="19050" dir="5400000" algn="bl" rotWithShape="0">
               <a:srgbClr val="0B1F33">
                 <a:alpha val="10000"/>
               </a:srgbClr>
@@ -9896,11 +9541,11 @@
           <a:bodyPr wrap="square" lIns="0" tIns="0" rIns="0" bIns="0" rtlCol="0" anchor="ctr"/>
           <a:lstStyle/>
           <a:p>
-            <a:pPr indent="0" marL="0">
-              <a:buNone/>
-            </a:pPr>
-            <a:r>
-              <a:rPr lang="en-US" sz="900" b="1" spc="200" kern="0" dirty="0">
+            <a:pPr marL="0" indent="0">
+              <a:buNone/>
+            </a:pPr>
+            <a:r>
+              <a:rPr lang="en-US" sz="900" b="1" kern="0" spc="200" dirty="0">
                 <a:solidFill>
                   <a:srgbClr val="F28C28"/>
                 </a:solidFill>
@@ -9937,7 +9582,7 @@
           </a:bodyPr>
           <a:lstStyle/>
           <a:p>
-            <a:pPr indent="0" marL="0">
+            <a:pPr marL="0" indent="0">
               <a:buNone/>
             </a:pPr>
             <a:r>
@@ -9979,7 +9624,7 @@
             <a:prstDash val="solid"/>
           </a:ln>
           <a:effectLst>
-            <a:outerShdw sx="100000" sy="100000" kx="0" ky="0" algn="bl" rotWithShape="0" blurRad="76200" dist="19050" dir="5400000">
+            <a:outerShdw blurRad="76200" dist="19050" dir="5400000" algn="bl" rotWithShape="0">
               <a:srgbClr val="0B1F33">
                 <a:alpha val="10000"/>
               </a:srgbClr>
@@ -10008,11 +9653,11 @@
           <a:bodyPr wrap="square" lIns="0" tIns="0" rIns="0" bIns="0" rtlCol="0" anchor="ctr"/>
           <a:lstStyle/>
           <a:p>
-            <a:pPr indent="0" marL="0">
-              <a:buNone/>
-            </a:pPr>
-            <a:r>
-              <a:rPr lang="en-US" sz="900" b="1" spc="200" kern="0" dirty="0">
+            <a:pPr marL="0" indent="0">
+              <a:buNone/>
+            </a:pPr>
+            <a:r>
+              <a:rPr lang="en-US" sz="900" b="1" kern="0" spc="200" dirty="0">
                 <a:solidFill>
                   <a:srgbClr val="0B1F33"/>
                 </a:solidFill>
@@ -10049,7 +9694,7 @@
           </a:bodyPr>
           <a:lstStyle/>
           <a:p>
-            <a:pPr indent="0" marL="0">
+            <a:pPr marL="0" indent="0">
               <a:buNone/>
             </a:pPr>
             <a:r>
@@ -10083,6 +9728,7 @@
         <a:solidFill>
           <a:srgbClr val="F5F7FA"/>
         </a:solidFill>
+        <a:effectLst/>
       </p:bgPr>
     </p:bg>
     <p:spTree>
@@ -10120,11 +9766,11 @@
           <a:bodyPr wrap="square" lIns="0" tIns="0" rIns="0" bIns="0" rtlCol="0" anchor="ctr"/>
           <a:lstStyle/>
           <a:p>
-            <a:pPr indent="0" marL="0">
-              <a:buNone/>
-            </a:pPr>
-            <a:r>
-              <a:rPr lang="en-US" sz="1050" b="1" spc="300" kern="0" dirty="0">
+            <a:pPr marL="0" indent="0">
+              <a:buNone/>
+            </a:pPr>
+            <a:r>
+              <a:rPr lang="en-US" sz="1050" b="1" kern="0" spc="300" dirty="0">
                 <a:solidFill>
                   <a:srgbClr val="006A4E"/>
                 </a:solidFill>
@@ -10161,7 +9807,7 @@
           </a:bodyPr>
           <a:lstStyle/>
           <a:p>
-            <a:pPr indent="0" marL="0">
+            <a:pPr marL="0" indent="0">
               <a:buNone/>
             </a:pPr>
             <a:r>
@@ -10200,7 +9846,7 @@
           <a:bodyPr wrap="square" lIns="0" tIns="0" rIns="0" bIns="0" rtlCol="0" anchor="ctr"/>
           <a:lstStyle/>
           <a:p>
-            <a:pPr indent="0" marL="0">
+            <a:pPr marL="0" indent="0">
               <a:buNone/>
             </a:pPr>
             <a:r>
@@ -10239,7 +9885,7 @@
           <a:bodyPr wrap="square" lIns="0" tIns="0" rIns="0" bIns="0" rtlCol="0" anchor="ctr"/>
           <a:lstStyle/>
           <a:p>
-            <a:pPr algn="r" indent="0" marL="0">
+            <a:pPr marL="0" indent="0" algn="r">
               <a:buNone/>
             </a:pPr>
             <a:r>
@@ -10281,7 +9927,7 @@
             <a:prstDash val="solid"/>
           </a:ln>
           <a:effectLst>
-            <a:outerShdw sx="100000" sy="100000" kx="0" ky="0" algn="bl" rotWithShape="0" blurRad="76200" dist="19050" dir="5400000">
+            <a:outerShdw blurRad="76200" dist="19050" dir="5400000" algn="bl" rotWithShape="0">
               <a:srgbClr val="0B1F33">
                 <a:alpha val="10000"/>
               </a:srgbClr>
@@ -10310,11 +9956,11 @@
           <a:bodyPr wrap="square" lIns="0" tIns="0" rIns="0" bIns="0" rtlCol="0" anchor="ctr"/>
           <a:lstStyle/>
           <a:p>
-            <a:pPr indent="0" marL="0">
-              <a:buNone/>
-            </a:pPr>
-            <a:r>
-              <a:rPr lang="en-US" sz="1050" b="1" spc="200" kern="0" dirty="0">
+            <a:pPr marL="0" indent="0">
+              <a:buNone/>
+            </a:pPr>
+            <a:r>
+              <a:rPr lang="en-US" sz="1050" b="1" kern="0" spc="200" dirty="0">
                 <a:solidFill>
                   <a:srgbClr val="0B1F33"/>
                 </a:solidFill>
@@ -10349,7 +9995,7 @@
           <a:bodyPr wrap="square" lIns="0" tIns="0" rIns="0" bIns="0" rtlCol="0" anchor="ctr"/>
           <a:lstStyle/>
           <a:p>
-            <a:pPr indent="0" marL="0">
+            <a:pPr marL="0" indent="0">
               <a:buNone/>
             </a:pPr>
             <a:r>
@@ -10388,7 +10034,7 @@
           <a:bodyPr wrap="square" lIns="0" tIns="0" rIns="0" bIns="0" rtlCol="0" anchor="ctr"/>
           <a:lstStyle/>
           <a:p>
-            <a:pPr indent="0" marL="0">
+            <a:pPr marL="0" indent="0">
               <a:buNone/>
             </a:pPr>
             <a:r>
@@ -10452,7 +10098,7 @@
           <a:bodyPr wrap="square" lIns="0" tIns="0" rIns="0" bIns="0" rtlCol="0" anchor="ctr"/>
           <a:lstStyle/>
           <a:p>
-            <a:pPr algn="ctr" indent="0" marL="0">
+            <a:pPr marL="0" indent="0" algn="ctr">
               <a:buNone/>
             </a:pPr>
             <a:r>
@@ -10491,7 +10137,7 @@
           <a:bodyPr wrap="square" lIns="0" tIns="0" rIns="0" bIns="0" rtlCol="0" anchor="ctr"/>
           <a:lstStyle/>
           <a:p>
-            <a:pPr algn="ctr" indent="0" marL="0">
+            <a:pPr marL="0" indent="0" algn="ctr">
               <a:buNone/>
             </a:pPr>
             <a:r>
@@ -10530,7 +10176,7 @@
           <a:bodyPr wrap="square" lIns="0" tIns="0" rIns="0" bIns="0" rtlCol="0" anchor="ctr"/>
           <a:lstStyle/>
           <a:p>
-            <a:pPr algn="ctr" indent="0" marL="0">
+            <a:pPr marL="0" indent="0" algn="ctr">
               <a:buNone/>
             </a:pPr>
             <a:r>
@@ -10572,7 +10218,7 @@
             <a:prstDash val="solid"/>
           </a:ln>
           <a:effectLst>
-            <a:outerShdw sx="100000" sy="100000" kx="0" ky="0" algn="bl" rotWithShape="0" blurRad="76200" dist="19050" dir="5400000">
+            <a:outerShdw blurRad="76200" dist="19050" dir="5400000" algn="bl" rotWithShape="0">
               <a:srgbClr val="0B1F33">
                 <a:alpha val="10000"/>
               </a:srgbClr>
@@ -10601,11 +10247,11 @@
           <a:bodyPr wrap="square" lIns="0" tIns="0" rIns="0" bIns="0" rtlCol="0" anchor="ctr"/>
           <a:lstStyle/>
           <a:p>
-            <a:pPr indent="0" marL="0">
-              <a:buNone/>
-            </a:pPr>
-            <a:r>
-              <a:rPr lang="en-US" sz="1050" b="1" spc="200" kern="0" dirty="0">
+            <a:pPr marL="0" indent="0">
+              <a:buNone/>
+            </a:pPr>
+            <a:r>
+              <a:rPr lang="en-US" sz="1050" b="1" kern="0" spc="200" dirty="0">
                 <a:solidFill>
                   <a:srgbClr val="006A4E"/>
                 </a:solidFill>
@@ -10640,7 +10286,7 @@
           <a:bodyPr wrap="square" lIns="0" tIns="0" rIns="0" bIns="0" rtlCol="0" anchor="ctr"/>
           <a:lstStyle/>
           <a:p>
-            <a:pPr indent="0" marL="0">
+            <a:pPr marL="0" indent="0">
               <a:buNone/>
             </a:pPr>
             <a:r>
@@ -10679,7 +10325,7 @@
           <a:bodyPr wrap="square" lIns="0" tIns="0" rIns="0" bIns="0" rtlCol="0" anchor="ctr"/>
           <a:lstStyle/>
           <a:p>
-            <a:pPr indent="0" marL="0">
+            <a:pPr marL="0" indent="0">
               <a:buNone/>
             </a:pPr>
             <a:r>
@@ -11393,7 +11039,7 @@
           <a:bodyPr wrap="square" lIns="0" tIns="0" rIns="0" bIns="0" rtlCol="0" anchor="ctr"/>
           <a:lstStyle/>
           <a:p>
-            <a:pPr algn="ctr" indent="0" marL="0">
+            <a:pPr marL="0" indent="0" algn="ctr">
               <a:buNone/>
             </a:pPr>
             <a:r>
@@ -11432,7 +11078,7 @@
           <a:bodyPr wrap="square" lIns="0" tIns="0" rIns="0" bIns="0" rtlCol="0" anchor="ctr"/>
           <a:lstStyle/>
           <a:p>
-            <a:pPr algn="ctr" indent="0" marL="0">
+            <a:pPr marL="0" indent="0" algn="ctr">
               <a:buNone/>
             </a:pPr>
             <a:r>
@@ -11471,7 +11117,7 @@
           <a:bodyPr wrap="square" lIns="0" tIns="0" rIns="0" bIns="0" rtlCol="0" anchor="ctr"/>
           <a:lstStyle/>
           <a:p>
-            <a:pPr algn="ctr" indent="0" marL="0">
+            <a:pPr marL="0" indent="0" algn="ctr">
               <a:buNone/>
             </a:pPr>
             <a:r>
@@ -11535,7 +11181,7 @@
           <a:bodyPr wrap="square" lIns="0" tIns="0" rIns="0" bIns="0" rtlCol="0" anchor="ctr"/>
           <a:lstStyle/>
           <a:p>
-            <a:pPr algn="ctr" indent="0" marL="0">
+            <a:pPr marL="0" indent="0" algn="ctr">
               <a:buNone/>
             </a:pPr>
             <a:r>
@@ -11577,7 +11223,7 @@
             <a:prstDash val="solid"/>
           </a:ln>
           <a:effectLst>
-            <a:outerShdw sx="100000" sy="100000" kx="0" ky="0" algn="bl" rotWithShape="0" blurRad="76200" dist="19050" dir="5400000">
+            <a:outerShdw blurRad="76200" dist="19050" dir="5400000" algn="bl" rotWithShape="0">
               <a:srgbClr val="0B1F33">
                 <a:alpha val="10000"/>
               </a:srgbClr>
@@ -11606,7 +11252,7 @@
           <a:bodyPr wrap="square" lIns="0" tIns="0" rIns="0" bIns="0" rtlCol="0" anchor="ctr"/>
           <a:lstStyle/>
           <a:p>
-            <a:pPr indent="0" marL="0">
+            <a:pPr marL="0" indent="0">
               <a:buNone/>
             </a:pPr>
             <a:r>
@@ -11626,7 +11272,7 @@
       </p:sp>
       <p:graphicFrame>
         <p:nvGraphicFramePr>
-          <p:cNvPr id="52" name="Chart 0" descr=""/>
+          <p:cNvPr id="52" name="Chart 0"/>
           <p:cNvGraphicFramePr/>
           <p:nvPr/>
         </p:nvGraphicFramePr>
@@ -11634,9 +11280,9 @@
           <a:off x="7406640" y="1783080"/>
           <a:ext cx="4282135" cy="1737360"/>
         </p:xfrm>
-        <a:graphic xmlns:a="http://schemas.openxmlformats.org/drawingml/2006/main">
+        <a:graphic>
           <a:graphicData uri="http://schemas.openxmlformats.org/drawingml/2006/chart">
-            <c:chart xmlns:c="http://schemas.openxmlformats.org/drawingml/2006/chart" r:id="rId1"/>
+            <c:chart xmlns:c="http://schemas.openxmlformats.org/drawingml/2006/chart" xmlns:r="http://schemas.openxmlformats.org/officeDocument/2006/relationships" r:id="rId3"/>
           </a:graphicData>
         </a:graphic>
       </p:graphicFrame>
@@ -11664,7 +11310,7 @@
             <a:prstDash val="solid"/>
           </a:ln>
           <a:effectLst>
-            <a:outerShdw sx="100000" sy="100000" kx="0" ky="0" algn="bl" rotWithShape="0" blurRad="76200" dist="19050" dir="5400000">
+            <a:outerShdw blurRad="76200" dist="19050" dir="5400000" algn="bl" rotWithShape="0">
               <a:srgbClr val="0B1F33">
                 <a:alpha val="10000"/>
               </a:srgbClr>
@@ -11693,11 +11339,11 @@
           <a:bodyPr wrap="square" lIns="0" tIns="0" rIns="0" bIns="0" rtlCol="0" anchor="ctr"/>
           <a:lstStyle/>
           <a:p>
-            <a:pPr indent="0" marL="0">
-              <a:buNone/>
-            </a:pPr>
-            <a:r>
-              <a:rPr lang="en-US" sz="1050" b="1" spc="100" kern="0" dirty="0">
+            <a:pPr marL="0" indent="0">
+              <a:buNone/>
+            </a:pPr>
+            <a:r>
+              <a:rPr lang="en-US" sz="1050" b="1" kern="0" spc="100" dirty="0">
                 <a:solidFill>
                   <a:srgbClr val="9A6B00"/>
                 </a:solidFill>
@@ -11734,7 +11380,7 @@
           </a:bodyPr>
           <a:lstStyle/>
           <a:p>
-            <a:pPr indent="0" marL="0">
+            <a:pPr marL="0" indent="0">
               <a:spcAft>
                 <a:spcPts val="300"/>
               </a:spcAft>
@@ -11754,7 +11400,7 @@
             <a:endParaRPr lang="en-US" sz="1050" dirty="0"/>
           </a:p>
           <a:p>
-            <a:pPr indent="0" marL="0">
+            <a:pPr marL="0" indent="0">
               <a:spcAft>
                 <a:spcPts val="300"/>
               </a:spcAft>
@@ -11774,7 +11420,7 @@
             <a:endParaRPr lang="en-US" sz="1050" dirty="0"/>
           </a:p>
           <a:p>
-            <a:pPr indent="0" marL="0">
+            <a:pPr marL="0" indent="0">
               <a:spcAft>
                 <a:spcPts val="300"/>
               </a:spcAft>
@@ -11819,7 +11465,7 @@
             <a:prstDash val="solid"/>
           </a:ln>
           <a:effectLst>
-            <a:outerShdw sx="100000" sy="100000" kx="0" ky="0" algn="bl" rotWithShape="0" blurRad="76200" dist="19050" dir="5400000">
+            <a:outerShdw blurRad="76200" dist="19050" dir="5400000" algn="bl" rotWithShape="0">
               <a:srgbClr val="0B1F33">
                 <a:alpha val="10000"/>
               </a:srgbClr>
@@ -11848,11 +11494,11 @@
           <a:bodyPr wrap="square" lIns="0" tIns="0" rIns="0" bIns="0" rtlCol="0" anchor="ctr"/>
           <a:lstStyle/>
           <a:p>
-            <a:pPr indent="0" marL="0">
-              <a:buNone/>
-            </a:pPr>
-            <a:r>
-              <a:rPr lang="en-US" sz="900" b="1" spc="200" kern="0" dirty="0">
+            <a:pPr marL="0" indent="0">
+              <a:buNone/>
+            </a:pPr>
+            <a:r>
+              <a:rPr lang="en-US" sz="900" b="1" kern="0" spc="200" dirty="0">
                 <a:solidFill>
                   <a:srgbClr val="0E9F6E"/>
                 </a:solidFill>
@@ -11889,7 +11535,7 @@
           </a:bodyPr>
           <a:lstStyle/>
           <a:p>
-            <a:pPr indent="0" marL="0">
+            <a:pPr marL="0" indent="0">
               <a:buNone/>
             </a:pPr>
             <a:r>
@@ -11931,7 +11577,7 @@
             <a:prstDash val="solid"/>
           </a:ln>
           <a:effectLst>
-            <a:outerShdw sx="100000" sy="100000" kx="0" ky="0" algn="bl" rotWithShape="0" blurRad="76200" dist="19050" dir="5400000">
+            <a:outerShdw blurRad="76200" dist="19050" dir="5400000" algn="bl" rotWithShape="0">
               <a:srgbClr val="0B1F33">
                 <a:alpha val="10000"/>
               </a:srgbClr>
@@ -11960,11 +11606,11 @@
           <a:bodyPr wrap="square" lIns="0" tIns="0" rIns="0" bIns="0" rtlCol="0" anchor="ctr"/>
           <a:lstStyle/>
           <a:p>
-            <a:pPr indent="0" marL="0">
-              <a:buNone/>
-            </a:pPr>
-            <a:r>
-              <a:rPr lang="en-US" sz="900" b="1" spc="200" kern="0" dirty="0">
+            <a:pPr marL="0" indent="0">
+              <a:buNone/>
+            </a:pPr>
+            <a:r>
+              <a:rPr lang="en-US" sz="900" b="1" kern="0" spc="200" dirty="0">
                 <a:solidFill>
                   <a:srgbClr val="F28C28"/>
                 </a:solidFill>
@@ -12001,7 +11647,7 @@
           </a:bodyPr>
           <a:lstStyle/>
           <a:p>
-            <a:pPr indent="0" marL="0">
+            <a:pPr marL="0" indent="0">
               <a:buNone/>
             </a:pPr>
             <a:r>
@@ -12043,7 +11689,7 @@
             <a:prstDash val="solid"/>
           </a:ln>
           <a:effectLst>
-            <a:outerShdw sx="100000" sy="100000" kx="0" ky="0" algn="bl" rotWithShape="0" blurRad="76200" dist="19050" dir="5400000">
+            <a:outerShdw blurRad="76200" dist="19050" dir="5400000" algn="bl" rotWithShape="0">
               <a:srgbClr val="0B1F33">
                 <a:alpha val="10000"/>
               </a:srgbClr>
@@ -12072,11 +11718,11 @@
           <a:bodyPr wrap="square" lIns="0" tIns="0" rIns="0" bIns="0" rtlCol="0" anchor="ctr"/>
           <a:lstStyle/>
           <a:p>
-            <a:pPr indent="0" marL="0">
-              <a:buNone/>
-            </a:pPr>
-            <a:r>
-              <a:rPr lang="en-US" sz="900" b="1" spc="200" kern="0" dirty="0">
+            <a:pPr marL="0" indent="0">
+              <a:buNone/>
+            </a:pPr>
+            <a:r>
+              <a:rPr lang="en-US" sz="900" b="1" kern="0" spc="200" dirty="0">
                 <a:solidFill>
                   <a:srgbClr val="0B1F33"/>
                 </a:solidFill>
@@ -12113,7 +11759,7 @@
           </a:bodyPr>
           <a:lstStyle/>
           <a:p>
-            <a:pPr indent="0" marL="0">
+            <a:pPr marL="0" indent="0">
               <a:buNone/>
             </a:pPr>
             <a:r>
@@ -12147,6 +11793,7 @@
         <a:solidFill>
           <a:srgbClr val="F5F7FA"/>
         </a:solidFill>
+        <a:effectLst/>
       </p:bgPr>
     </p:bg>
     <p:spTree>
@@ -12184,11 +11831,11 @@
           <a:bodyPr wrap="square" lIns="0" tIns="0" rIns="0" bIns="0" rtlCol="0" anchor="ctr"/>
           <a:lstStyle/>
           <a:p>
-            <a:pPr indent="0" marL="0">
-              <a:buNone/>
-            </a:pPr>
-            <a:r>
-              <a:rPr lang="en-US" sz="1050" b="1" spc="300" kern="0" dirty="0">
+            <a:pPr marL="0" indent="0">
+              <a:buNone/>
+            </a:pPr>
+            <a:r>
+              <a:rPr lang="en-US" sz="1050" b="1" kern="0" spc="300" dirty="0">
                 <a:solidFill>
                   <a:srgbClr val="006A4E"/>
                 </a:solidFill>
@@ -12225,7 +11872,7 @@
           </a:bodyPr>
           <a:lstStyle/>
           <a:p>
-            <a:pPr indent="0" marL="0">
+            <a:pPr marL="0" indent="0">
               <a:buNone/>
             </a:pPr>
             <a:r>
@@ -12264,7 +11911,7 @@
           <a:bodyPr wrap="square" lIns="0" tIns="0" rIns="0" bIns="0" rtlCol="0" anchor="ctr"/>
           <a:lstStyle/>
           <a:p>
-            <a:pPr indent="0" marL="0">
+            <a:pPr marL="0" indent="0">
               <a:buNone/>
             </a:pPr>
             <a:r>
@@ -12303,7 +11950,7 @@
           <a:bodyPr wrap="square" lIns="0" tIns="0" rIns="0" bIns="0" rtlCol="0" anchor="ctr"/>
           <a:lstStyle/>
           <a:p>
-            <a:pPr algn="r" indent="0" marL="0">
+            <a:pPr marL="0" indent="0" algn="r">
               <a:buNone/>
             </a:pPr>
             <a:r>
@@ -12345,7 +11992,7 @@
             <a:prstDash val="solid"/>
           </a:ln>
           <a:effectLst>
-            <a:outerShdw sx="100000" sy="100000" kx="0" ky="0" algn="bl" rotWithShape="0" blurRad="76200" dist="19050" dir="5400000">
+            <a:outerShdw blurRad="76200" dist="19050" dir="5400000" algn="bl" rotWithShape="0">
               <a:srgbClr val="0B1F33">
                 <a:alpha val="10000"/>
               </a:srgbClr>
@@ -12355,14 +12002,14 @@
       </p:sp>
       <p:pic>
         <p:nvPicPr>
-          <p:cNvPr id="7" name="Image 0" descr="map_formel.png">    </p:cNvPr>
+          <p:cNvPr id="7" name="Image 0" descr="map_formel.png"/>
           <p:cNvPicPr>
             <a:picLocks noChangeAspect="1"/>
           </p:cNvPicPr>
           <p:nvPr/>
         </p:nvPicPr>
         <p:blipFill>
-          <a:blip r:embed="rId1"/>
+          <a:blip r:embed="rId3"/>
           <a:stretch>
             <a:fillRect/>
           </a:stretch>
@@ -12398,7 +12045,7 @@
           <a:bodyPr wrap="square" lIns="0" tIns="0" rIns="0" bIns="0" rtlCol="0" anchor="ctr"/>
           <a:lstStyle/>
           <a:p>
-            <a:pPr indent="0" marL="0">
+            <a:pPr marL="0" indent="0">
               <a:buNone/>
             </a:pPr>
             <a:r>
@@ -12462,7 +12109,7 @@
           <a:bodyPr wrap="square" lIns="0" tIns="0" rIns="0" bIns="0" rtlCol="0" anchor="ctr"/>
           <a:lstStyle/>
           <a:p>
-            <a:pPr indent="0" marL="0">
+            <a:pPr marL="0" indent="0">
               <a:buNone/>
             </a:pPr>
             <a:r>
@@ -12501,7 +12148,7 @@
           <a:bodyPr wrap="square" lIns="0" tIns="0" rIns="0" bIns="0" rtlCol="0" anchor="ctr"/>
           <a:lstStyle/>
           <a:p>
-            <a:pPr indent="0" marL="0">
+            <a:pPr marL="0" indent="0">
               <a:buNone/>
             </a:pPr>
             <a:r>
@@ -12565,7 +12212,7 @@
           <a:bodyPr wrap="square" lIns="0" tIns="0" rIns="0" bIns="0" rtlCol="0" anchor="ctr"/>
           <a:lstStyle/>
           <a:p>
-            <a:pPr indent="0" marL="0">
+            <a:pPr marL="0" indent="0">
               <a:buNone/>
             </a:pPr>
             <a:r>
@@ -12604,7 +12251,7 @@
           <a:bodyPr wrap="square" lIns="0" tIns="0" rIns="0" bIns="0" rtlCol="0" anchor="ctr"/>
           <a:lstStyle/>
           <a:p>
-            <a:pPr indent="0" marL="0">
+            <a:pPr marL="0" indent="0">
               <a:buNone/>
             </a:pPr>
             <a:r>
@@ -12668,7 +12315,7 @@
           <a:bodyPr wrap="square" lIns="0" tIns="0" rIns="0" bIns="0" rtlCol="0" anchor="ctr"/>
           <a:lstStyle/>
           <a:p>
-            <a:pPr indent="0" marL="0">
+            <a:pPr marL="0" indent="0">
               <a:buNone/>
             </a:pPr>
             <a:r>
@@ -12707,7 +12354,7 @@
           <a:bodyPr wrap="square" lIns="0" tIns="0" rIns="0" bIns="0" rtlCol="0" anchor="ctr"/>
           <a:lstStyle/>
           <a:p>
-            <a:pPr indent="0" marL="0">
+            <a:pPr marL="0" indent="0">
               <a:buNone/>
             </a:pPr>
             <a:r>
@@ -12771,7 +12418,7 @@
           <a:bodyPr wrap="square" lIns="0" tIns="0" rIns="0" bIns="0" rtlCol="0" anchor="ctr"/>
           <a:lstStyle/>
           <a:p>
-            <a:pPr indent="0" marL="0">
+            <a:pPr marL="0" indent="0">
               <a:buNone/>
             </a:pPr>
             <a:r>
@@ -12810,7 +12457,7 @@
           <a:bodyPr wrap="square" lIns="0" tIns="0" rIns="0" bIns="0" rtlCol="0" anchor="ctr"/>
           <a:lstStyle/>
           <a:p>
-            <a:pPr indent="0" marL="0">
+            <a:pPr marL="0" indent="0">
               <a:buNone/>
             </a:pPr>
             <a:r>
@@ -12874,7 +12521,7 @@
           <a:bodyPr wrap="square" lIns="0" tIns="0" rIns="0" bIns="0" rtlCol="0" anchor="ctr"/>
           <a:lstStyle/>
           <a:p>
-            <a:pPr indent="0" marL="0">
+            <a:pPr marL="0" indent="0">
               <a:buNone/>
             </a:pPr>
             <a:r>
@@ -12913,7 +12560,7 @@
           <a:bodyPr wrap="square" lIns="0" tIns="0" rIns="0" bIns="0" rtlCol="0" anchor="ctr"/>
           <a:lstStyle/>
           <a:p>
-            <a:pPr indent="0" marL="0">
+            <a:pPr marL="0" indent="0">
               <a:buNone/>
             </a:pPr>
             <a:r>
@@ -12955,7 +12602,7 @@
             <a:prstDash val="solid"/>
           </a:ln>
           <a:effectLst>
-            <a:outerShdw sx="100000" sy="100000" kx="0" ky="0" algn="bl" rotWithShape="0" blurRad="76200" dist="19050" dir="5400000">
+            <a:outerShdw blurRad="76200" dist="19050" dir="5400000" algn="bl" rotWithShape="0">
               <a:srgbClr val="0B1F33">
                 <a:alpha val="10000"/>
               </a:srgbClr>
@@ -12986,7 +12633,7 @@
           </a:bodyPr>
           <a:lstStyle/>
           <a:p>
-            <a:pPr indent="0" marL="0">
+            <a:pPr marL="0" indent="0">
               <a:buNone/>
             </a:pPr>
             <a:r>
@@ -13027,7 +12674,7 @@
           </a:bodyPr>
           <a:lstStyle/>
           <a:p>
-            <a:pPr indent="0" marL="0">
+            <a:pPr marL="0" indent="0">
               <a:buNone/>
             </a:pPr>
             <a:r>
@@ -13069,7 +12716,7 @@
             <a:prstDash val="solid"/>
           </a:ln>
           <a:effectLst>
-            <a:outerShdw sx="100000" sy="100000" kx="0" ky="0" algn="bl" rotWithShape="0" blurRad="76200" dist="19050" dir="5400000">
+            <a:outerShdw blurRad="76200" dist="19050" dir="5400000" algn="bl" rotWithShape="0">
               <a:srgbClr val="0B1F33">
                 <a:alpha val="10000"/>
               </a:srgbClr>
@@ -13100,7 +12747,7 @@
           </a:bodyPr>
           <a:lstStyle/>
           <a:p>
-            <a:pPr indent="0" marL="0">
+            <a:pPr marL="0" indent="0">
               <a:buNone/>
             </a:pPr>
             <a:r>
@@ -13141,7 +12788,7 @@
           </a:bodyPr>
           <a:lstStyle/>
           <a:p>
-            <a:pPr indent="0" marL="0">
+            <a:pPr marL="0" indent="0">
               <a:buNone/>
             </a:pPr>
             <a:r>
@@ -13183,7 +12830,7 @@
             <a:prstDash val="solid"/>
           </a:ln>
           <a:effectLst>
-            <a:outerShdw sx="100000" sy="100000" kx="0" ky="0" algn="bl" rotWithShape="0" blurRad="76200" dist="19050" dir="5400000">
+            <a:outerShdw blurRad="76200" dist="19050" dir="5400000" algn="bl" rotWithShape="0">
               <a:srgbClr val="0B1F33">
                 <a:alpha val="10000"/>
               </a:srgbClr>
@@ -13214,7 +12861,7 @@
           </a:bodyPr>
           <a:lstStyle/>
           <a:p>
-            <a:pPr indent="0" marL="0">
+            <a:pPr marL="0" indent="0">
               <a:buNone/>
             </a:pPr>
             <a:r>
@@ -13255,7 +12902,7 @@
           </a:bodyPr>
           <a:lstStyle/>
           <a:p>
-            <a:pPr indent="0" marL="0">
+            <a:pPr marL="0" indent="0">
               <a:buNone/>
             </a:pPr>
             <a:r>
@@ -13297,7 +12944,7 @@
             <a:prstDash val="solid"/>
           </a:ln>
           <a:effectLst>
-            <a:outerShdw sx="100000" sy="100000" kx="0" ky="0" algn="bl" rotWithShape="0" blurRad="76200" dist="19050" dir="5400000">
+            <a:outerShdw blurRad="76200" dist="19050" dir="5400000" algn="bl" rotWithShape="0">
               <a:srgbClr val="0B1F33">
                 <a:alpha val="10000"/>
               </a:srgbClr>
@@ -13326,11 +12973,11 @@
           <a:bodyPr wrap="square" lIns="0" tIns="0" rIns="0" bIns="0" rtlCol="0" anchor="ctr"/>
           <a:lstStyle/>
           <a:p>
-            <a:pPr indent="0" marL="0">
-              <a:buNone/>
-            </a:pPr>
-            <a:r>
-              <a:rPr lang="en-US" sz="1050" b="1" spc="200" kern="0" dirty="0">
+            <a:pPr marL="0" indent="0">
+              <a:buNone/>
+            </a:pPr>
+            <a:r>
+              <a:rPr lang="en-US" sz="1050" b="1" kern="0" spc="200" dirty="0">
                 <a:solidFill>
                   <a:srgbClr val="D21034"/>
                 </a:solidFill>
@@ -13365,7 +13012,7 @@
           <a:bodyPr wrap="square" lIns="0" tIns="0" rIns="0" bIns="0" rtlCol="0" anchor="ctr"/>
           <a:lstStyle/>
           <a:p>
-            <a:pPr indent="0" marL="0">
+            <a:pPr marL="0" indent="0">
               <a:buNone/>
             </a:pPr>
             <a:r>
@@ -13406,7 +13053,7 @@
           </a:bodyPr>
           <a:lstStyle/>
           <a:p>
-            <a:pPr indent="0" marL="0">
+            <a:pPr marL="0" indent="0">
               <a:buNone/>
             </a:pPr>
             <a:r>
@@ -13447,7 +13094,7 @@
           </a:bodyPr>
           <a:lstStyle/>
           <a:p>
-            <a:pPr indent="0" marL="0">
+            <a:pPr marL="0" indent="0">
               <a:buNone/>
             </a:pPr>
             <a:r>
@@ -13486,7 +13133,7 @@
           <a:bodyPr wrap="square" lIns="0" tIns="0" rIns="0" bIns="0" rtlCol="0" anchor="ctr"/>
           <a:lstStyle/>
           <a:p>
-            <a:pPr indent="0" marL="0">
+            <a:pPr marL="0" indent="0">
               <a:buNone/>
             </a:pPr>
             <a:r>
@@ -13506,7 +13153,7 @@
       </p:sp>
       <p:graphicFrame>
         <p:nvGraphicFramePr>
-          <p:cNvPr id="39" name="Chart 0" descr=""/>
+          <p:cNvPr id="39" name="Chart 0"/>
           <p:cNvGraphicFramePr/>
           <p:nvPr/>
         </p:nvGraphicFramePr>
@@ -13514,9 +13161,9 @@
           <a:off x="8549640" y="3749040"/>
           <a:ext cx="3139135" cy="1600200"/>
         </p:xfrm>
-        <a:graphic xmlns:a="http://schemas.openxmlformats.org/drawingml/2006/main">
+        <a:graphic>
           <a:graphicData uri="http://schemas.openxmlformats.org/drawingml/2006/chart">
-            <c:chart xmlns:c="http://schemas.openxmlformats.org/drawingml/2006/chart" r:id="rId2"/>
+            <c:chart xmlns:c="http://schemas.openxmlformats.org/drawingml/2006/chart" xmlns:r="http://schemas.openxmlformats.org/officeDocument/2006/relationships" r:id="rId4"/>
           </a:graphicData>
         </a:graphic>
       </p:graphicFrame>
@@ -13544,7 +13191,7 @@
             <a:prstDash val="solid"/>
           </a:ln>
           <a:effectLst>
-            <a:outerShdw sx="100000" sy="100000" kx="0" ky="0" algn="bl" rotWithShape="0" blurRad="76200" dist="19050" dir="5400000">
+            <a:outerShdw blurRad="76200" dist="19050" dir="5400000" algn="bl" rotWithShape="0">
               <a:srgbClr val="0B1F33">
                 <a:alpha val="10000"/>
               </a:srgbClr>
@@ -13573,11 +13220,11 @@
           <a:bodyPr wrap="square" lIns="0" tIns="0" rIns="0" bIns="0" rtlCol="0" anchor="ctr"/>
           <a:lstStyle/>
           <a:p>
-            <a:pPr indent="0" marL="0">
-              <a:buNone/>
-            </a:pPr>
-            <a:r>
-              <a:rPr lang="en-US" sz="900" b="1" spc="200" kern="0" dirty="0">
+            <a:pPr marL="0" indent="0">
+              <a:buNone/>
+            </a:pPr>
+            <a:r>
+              <a:rPr lang="en-US" sz="900" b="1" kern="0" spc="200" dirty="0">
                 <a:solidFill>
                   <a:srgbClr val="0E9F6E"/>
                 </a:solidFill>
@@ -13614,7 +13261,7 @@
           </a:bodyPr>
           <a:lstStyle/>
           <a:p>
-            <a:pPr indent="0" marL="0">
+            <a:pPr marL="0" indent="0">
               <a:buNone/>
             </a:pPr>
             <a:r>
@@ -13656,7 +13303,7 @@
             <a:prstDash val="solid"/>
           </a:ln>
           <a:effectLst>
-            <a:outerShdw sx="100000" sy="100000" kx="0" ky="0" algn="bl" rotWithShape="0" blurRad="76200" dist="19050" dir="5400000">
+            <a:outerShdw blurRad="76200" dist="19050" dir="5400000" algn="bl" rotWithShape="0">
               <a:srgbClr val="0B1F33">
                 <a:alpha val="10000"/>
               </a:srgbClr>
@@ -13685,11 +13332,11 @@
           <a:bodyPr wrap="square" lIns="0" tIns="0" rIns="0" bIns="0" rtlCol="0" anchor="ctr"/>
           <a:lstStyle/>
           <a:p>
-            <a:pPr indent="0" marL="0">
-              <a:buNone/>
-            </a:pPr>
-            <a:r>
-              <a:rPr lang="en-US" sz="900" b="1" spc="200" kern="0" dirty="0">
+            <a:pPr marL="0" indent="0">
+              <a:buNone/>
+            </a:pPr>
+            <a:r>
+              <a:rPr lang="en-US" sz="900" b="1" kern="0" spc="200" dirty="0">
                 <a:solidFill>
                   <a:srgbClr val="F28C28"/>
                 </a:solidFill>
@@ -13726,7 +13373,7 @@
           </a:bodyPr>
           <a:lstStyle/>
           <a:p>
-            <a:pPr indent="0" marL="0">
+            <a:pPr marL="0" indent="0">
               <a:buNone/>
             </a:pPr>
             <a:r>
@@ -13768,7 +13415,7 @@
             <a:prstDash val="solid"/>
           </a:ln>
           <a:effectLst>
-            <a:outerShdw sx="100000" sy="100000" kx="0" ky="0" algn="bl" rotWithShape="0" blurRad="76200" dist="19050" dir="5400000">
+            <a:outerShdw blurRad="76200" dist="19050" dir="5400000" algn="bl" rotWithShape="0">
               <a:srgbClr val="0B1F33">
                 <a:alpha val="10000"/>
               </a:srgbClr>
@@ -13797,11 +13444,11 @@
           <a:bodyPr wrap="square" lIns="0" tIns="0" rIns="0" bIns="0" rtlCol="0" anchor="ctr"/>
           <a:lstStyle/>
           <a:p>
-            <a:pPr indent="0" marL="0">
-              <a:buNone/>
-            </a:pPr>
-            <a:r>
-              <a:rPr lang="en-US" sz="900" b="1" spc="200" kern="0" dirty="0">
+            <a:pPr marL="0" indent="0">
+              <a:buNone/>
+            </a:pPr>
+            <a:r>
+              <a:rPr lang="en-US" sz="900" b="1" kern="0" spc="200" dirty="0">
                 <a:solidFill>
                   <a:srgbClr val="0B1F33"/>
                 </a:solidFill>
@@ -13838,7 +13485,7 @@
           </a:bodyPr>
           <a:lstStyle/>
           <a:p>
-            <a:pPr indent="0" marL="0">
+            <a:pPr marL="0" indent="0">
               <a:buNone/>
             </a:pPr>
             <a:r>
@@ -13872,6 +13519,7 @@
         <a:solidFill>
           <a:srgbClr val="F5F7FA"/>
         </a:solidFill>
+        <a:effectLst/>
       </p:bgPr>
     </p:bg>
     <p:spTree>
@@ -13909,11 +13557,11 @@
           <a:bodyPr wrap="square" lIns="0" tIns="0" rIns="0" bIns="0" rtlCol="0" anchor="ctr"/>
           <a:lstStyle/>
           <a:p>
-            <a:pPr indent="0" marL="0">
-              <a:buNone/>
-            </a:pPr>
-            <a:r>
-              <a:rPr lang="en-US" sz="1050" b="1" spc="300" kern="0" dirty="0">
+            <a:pPr marL="0" indent="0">
+              <a:buNone/>
+            </a:pPr>
+            <a:r>
+              <a:rPr lang="en-US" sz="1050" b="1" kern="0" spc="300" dirty="0">
                 <a:solidFill>
                   <a:srgbClr val="006A4E"/>
                 </a:solidFill>
@@ -13950,7 +13598,7 @@
           </a:bodyPr>
           <a:lstStyle/>
           <a:p>
-            <a:pPr indent="0" marL="0">
+            <a:pPr marL="0" indent="0">
               <a:buNone/>
             </a:pPr>
             <a:r>
@@ -13989,7 +13637,7 @@
           <a:bodyPr wrap="square" lIns="0" tIns="0" rIns="0" bIns="0" rtlCol="0" anchor="ctr"/>
           <a:lstStyle/>
           <a:p>
-            <a:pPr indent="0" marL="0">
+            <a:pPr marL="0" indent="0">
               <a:buNone/>
             </a:pPr>
             <a:r>
@@ -14028,7 +13676,7 @@
           <a:bodyPr wrap="square" lIns="0" tIns="0" rIns="0" bIns="0" rtlCol="0" anchor="ctr"/>
           <a:lstStyle/>
           <a:p>
-            <a:pPr algn="r" indent="0" marL="0">
+            <a:pPr marL="0" indent="0" algn="r">
               <a:buNone/>
             </a:pPr>
             <a:r>
@@ -14094,7 +13742,7 @@
           </a:bodyPr>
           <a:lstStyle/>
           <a:p>
-            <a:pPr algn="ctr" indent="0" marL="0">
+            <a:pPr marL="0" indent="0" algn="ctr">
               <a:buNone/>
             </a:pPr>
             <a:r>
@@ -14160,7 +13808,7 @@
           </a:bodyPr>
           <a:lstStyle/>
           <a:p>
-            <a:pPr algn="ctr" indent="0" marL="0">
+            <a:pPr marL="0" indent="0" algn="ctr">
               <a:buNone/>
             </a:pPr>
             <a:r>
@@ -14226,7 +13874,7 @@
           </a:bodyPr>
           <a:lstStyle/>
           <a:p>
-            <a:pPr algn="ctr" indent="0" marL="0">
+            <a:pPr marL="0" indent="0" algn="ctr">
               <a:buNone/>
             </a:pPr>
             <a:r>
@@ -14292,7 +13940,7 @@
           </a:bodyPr>
           <a:lstStyle/>
           <a:p>
-            <a:pPr algn="ctr" indent="0" marL="0">
+            <a:pPr marL="0" indent="0" algn="ctr">
               <a:buNone/>
             </a:pPr>
             <a:r>
@@ -14358,7 +14006,7 @@
           </a:bodyPr>
           <a:lstStyle/>
           <a:p>
-            <a:pPr algn="ctr" indent="0" marL="0">
+            <a:pPr marL="0" indent="0" algn="ctr">
               <a:buNone/>
             </a:pPr>
             <a:r>
@@ -14424,7 +14072,7 @@
           </a:bodyPr>
           <a:lstStyle/>
           <a:p>
-            <a:pPr algn="ctr" indent="0" marL="0">
+            <a:pPr marL="0" indent="0" algn="ctr">
               <a:buNone/>
             </a:pPr>
             <a:r>
@@ -14490,7 +14138,7 @@
           </a:bodyPr>
           <a:lstStyle/>
           <a:p>
-            <a:pPr algn="ctr" indent="0" marL="0">
+            <a:pPr marL="0" indent="0" algn="ctr">
               <a:buNone/>
             </a:pPr>
             <a:r>
@@ -14531,7 +14179,7 @@
           </a:bodyPr>
           <a:lstStyle/>
           <a:p>
-            <a:pPr indent="0" marL="0">
+            <a:pPr marL="0" indent="0">
               <a:buNone/>
             </a:pPr>
             <a:r>
@@ -14573,7 +14221,7 @@
             <a:prstDash val="solid"/>
           </a:ln>
           <a:effectLst>
-            <a:outerShdw sx="100000" sy="100000" kx="0" ky="0" algn="bl" rotWithShape="0" blurRad="76200" dist="19050" dir="5400000">
+            <a:outerShdw blurRad="76200" dist="19050" dir="5400000" algn="bl" rotWithShape="0">
               <a:srgbClr val="0B1F33">
                 <a:alpha val="10000"/>
               </a:srgbClr>
@@ -14602,7 +14250,7 @@
           <a:bodyPr wrap="square" lIns="0" tIns="0" rIns="0" bIns="0" rtlCol="0" anchor="ctr"/>
           <a:lstStyle/>
           <a:p>
-            <a:pPr indent="0" marL="0">
+            <a:pPr marL="0" indent="0">
               <a:buNone/>
             </a:pPr>
             <a:r>
@@ -14666,7 +14314,7 @@
           <a:bodyPr wrap="square" lIns="0" tIns="0" rIns="0" bIns="0" rtlCol="0" anchor="ctr"/>
           <a:lstStyle/>
           <a:p>
-            <a:pPr algn="ctr" indent="0" marL="0">
+            <a:pPr marL="0" indent="0" algn="ctr">
               <a:buNone/>
             </a:pPr>
             <a:r>
@@ -14730,7 +14378,7 @@
           <a:bodyPr wrap="square" lIns="0" tIns="0" rIns="0" bIns="0" rtlCol="0" anchor="ctr"/>
           <a:lstStyle/>
           <a:p>
-            <a:pPr algn="ctr" indent="0" marL="0">
+            <a:pPr marL="0" indent="0" algn="ctr">
               <a:buNone/>
             </a:pPr>
             <a:r>
@@ -14794,7 +14442,7 @@
           <a:bodyPr wrap="square" lIns="0" tIns="0" rIns="0" bIns="0" rtlCol="0" anchor="ctr"/>
           <a:lstStyle/>
           <a:p>
-            <a:pPr algn="ctr" indent="0" marL="0">
+            <a:pPr marL="0" indent="0" algn="ctr">
               <a:buNone/>
             </a:pPr>
             <a:r>
@@ -14858,7 +14506,7 @@
           <a:bodyPr wrap="square" lIns="0" tIns="0" rIns="0" bIns="0" rtlCol="0" anchor="ctr"/>
           <a:lstStyle/>
           <a:p>
-            <a:pPr algn="ctr" indent="0" marL="0">
+            <a:pPr marL="0" indent="0" algn="ctr">
               <a:buNone/>
             </a:pPr>
             <a:r>
@@ -14922,7 +14570,7 @@
           <a:bodyPr wrap="square" lIns="0" tIns="0" rIns="0" bIns="0" rtlCol="0" anchor="ctr"/>
           <a:lstStyle/>
           <a:p>
-            <a:pPr indent="0" marL="0">
+            <a:pPr marL="0" indent="0">
               <a:buNone/>
             </a:pPr>
             <a:r>
@@ -14986,7 +14634,7 @@
           <a:bodyPr wrap="square" lIns="0" tIns="0" rIns="0" bIns="0" rtlCol="0" anchor="ctr"/>
           <a:lstStyle/>
           <a:p>
-            <a:pPr indent="0" marL="0">
+            <a:pPr marL="0" indent="0">
               <a:buNone/>
             </a:pPr>
             <a:r>
@@ -15050,7 +14698,7 @@
           <a:bodyPr wrap="square" lIns="0" tIns="0" rIns="0" bIns="0" rtlCol="0" anchor="ctr"/>
           <a:lstStyle/>
           <a:p>
-            <a:pPr indent="0" marL="0">
+            <a:pPr marL="0" indent="0">
               <a:buNone/>
             </a:pPr>
             <a:r>
@@ -15114,7 +14762,7 @@
           <a:bodyPr wrap="square" lIns="0" tIns="0" rIns="0" bIns="0" rtlCol="0" anchor="ctr"/>
           <a:lstStyle/>
           <a:p>
-            <a:pPr indent="0" marL="0">
+            <a:pPr marL="0" indent="0">
               <a:buNone/>
             </a:pPr>
             <a:r>
@@ -15153,7 +14801,7 @@
           <a:bodyPr wrap="square" lIns="0" tIns="0" rIns="0" bIns="0" rtlCol="0" anchor="ctr"/>
           <a:lstStyle/>
           <a:p>
-            <a:pPr indent="0" marL="0">
+            <a:pPr marL="0" indent="0">
               <a:buNone/>
             </a:pPr>
             <a:r>
@@ -15195,7 +14843,7 @@
             <a:prstDash val="solid"/>
           </a:ln>
           <a:effectLst>
-            <a:outerShdw sx="100000" sy="100000" kx="0" ky="0" algn="bl" rotWithShape="0" blurRad="76200" dist="19050" dir="5400000">
+            <a:outerShdw blurRad="76200" dist="19050" dir="5400000" algn="bl" rotWithShape="0">
               <a:srgbClr val="0B1F33">
                 <a:alpha val="10000"/>
               </a:srgbClr>
@@ -15224,7 +14872,7 @@
           <a:bodyPr wrap="square" lIns="0" tIns="0" rIns="0" bIns="0" rtlCol="0" anchor="ctr"/>
           <a:lstStyle/>
           <a:p>
-            <a:pPr indent="0" marL="0">
+            <a:pPr marL="0" indent="0">
               <a:buNone/>
             </a:pPr>
             <a:r>
@@ -15244,7 +14892,7 @@
       </p:sp>
       <p:graphicFrame>
         <p:nvGraphicFramePr>
-          <p:cNvPr id="42" name="Chart 0" descr=""/>
+          <p:cNvPr id="42" name="Chart 0"/>
           <p:cNvGraphicFramePr/>
           <p:nvPr/>
         </p:nvGraphicFramePr>
@@ -15252,9 +14900,9 @@
           <a:off x="4617720" y="2834640"/>
           <a:ext cx="4389120" cy="2514600"/>
         </p:xfrm>
-        <a:graphic xmlns:a="http://schemas.openxmlformats.org/drawingml/2006/main">
+        <a:graphic>
           <a:graphicData uri="http://schemas.openxmlformats.org/drawingml/2006/chart">
-            <c:chart xmlns:c="http://schemas.openxmlformats.org/drawingml/2006/chart" r:id="rId1"/>
+            <c:chart xmlns:c="http://schemas.openxmlformats.org/drawingml/2006/chart" xmlns:r="http://schemas.openxmlformats.org/officeDocument/2006/relationships" r:id="rId3"/>
           </a:graphicData>
         </a:graphic>
       </p:graphicFrame>
@@ -15282,7 +14930,7 @@
             <a:prstDash val="solid"/>
           </a:ln>
           <a:effectLst>
-            <a:outerShdw sx="100000" sy="100000" kx="0" ky="0" algn="bl" rotWithShape="0" blurRad="76200" dist="19050" dir="5400000">
+            <a:outerShdw blurRad="76200" dist="19050" dir="5400000" algn="bl" rotWithShape="0">
               <a:srgbClr val="0B1F33">
                 <a:alpha val="10000"/>
               </a:srgbClr>
@@ -15311,7 +14959,7 @@
           <a:bodyPr wrap="square" lIns="0" tIns="0" rIns="0" bIns="0" rtlCol="0" anchor="ctr"/>
           <a:lstStyle/>
           <a:p>
-            <a:pPr indent="0" marL="0">
+            <a:pPr marL="0" indent="0">
               <a:buNone/>
             </a:pPr>
             <a:r>
@@ -15352,7 +15000,7 @@
           </a:bodyPr>
           <a:lstStyle/>
           <a:p>
-            <a:pPr indent="0" marL="0">
+            <a:pPr marL="0" indent="0">
               <a:buNone/>
             </a:pPr>
             <a:r>
@@ -15393,7 +15041,7 @@
           </a:bodyPr>
           <a:lstStyle/>
           <a:p>
-            <a:pPr indent="0" marL="0">
+            <a:pPr marL="0" indent="0">
               <a:buNone/>
             </a:pPr>
             <a:r>
@@ -15432,7 +15080,7 @@
           <a:bodyPr wrap="square" lIns="0" tIns="0" rIns="0" bIns="0" rtlCol="0" anchor="ctr"/>
           <a:lstStyle/>
           <a:p>
-            <a:pPr indent="0" marL="0">
+            <a:pPr marL="0" indent="0">
               <a:buNone/>
             </a:pPr>
             <a:r>
@@ -15474,7 +15122,7 @@
             <a:prstDash val="solid"/>
           </a:ln>
           <a:effectLst>
-            <a:outerShdw sx="100000" sy="100000" kx="0" ky="0" algn="bl" rotWithShape="0" blurRad="76200" dist="19050" dir="5400000">
+            <a:outerShdw blurRad="76200" dist="19050" dir="5400000" algn="bl" rotWithShape="0">
               <a:srgbClr val="0B1F33">
                 <a:alpha val="10000"/>
               </a:srgbClr>
@@ -15503,11 +15151,11 @@
           <a:bodyPr wrap="square" lIns="0" tIns="0" rIns="0" bIns="0" rtlCol="0" anchor="ctr"/>
           <a:lstStyle/>
           <a:p>
-            <a:pPr indent="0" marL="0">
-              <a:buNone/>
-            </a:pPr>
-            <a:r>
-              <a:rPr lang="en-US" sz="900" b="1" spc="200" kern="0" dirty="0">
+            <a:pPr marL="0" indent="0">
+              <a:buNone/>
+            </a:pPr>
+            <a:r>
+              <a:rPr lang="en-US" sz="900" b="1" kern="0" spc="200" dirty="0">
                 <a:solidFill>
                   <a:srgbClr val="0E9F6E"/>
                 </a:solidFill>
@@ -15544,7 +15192,7 @@
           </a:bodyPr>
           <a:lstStyle/>
           <a:p>
-            <a:pPr indent="0" marL="0">
+            <a:pPr marL="0" indent="0">
               <a:buNone/>
             </a:pPr>
             <a:r>
@@ -15586,7 +15234,7 @@
             <a:prstDash val="solid"/>
           </a:ln>
           <a:effectLst>
-            <a:outerShdw sx="100000" sy="100000" kx="0" ky="0" algn="bl" rotWithShape="0" blurRad="76200" dist="19050" dir="5400000">
+            <a:outerShdw blurRad="76200" dist="19050" dir="5400000" algn="bl" rotWithShape="0">
               <a:srgbClr val="0B1F33">
                 <a:alpha val="10000"/>
               </a:srgbClr>
@@ -15615,11 +15263,11 @@
           <a:bodyPr wrap="square" lIns="0" tIns="0" rIns="0" bIns="0" rtlCol="0" anchor="ctr"/>
           <a:lstStyle/>
           <a:p>
-            <a:pPr indent="0" marL="0">
-              <a:buNone/>
-            </a:pPr>
-            <a:r>
-              <a:rPr lang="en-US" sz="900" b="1" spc="200" kern="0" dirty="0">
+            <a:pPr marL="0" indent="0">
+              <a:buNone/>
+            </a:pPr>
+            <a:r>
+              <a:rPr lang="en-US" sz="900" b="1" kern="0" spc="200" dirty="0">
                 <a:solidFill>
                   <a:srgbClr val="F28C28"/>
                 </a:solidFill>
@@ -15656,7 +15304,7 @@
           </a:bodyPr>
           <a:lstStyle/>
           <a:p>
-            <a:pPr indent="0" marL="0">
+            <a:pPr marL="0" indent="0">
               <a:buNone/>
             </a:pPr>
             <a:r>
@@ -15698,7 +15346,7 @@
             <a:prstDash val="solid"/>
           </a:ln>
           <a:effectLst>
-            <a:outerShdw sx="100000" sy="100000" kx="0" ky="0" algn="bl" rotWithShape="0" blurRad="76200" dist="19050" dir="5400000">
+            <a:outerShdw blurRad="76200" dist="19050" dir="5400000" algn="bl" rotWithShape="0">
               <a:srgbClr val="0B1F33">
                 <a:alpha val="10000"/>
               </a:srgbClr>
@@ -15727,11 +15375,11 @@
           <a:bodyPr wrap="square" lIns="0" tIns="0" rIns="0" bIns="0" rtlCol="0" anchor="ctr"/>
           <a:lstStyle/>
           <a:p>
-            <a:pPr indent="0" marL="0">
-              <a:buNone/>
-            </a:pPr>
-            <a:r>
-              <a:rPr lang="en-US" sz="900" b="1" spc="200" kern="0" dirty="0">
+            <a:pPr marL="0" indent="0">
+              <a:buNone/>
+            </a:pPr>
+            <a:r>
+              <a:rPr lang="en-US" sz="900" b="1" kern="0" spc="200" dirty="0">
                 <a:solidFill>
                   <a:srgbClr val="0B1F33"/>
                 </a:solidFill>
@@ -15768,7 +15416,7 @@
           </a:bodyPr>
           <a:lstStyle/>
           <a:p>
-            <a:pPr indent="0" marL="0">
+            <a:pPr marL="0" indent="0">
               <a:buNone/>
             </a:pPr>
             <a:r>
@@ -15802,6 +15450,7 @@
         <a:solidFill>
           <a:srgbClr val="F5F7FA"/>
         </a:solidFill>
+        <a:effectLst/>
       </p:bgPr>
     </p:bg>
     <p:spTree>
@@ -15839,11 +15488,11 @@
           <a:bodyPr wrap="square" lIns="0" tIns="0" rIns="0" bIns="0" rtlCol="0" anchor="ctr"/>
           <a:lstStyle/>
           <a:p>
-            <a:pPr indent="0" marL="0">
-              <a:buNone/>
-            </a:pPr>
-            <a:r>
-              <a:rPr lang="en-US" sz="1050" b="1" spc="300" kern="0" dirty="0">
+            <a:pPr marL="0" indent="0">
+              <a:buNone/>
+            </a:pPr>
+            <a:r>
+              <a:rPr lang="en-US" sz="1050" b="1" kern="0" spc="300" dirty="0">
                 <a:solidFill>
                   <a:srgbClr val="006A4E"/>
                 </a:solidFill>
@@ -15880,7 +15529,7 @@
           </a:bodyPr>
           <a:lstStyle/>
           <a:p>
-            <a:pPr indent="0" marL="0">
+            <a:pPr marL="0" indent="0">
               <a:buNone/>
             </a:pPr>
             <a:r>
@@ -15919,7 +15568,7 @@
           <a:bodyPr wrap="square" lIns="0" tIns="0" rIns="0" bIns="0" rtlCol="0" anchor="ctr"/>
           <a:lstStyle/>
           <a:p>
-            <a:pPr indent="0" marL="0">
+            <a:pPr marL="0" indent="0">
               <a:buNone/>
             </a:pPr>
             <a:r>
@@ -15958,7 +15607,7 @@
           <a:bodyPr wrap="square" lIns="0" tIns="0" rIns="0" bIns="0" rtlCol="0" anchor="ctr"/>
           <a:lstStyle/>
           <a:p>
-            <a:pPr algn="r" indent="0" marL="0">
+            <a:pPr marL="0" indent="0" algn="r">
               <a:buNone/>
             </a:pPr>
             <a:r>
@@ -16000,7 +15649,7 @@
             <a:prstDash val="solid"/>
           </a:ln>
           <a:effectLst>
-            <a:outerShdw sx="100000" sy="100000" kx="0" ky="0" algn="bl" rotWithShape="0" blurRad="76200" dist="19050" dir="5400000">
+            <a:outerShdw blurRad="76200" dist="19050" dir="5400000" algn="bl" rotWithShape="0">
               <a:srgbClr val="0B1F33">
                 <a:alpha val="10000"/>
               </a:srgbClr>
@@ -16010,14 +15659,14 @@
       </p:sp>
       <p:pic>
         <p:nvPicPr>
-          <p:cNvPr id="7" name="Image 0" descr="map_palier.png">    </p:cNvPr>
+          <p:cNvPr id="7" name="Image 0" descr="map_palier.png"/>
           <p:cNvPicPr>
             <a:picLocks noChangeAspect="1"/>
           </p:cNvPicPr>
           <p:nvPr/>
         </p:nvPicPr>
         <p:blipFill>
-          <a:blip r:embed="rId1"/>
+          <a:blip r:embed="rId3"/>
           <a:stretch>
             <a:fillRect/>
           </a:stretch>
@@ -16078,7 +15727,7 @@
           <a:bodyPr wrap="square" lIns="0" tIns="0" rIns="0" bIns="0" rtlCol="0" anchor="t"/>
           <a:lstStyle/>
           <a:p>
-            <a:pPr indent="0" marL="0">
+            <a:pPr marL="0" indent="0">
               <a:buNone/>
             </a:pPr>
             <a:r>
@@ -16142,7 +15791,7 @@
           <a:bodyPr wrap="square" lIns="0" tIns="0" rIns="0" bIns="0" rtlCol="0" anchor="t"/>
           <a:lstStyle/>
           <a:p>
-            <a:pPr indent="0" marL="0">
+            <a:pPr marL="0" indent="0">
               <a:buNone/>
             </a:pPr>
             <a:r>
@@ -16206,7 +15855,7 @@
           <a:bodyPr wrap="square" lIns="0" tIns="0" rIns="0" bIns="0" rtlCol="0" anchor="t"/>
           <a:lstStyle/>
           <a:p>
-            <a:pPr indent="0" marL="0">
+            <a:pPr marL="0" indent="0">
               <a:buNone/>
             </a:pPr>
             <a:r>
@@ -16248,7 +15897,7 @@
             <a:prstDash val="solid"/>
           </a:ln>
           <a:effectLst>
-            <a:outerShdw sx="100000" sy="100000" kx="0" ky="0" algn="bl" rotWithShape="0" blurRad="76200" dist="19050" dir="5400000">
+            <a:outerShdw blurRad="76200" dist="19050" dir="5400000" algn="bl" rotWithShape="0">
               <a:srgbClr val="0B1F33">
                 <a:alpha val="10000"/>
               </a:srgbClr>
@@ -16277,7 +15926,7 @@
           <a:bodyPr wrap="square" lIns="0" tIns="0" rIns="0" bIns="0" rtlCol="0" anchor="ctr"/>
           <a:lstStyle/>
           <a:p>
-            <a:pPr algn="ctr" indent="0" marL="0">
+            <a:pPr marL="0" indent="0" algn="ctr">
               <a:buNone/>
             </a:pPr>
             <a:r>
@@ -16316,7 +15965,7 @@
           <a:bodyPr wrap="square" lIns="0" tIns="0" rIns="0" bIns="0" rtlCol="0" anchor="ctr"/>
           <a:lstStyle/>
           <a:p>
-            <a:pPr algn="ctr" indent="0" marL="0">
+            <a:pPr marL="0" indent="0" algn="ctr">
               <a:buNone/>
             </a:pPr>
             <a:r>
@@ -16358,7 +16007,7 @@
             <a:prstDash val="solid"/>
           </a:ln>
           <a:effectLst>
-            <a:outerShdw sx="100000" sy="100000" kx="0" ky="0" algn="bl" rotWithShape="0" blurRad="76200" dist="19050" dir="5400000">
+            <a:outerShdw blurRad="76200" dist="19050" dir="5400000" algn="bl" rotWithShape="0">
               <a:srgbClr val="0B1F33">
                 <a:alpha val="10000"/>
               </a:srgbClr>
@@ -16387,7 +16036,7 @@
           <a:bodyPr wrap="square" lIns="0" tIns="0" rIns="0" bIns="0" rtlCol="0" anchor="ctr"/>
           <a:lstStyle/>
           <a:p>
-            <a:pPr algn="ctr" indent="0" marL="0">
+            <a:pPr marL="0" indent="0" algn="ctr">
               <a:buNone/>
             </a:pPr>
             <a:r>
@@ -16426,7 +16075,7 @@
           <a:bodyPr wrap="square" lIns="0" tIns="0" rIns="0" bIns="0" rtlCol="0" anchor="ctr"/>
           <a:lstStyle/>
           <a:p>
-            <a:pPr algn="ctr" indent="0" marL="0">
+            <a:pPr marL="0" indent="0" algn="ctr">
               <a:buNone/>
             </a:pPr>
             <a:r>
@@ -16468,7 +16117,7 @@
             <a:prstDash val="solid"/>
           </a:ln>
           <a:effectLst>
-            <a:outerShdw sx="100000" sy="100000" kx="0" ky="0" algn="bl" rotWithShape="0" blurRad="76200" dist="19050" dir="5400000">
+            <a:outerShdw blurRad="76200" dist="19050" dir="5400000" algn="bl" rotWithShape="0">
               <a:srgbClr val="0B1F33">
                 <a:alpha val="10000"/>
               </a:srgbClr>
@@ -16497,7 +16146,7 @@
           <a:bodyPr wrap="square" lIns="0" tIns="0" rIns="0" bIns="0" rtlCol="0" anchor="ctr"/>
           <a:lstStyle/>
           <a:p>
-            <a:pPr algn="ctr" indent="0" marL="0">
+            <a:pPr marL="0" indent="0" algn="ctr">
               <a:buNone/>
             </a:pPr>
             <a:r>
@@ -16536,7 +16185,7 @@
           <a:bodyPr wrap="square" lIns="0" tIns="0" rIns="0" bIns="0" rtlCol="0" anchor="ctr"/>
           <a:lstStyle/>
           <a:p>
-            <a:pPr algn="ctr" indent="0" marL="0">
+            <a:pPr marL="0" indent="0" algn="ctr">
               <a:buNone/>
             </a:pPr>
             <a:r>
@@ -16578,7 +16227,7 @@
             <a:prstDash val="solid"/>
           </a:ln>
           <a:effectLst>
-            <a:outerShdw sx="100000" sy="100000" kx="0" ky="0" algn="bl" rotWithShape="0" blurRad="76200" dist="19050" dir="5400000">
+            <a:outerShdw blurRad="76200" dist="19050" dir="5400000" algn="bl" rotWithShape="0">
               <a:srgbClr val="0B1F33">
                 <a:alpha val="10000"/>
               </a:srgbClr>
@@ -16607,7 +16256,7 @@
           <a:bodyPr wrap="square" lIns="0" tIns="0" rIns="0" bIns="0" rtlCol="0" anchor="ctr"/>
           <a:lstStyle/>
           <a:p>
-            <a:pPr indent="0" marL="0">
+            <a:pPr marL="0" indent="0">
               <a:buNone/>
             </a:pPr>
             <a:r>
@@ -16648,7 +16297,7 @@
           </a:bodyPr>
           <a:lstStyle/>
           <a:p>
-            <a:pPr indent="0" marL="0">
+            <a:pPr marL="0" indent="0">
               <a:buNone/>
             </a:pPr>
             <a:r>
@@ -16690,7 +16339,7 @@
             <a:prstDash val="solid"/>
           </a:ln>
           <a:effectLst>
-            <a:outerShdw sx="100000" sy="100000" kx="0" ky="0" algn="bl" rotWithShape="0" blurRad="76200" dist="19050" dir="5400000">
+            <a:outerShdw blurRad="76200" dist="19050" dir="5400000" algn="bl" rotWithShape="0">
               <a:srgbClr val="0B1F33">
                 <a:alpha val="10000"/>
               </a:srgbClr>
@@ -16719,7 +16368,7 @@
           <a:bodyPr wrap="square" lIns="0" tIns="0" rIns="0" bIns="0" rtlCol="0" anchor="ctr"/>
           <a:lstStyle/>
           <a:p>
-            <a:pPr indent="0" marL="0">
+            <a:pPr marL="0" indent="0">
               <a:buNone/>
             </a:pPr>
             <a:r>
@@ -16760,7 +16409,7 @@
           </a:bodyPr>
           <a:lstStyle/>
           <a:p>
-            <a:pPr indent="0" marL="0">
+            <a:pPr marL="0" indent="0">
               <a:spcAft>
                 <a:spcPts val="400"/>
               </a:spcAft>
@@ -16777,33 +16426,27 @@
               </a:rPr>
               <a:t>P1 : </a:t>
             </a:r>
-            <a:pPr indent="0" marL="0">
+            <a:r>
+              <a:rPr lang="en-US" sz="1050" dirty="0">
+                <a:solidFill>
+                  <a:srgbClr val="334155"/>
+                </a:solidFill>
+                <a:latin typeface="Calibri" pitchFamily="34" charset="0"/>
+                <a:ea typeface="Calibri" pitchFamily="34" charset="-122"/>
+                <a:cs typeface="Calibri" pitchFamily="34" charset="-120"/>
+              </a:rPr>
+              <a:t>besoin élevé et levier numérique (Mobile Money) déjà présent : intervention rapide.</a:t>
+            </a:r>
+            <a:endParaRPr lang="en-US" sz="1050" dirty="0"/>
+          </a:p>
+          <a:p>
+            <a:pPr marL="0" indent="0">
               <a:spcAft>
                 <a:spcPts val="400"/>
               </a:spcAft>
               <a:buNone/>
             </a:pPr>
             <a:r>
-              <a:rPr lang="en-US" sz="1050" dirty="0">
-                <a:solidFill>
-                  <a:srgbClr val="334155"/>
-                </a:solidFill>
-                <a:latin typeface="Calibri" pitchFamily="34" charset="0"/>
-                <a:ea typeface="Calibri" pitchFamily="34" charset="-122"/>
-                <a:cs typeface="Calibri" pitchFamily="34" charset="-120"/>
-              </a:rPr>
-              <a:t>besoin élevé et levier numérique (Mobile Money) déjà présent : intervention rapide.</a:t>
-            </a:r>
-            <a:endParaRPr lang="en-US" sz="1050" dirty="0"/>
-          </a:p>
-          <a:p>
-            <a:pPr indent="0" marL="0">
-              <a:spcAft>
-                <a:spcPts val="400"/>
-              </a:spcAft>
-              <a:buNone/>
-            </a:pPr>
-            <a:r>
               <a:rPr lang="en-US" sz="1050" b="1" dirty="0">
                 <a:solidFill>
                   <a:srgbClr val="F28C28"/>
@@ -16814,12 +16457,6 @@
               </a:rPr>
               <a:t>P2 : </a:t>
             </a:r>
-            <a:pPr indent="0" marL="0">
-              <a:spcAft>
-                <a:spcPts val="400"/>
-              </a:spcAft>
-              <a:buNone/>
-            </a:pPr>
             <a:r>
               <a:rPr lang="en-US" sz="1050" dirty="0">
                 <a:solidFill>
@@ -16859,7 +16496,7 @@
             <a:prstDash val="solid"/>
           </a:ln>
           <a:effectLst>
-            <a:outerShdw sx="100000" sy="100000" kx="0" ky="0" algn="bl" rotWithShape="0" blurRad="76200" dist="19050" dir="5400000">
+            <a:outerShdw blurRad="76200" dist="19050" dir="5400000" algn="bl" rotWithShape="0">
               <a:srgbClr val="0B1F33">
                 <a:alpha val="10000"/>
               </a:srgbClr>
@@ -16888,7 +16525,7 @@
           <a:bodyPr wrap="square" lIns="0" tIns="0" rIns="0" bIns="0" rtlCol="0" anchor="ctr"/>
           <a:lstStyle/>
           <a:p>
-            <a:pPr indent="0" marL="0">
+            <a:pPr marL="0" indent="0">
               <a:buNone/>
             </a:pPr>
             <a:r>
@@ -16908,7 +16545,7 @@
       </p:sp>
       <p:graphicFrame>
         <p:nvGraphicFramePr>
-          <p:cNvPr id="31" name="Chart 0" descr=""/>
+          <p:cNvPr id="31" name="Chart 0"/>
           <p:cNvGraphicFramePr/>
           <p:nvPr/>
         </p:nvGraphicFramePr>
@@ -16916,9 +16553,9 @@
           <a:off x="8275320" y="1783080"/>
           <a:ext cx="3413455" cy="1920240"/>
         </p:xfrm>
-        <a:graphic xmlns:a="http://schemas.openxmlformats.org/drawingml/2006/main">
+        <a:graphic>
           <a:graphicData uri="http://schemas.openxmlformats.org/drawingml/2006/chart">
-            <c:chart xmlns:c="http://schemas.openxmlformats.org/drawingml/2006/chart" r:id="rId2"/>
+            <c:chart xmlns:c="http://schemas.openxmlformats.org/drawingml/2006/chart" xmlns:r="http://schemas.openxmlformats.org/officeDocument/2006/relationships" r:id="rId4"/>
           </a:graphicData>
         </a:graphic>
       </p:graphicFrame>
@@ -16946,7 +16583,7 @@
             <a:prstDash val="solid"/>
           </a:ln>
           <a:effectLst>
-            <a:outerShdw sx="100000" sy="100000" kx="0" ky="0" algn="bl" rotWithShape="0" blurRad="76200" dist="19050" dir="5400000">
+            <a:outerShdw blurRad="76200" dist="19050" dir="5400000" algn="bl" rotWithShape="0">
               <a:srgbClr val="0B1F33">
                 <a:alpha val="10000"/>
               </a:srgbClr>
@@ -16975,11 +16612,11 @@
           <a:bodyPr wrap="square" lIns="0" tIns="0" rIns="0" bIns="0" rtlCol="0" anchor="ctr"/>
           <a:lstStyle/>
           <a:p>
-            <a:pPr indent="0" marL="0">
-              <a:buNone/>
-            </a:pPr>
-            <a:r>
-              <a:rPr lang="en-US" sz="1050" b="1" spc="200" kern="0" dirty="0">
+            <a:pPr marL="0" indent="0">
+              <a:buNone/>
+            </a:pPr>
+            <a:r>
+              <a:rPr lang="en-US" sz="1050" b="1" kern="0" spc="200" dirty="0">
                 <a:solidFill>
                   <a:srgbClr val="FFCE00"/>
                 </a:solidFill>
@@ -17016,7 +16653,7 @@
           </a:bodyPr>
           <a:lstStyle/>
           <a:p>
-            <a:pPr indent="0" marL="0">
+            <a:pPr marL="0" indent="0">
               <a:spcAft>
                 <a:spcPts val="300"/>
               </a:spcAft>
@@ -17033,12 +16670,6 @@
               </a:rPr>
               <a:t>2 000</a:t>
             </a:r>
-            <a:pPr indent="0" marL="0">
-              <a:spcAft>
-                <a:spcPts val="300"/>
-              </a:spcAft>
-              <a:buNone/>
-            </a:pPr>
             <a:r>
               <a:rPr lang="en-US" sz="1050" dirty="0">
                 <a:solidFill>
@@ -17053,7 +16684,7 @@
             <a:endParaRPr lang="en-US" sz="2000" dirty="0"/>
           </a:p>
           <a:p>
-            <a:pPr indent="0" marL="0">
+            <a:pPr marL="0" indent="0">
               <a:spcAft>
                 <a:spcPts val="300"/>
               </a:spcAft>
@@ -17098,7 +16729,7 @@
             <a:prstDash val="solid"/>
           </a:ln>
           <a:effectLst>
-            <a:outerShdw sx="100000" sy="100000" kx="0" ky="0" algn="bl" rotWithShape="0" blurRad="76200" dist="19050" dir="5400000">
+            <a:outerShdw blurRad="76200" dist="19050" dir="5400000" algn="bl" rotWithShape="0">
               <a:srgbClr val="0B1F33">
                 <a:alpha val="10000"/>
               </a:srgbClr>
@@ -17127,11 +16758,11 @@
           <a:bodyPr wrap="square" lIns="0" tIns="0" rIns="0" bIns="0" rtlCol="0" anchor="ctr"/>
           <a:lstStyle/>
           <a:p>
-            <a:pPr indent="0" marL="0">
-              <a:buNone/>
-            </a:pPr>
-            <a:r>
-              <a:rPr lang="en-US" sz="900" b="1" spc="200" kern="0" dirty="0">
+            <a:pPr marL="0" indent="0">
+              <a:buNone/>
+            </a:pPr>
+            <a:r>
+              <a:rPr lang="en-US" sz="900" b="1" kern="0" spc="200" dirty="0">
                 <a:solidFill>
                   <a:srgbClr val="0E9F6E"/>
                 </a:solidFill>
@@ -17168,7 +16799,7 @@
           </a:bodyPr>
           <a:lstStyle/>
           <a:p>
-            <a:pPr indent="0" marL="0">
+            <a:pPr marL="0" indent="0">
               <a:buNone/>
             </a:pPr>
             <a:r>
@@ -17210,7 +16841,7 @@
             <a:prstDash val="solid"/>
           </a:ln>
           <a:effectLst>
-            <a:outerShdw sx="100000" sy="100000" kx="0" ky="0" algn="bl" rotWithShape="0" blurRad="76200" dist="19050" dir="5400000">
+            <a:outerShdw blurRad="76200" dist="19050" dir="5400000" algn="bl" rotWithShape="0">
               <a:srgbClr val="0B1F33">
                 <a:alpha val="10000"/>
               </a:srgbClr>
@@ -17239,11 +16870,11 @@
           <a:bodyPr wrap="square" lIns="0" tIns="0" rIns="0" bIns="0" rtlCol="0" anchor="ctr"/>
           <a:lstStyle/>
           <a:p>
-            <a:pPr indent="0" marL="0">
-              <a:buNone/>
-            </a:pPr>
-            <a:r>
-              <a:rPr lang="en-US" sz="900" b="1" spc="200" kern="0" dirty="0">
+            <a:pPr marL="0" indent="0">
+              <a:buNone/>
+            </a:pPr>
+            <a:r>
+              <a:rPr lang="en-US" sz="900" b="1" kern="0" spc="200" dirty="0">
                 <a:solidFill>
                   <a:srgbClr val="F28C28"/>
                 </a:solidFill>
@@ -17280,7 +16911,7 @@
           </a:bodyPr>
           <a:lstStyle/>
           <a:p>
-            <a:pPr indent="0" marL="0">
+            <a:pPr marL="0" indent="0">
               <a:buNone/>
             </a:pPr>
             <a:r>
@@ -17322,7 +16953,7 @@
             <a:prstDash val="solid"/>
           </a:ln>
           <a:effectLst>
-            <a:outerShdw sx="100000" sy="100000" kx="0" ky="0" algn="bl" rotWithShape="0" blurRad="76200" dist="19050" dir="5400000">
+            <a:outerShdw blurRad="76200" dist="19050" dir="5400000" algn="bl" rotWithShape="0">
               <a:srgbClr val="0B1F33">
                 <a:alpha val="10000"/>
               </a:srgbClr>
@@ -17351,11 +16982,11 @@
           <a:bodyPr wrap="square" lIns="0" tIns="0" rIns="0" bIns="0" rtlCol="0" anchor="ctr"/>
           <a:lstStyle/>
           <a:p>
-            <a:pPr indent="0" marL="0">
-              <a:buNone/>
-            </a:pPr>
-            <a:r>
-              <a:rPr lang="en-US" sz="900" b="1" spc="200" kern="0" dirty="0">
+            <a:pPr marL="0" indent="0">
+              <a:buNone/>
+            </a:pPr>
+            <a:r>
+              <a:rPr lang="en-US" sz="900" b="1" kern="0" spc="200" dirty="0">
                 <a:solidFill>
                   <a:srgbClr val="0B1F33"/>
                 </a:solidFill>
@@ -17392,7 +17023,7 @@
           </a:bodyPr>
           <a:lstStyle/>
           <a:p>
-            <a:pPr indent="0" marL="0">
+            <a:pPr marL="0" indent="0">
               <a:buNone/>
             </a:pPr>
             <a:r>
@@ -17426,6 +17057,7 @@
         <a:solidFill>
           <a:srgbClr val="F5F7FA"/>
         </a:solidFill>
+        <a:effectLst/>
       </p:bgPr>
     </p:bg>
     <p:spTree>
@@ -17463,11 +17095,11 @@
           <a:bodyPr wrap="square" lIns="0" tIns="0" rIns="0" bIns="0" rtlCol="0" anchor="ctr"/>
           <a:lstStyle/>
           <a:p>
-            <a:pPr indent="0" marL="0">
-              <a:buNone/>
-            </a:pPr>
-            <a:r>
-              <a:rPr lang="en-US" sz="1050" b="1" spc="300" kern="0" dirty="0">
+            <a:pPr marL="0" indent="0">
+              <a:buNone/>
+            </a:pPr>
+            <a:r>
+              <a:rPr lang="en-US" sz="1050" b="1" kern="0" spc="300" dirty="0">
                 <a:solidFill>
                   <a:srgbClr val="006A4E"/>
                 </a:solidFill>
@@ -17504,7 +17136,7 @@
           </a:bodyPr>
           <a:lstStyle/>
           <a:p>
-            <a:pPr indent="0" marL="0">
+            <a:pPr marL="0" indent="0">
               <a:buNone/>
             </a:pPr>
             <a:r>
@@ -17543,7 +17175,7 @@
           <a:bodyPr wrap="square" lIns="0" tIns="0" rIns="0" bIns="0" rtlCol="0" anchor="ctr"/>
           <a:lstStyle/>
           <a:p>
-            <a:pPr indent="0" marL="0">
+            <a:pPr marL="0" indent="0">
               <a:buNone/>
             </a:pPr>
             <a:r>
@@ -17582,7 +17214,7 @@
           <a:bodyPr wrap="square" lIns="0" tIns="0" rIns="0" bIns="0" rtlCol="0" anchor="ctr"/>
           <a:lstStyle/>
           <a:p>
-            <a:pPr algn="r" indent="0" marL="0">
+            <a:pPr marL="0" indent="0" algn="r">
               <a:buNone/>
             </a:pPr>
             <a:r>
@@ -17648,7 +17280,7 @@
           </a:bodyPr>
           <a:lstStyle/>
           <a:p>
-            <a:pPr indent="0" marL="0">
+            <a:pPr marL="0" indent="0">
               <a:buNone/>
             </a:pPr>
             <a:r>
@@ -17689,7 +17321,7 @@
           </a:bodyPr>
           <a:lstStyle/>
           <a:p>
-            <a:pPr indent="0" marL="0">
+            <a:pPr marL="0" indent="0">
               <a:buNone/>
             </a:pPr>
             <a:r>
@@ -17730,7 +17362,7 @@
           </a:bodyPr>
           <a:lstStyle/>
           <a:p>
-            <a:pPr indent="0" marL="0">
+            <a:pPr marL="0" indent="0">
               <a:buNone/>
             </a:pPr>
             <a:r>
@@ -17771,7 +17403,7 @@
           </a:bodyPr>
           <a:lstStyle/>
           <a:p>
-            <a:pPr indent="0" marL="0">
+            <a:pPr marL="0" indent="0">
               <a:buNone/>
             </a:pPr>
             <a:r>
@@ -17812,7 +17444,7 @@
           </a:bodyPr>
           <a:lstStyle/>
           <a:p>
-            <a:pPr indent="0" marL="0">
+            <a:pPr marL="0" indent="0">
               <a:buNone/>
             </a:pPr>
             <a:r>
@@ -17853,7 +17485,7 @@
           </a:bodyPr>
           <a:lstStyle/>
           <a:p>
-            <a:pPr indent="0" marL="0">
+            <a:pPr marL="0" indent="0">
               <a:buNone/>
             </a:pPr>
             <a:r>
@@ -17942,7 +17574,7 @@
           <a:bodyPr wrap="square" lIns="0" tIns="0" rIns="0" bIns="0" rtlCol="0" anchor="ctr"/>
           <a:lstStyle/>
           <a:p>
-            <a:pPr indent="0" marL="0">
+            <a:pPr marL="0" indent="0">
               <a:buNone/>
             </a:pPr>
             <a:r>
@@ -17959,7 +17591,7 @@
             <a:endParaRPr lang="en-US" sz="1150" dirty="0"/>
           </a:p>
           <a:p>
-            <a:pPr indent="0" marL="0">
+            <a:pPr marL="0" indent="0">
               <a:buNone/>
             </a:pPr>
             <a:r>
@@ -18000,7 +17632,7 @@
           </a:bodyPr>
           <a:lstStyle/>
           <a:p>
-            <a:pPr indent="0" marL="0">
+            <a:pPr marL="0" indent="0">
               <a:buNone/>
             </a:pPr>
             <a:r>
@@ -18041,7 +17673,7 @@
           </a:bodyPr>
           <a:lstStyle/>
           <a:p>
-            <a:pPr indent="0" marL="0">
+            <a:pPr marL="0" indent="0">
               <a:buNone/>
             </a:pPr>
             <a:r>
@@ -18082,7 +17714,7 @@
           </a:bodyPr>
           <a:lstStyle/>
           <a:p>
-            <a:pPr indent="0" marL="0">
+            <a:pPr marL="0" indent="0">
               <a:buNone/>
             </a:pPr>
             <a:r>
@@ -18123,7 +17755,7 @@
           </a:bodyPr>
           <a:lstStyle/>
           <a:p>
-            <a:pPr indent="0" marL="0">
+            <a:pPr marL="0" indent="0">
               <a:buNone/>
             </a:pPr>
             <a:r>
@@ -18164,7 +17796,7 @@
           </a:bodyPr>
           <a:lstStyle/>
           <a:p>
-            <a:pPr indent="0" marL="0">
+            <a:pPr marL="0" indent="0">
               <a:buNone/>
             </a:pPr>
             <a:r>
@@ -18181,7 +17813,7 @@
             <a:endParaRPr lang="en-US" sz="1050" dirty="0"/>
           </a:p>
           <a:p>
-            <a:pPr indent="0" marL="0">
+            <a:pPr marL="0" indent="0">
               <a:buNone/>
             </a:pPr>
             <a:r>
@@ -18270,7 +17902,7 @@
           <a:bodyPr wrap="square" lIns="0" tIns="0" rIns="0" bIns="0" rtlCol="0" anchor="ctr"/>
           <a:lstStyle/>
           <a:p>
-            <a:pPr indent="0" marL="0">
+            <a:pPr marL="0" indent="0">
               <a:buNone/>
             </a:pPr>
             <a:r>
@@ -18287,7 +17919,7 @@
             <a:endParaRPr lang="en-US" sz="1150" dirty="0"/>
           </a:p>
           <a:p>
-            <a:pPr indent="0" marL="0">
+            <a:pPr marL="0" indent="0">
               <a:buNone/>
             </a:pPr>
             <a:r>
@@ -18328,7 +17960,7 @@
           </a:bodyPr>
           <a:lstStyle/>
           <a:p>
-            <a:pPr indent="0" marL="0">
+            <a:pPr marL="0" indent="0">
               <a:buNone/>
             </a:pPr>
             <a:r>
@@ -18369,7 +18001,7 @@
           </a:bodyPr>
           <a:lstStyle/>
           <a:p>
-            <a:pPr indent="0" marL="0">
+            <a:pPr marL="0" indent="0">
               <a:buNone/>
             </a:pPr>
             <a:r>
@@ -18410,7 +18042,7 @@
           </a:bodyPr>
           <a:lstStyle/>
           <a:p>
-            <a:pPr indent="0" marL="0">
+            <a:pPr marL="0" indent="0">
               <a:buNone/>
             </a:pPr>
             <a:r>
@@ -18451,7 +18083,7 @@
           </a:bodyPr>
           <a:lstStyle/>
           <a:p>
-            <a:pPr indent="0" marL="0">
+            <a:pPr marL="0" indent="0">
               <a:buNone/>
             </a:pPr>
             <a:r>
@@ -18492,7 +18124,7 @@
           </a:bodyPr>
           <a:lstStyle/>
           <a:p>
-            <a:pPr indent="0" marL="0">
+            <a:pPr marL="0" indent="0">
               <a:buNone/>
             </a:pPr>
             <a:r>
@@ -18509,7 +18141,7 @@
             <a:endParaRPr lang="en-US" sz="1050" dirty="0"/>
           </a:p>
           <a:p>
-            <a:pPr indent="0" marL="0">
+            <a:pPr marL="0" indent="0">
               <a:buNone/>
             </a:pPr>
             <a:r>
@@ -18598,7 +18230,7 @@
           <a:bodyPr wrap="square" lIns="0" tIns="0" rIns="0" bIns="0" rtlCol="0" anchor="ctr"/>
           <a:lstStyle/>
           <a:p>
-            <a:pPr indent="0" marL="0">
+            <a:pPr marL="0" indent="0">
               <a:buNone/>
             </a:pPr>
             <a:r>
@@ -18615,7 +18247,7 @@
             <a:endParaRPr lang="en-US" sz="1150" dirty="0"/>
           </a:p>
           <a:p>
-            <a:pPr indent="0" marL="0">
+            <a:pPr marL="0" indent="0">
               <a:buNone/>
             </a:pPr>
             <a:r>
@@ -18656,7 +18288,7 @@
           </a:bodyPr>
           <a:lstStyle/>
           <a:p>
-            <a:pPr indent="0" marL="0">
+            <a:pPr marL="0" indent="0">
               <a:buNone/>
             </a:pPr>
             <a:r>
@@ -18697,7 +18329,7 @@
           </a:bodyPr>
           <a:lstStyle/>
           <a:p>
-            <a:pPr indent="0" marL="0">
+            <a:pPr marL="0" indent="0">
               <a:buNone/>
             </a:pPr>
             <a:r>
@@ -18738,7 +18370,7 @@
           </a:bodyPr>
           <a:lstStyle/>
           <a:p>
-            <a:pPr indent="0" marL="0">
+            <a:pPr marL="0" indent="0">
               <a:buNone/>
             </a:pPr>
             <a:r>
@@ -18779,7 +18411,7 @@
           </a:bodyPr>
           <a:lstStyle/>
           <a:p>
-            <a:pPr indent="0" marL="0">
+            <a:pPr marL="0" indent="0">
               <a:buNone/>
             </a:pPr>
             <a:r>
@@ -18820,7 +18452,7 @@
           </a:bodyPr>
           <a:lstStyle/>
           <a:p>
-            <a:pPr indent="0" marL="0">
+            <a:pPr marL="0" indent="0">
               <a:buNone/>
             </a:pPr>
             <a:r>
@@ -18837,7 +18469,7 @@
             <a:endParaRPr lang="en-US" sz="1050" dirty="0"/>
           </a:p>
           <a:p>
-            <a:pPr indent="0" marL="0">
+            <a:pPr marL="0" indent="0">
               <a:buNone/>
             </a:pPr>
             <a:r>
@@ -18926,7 +18558,7 @@
           <a:bodyPr wrap="square" lIns="0" tIns="0" rIns="0" bIns="0" rtlCol="0" anchor="ctr"/>
           <a:lstStyle/>
           <a:p>
-            <a:pPr indent="0" marL="0">
+            <a:pPr marL="0" indent="0">
               <a:buNone/>
             </a:pPr>
             <a:r>
@@ -18943,7 +18575,7 @@
             <a:endParaRPr lang="en-US" sz="1150" dirty="0"/>
           </a:p>
           <a:p>
-            <a:pPr indent="0" marL="0">
+            <a:pPr marL="0" indent="0">
               <a:buNone/>
             </a:pPr>
             <a:r>
@@ -18984,7 +18616,7 @@
           </a:bodyPr>
           <a:lstStyle/>
           <a:p>
-            <a:pPr indent="0" marL="0">
+            <a:pPr marL="0" indent="0">
               <a:buNone/>
             </a:pPr>
             <a:r>
@@ -19025,7 +18657,7 @@
           </a:bodyPr>
           <a:lstStyle/>
           <a:p>
-            <a:pPr indent="0" marL="0">
+            <a:pPr marL="0" indent="0">
               <a:buNone/>
             </a:pPr>
             <a:r>
@@ -19066,7 +18698,7 @@
           </a:bodyPr>
           <a:lstStyle/>
           <a:p>
-            <a:pPr indent="0" marL="0">
+            <a:pPr marL="0" indent="0">
               <a:buNone/>
             </a:pPr>
             <a:r>
@@ -19107,7 +18739,7 @@
           </a:bodyPr>
           <a:lstStyle/>
           <a:p>
-            <a:pPr indent="0" marL="0">
+            <a:pPr marL="0" indent="0">
               <a:buNone/>
             </a:pPr>
             <a:r>
@@ -19148,7 +18780,7 @@
           </a:bodyPr>
           <a:lstStyle/>
           <a:p>
-            <a:pPr indent="0" marL="0">
+            <a:pPr marL="0" indent="0">
               <a:buNone/>
             </a:pPr>
             <a:r>
@@ -19165,7 +18797,7 @@
             <a:endParaRPr lang="en-US" sz="1050" dirty="0"/>
           </a:p>
           <a:p>
-            <a:pPr indent="0" marL="0">
+            <a:pPr marL="0" indent="0">
               <a:buNone/>
             </a:pPr>
             <a:r>
@@ -19254,7 +18886,7 @@
           <a:bodyPr wrap="square" lIns="0" tIns="0" rIns="0" bIns="0" rtlCol="0" anchor="ctr"/>
           <a:lstStyle/>
           <a:p>
-            <a:pPr indent="0" marL="0">
+            <a:pPr marL="0" indent="0">
               <a:buNone/>
             </a:pPr>
             <a:r>
@@ -19271,7 +18903,7 @@
             <a:endParaRPr lang="en-US" sz="1150" dirty="0"/>
           </a:p>
           <a:p>
-            <a:pPr indent="0" marL="0">
+            <a:pPr marL="0" indent="0">
               <a:buNone/>
             </a:pPr>
             <a:r>
@@ -19312,7 +18944,7 @@
           </a:bodyPr>
           <a:lstStyle/>
           <a:p>
-            <a:pPr indent="0" marL="0">
+            <a:pPr marL="0" indent="0">
               <a:buNone/>
             </a:pPr>
             <a:r>
@@ -19353,7 +18985,7 @@
           </a:bodyPr>
           <a:lstStyle/>
           <a:p>
-            <a:pPr indent="0" marL="0">
+            <a:pPr marL="0" indent="0">
               <a:buNone/>
             </a:pPr>
             <a:r>
@@ -19394,7 +19026,7 @@
           </a:bodyPr>
           <a:lstStyle/>
           <a:p>
-            <a:pPr indent="0" marL="0">
+            <a:pPr marL="0" indent="0">
               <a:buNone/>
             </a:pPr>
             <a:r>
@@ -19435,7 +19067,7 @@
           </a:bodyPr>
           <a:lstStyle/>
           <a:p>
-            <a:pPr indent="0" marL="0">
+            <a:pPr marL="0" indent="0">
               <a:buNone/>
             </a:pPr>
             <a:r>
@@ -19476,7 +19108,7 @@
           </a:bodyPr>
           <a:lstStyle/>
           <a:p>
-            <a:pPr indent="0" marL="0">
+            <a:pPr marL="0" indent="0">
               <a:buNone/>
             </a:pPr>
             <a:r>
@@ -19493,7 +19125,7 @@
             <a:endParaRPr lang="en-US" sz="1050" dirty="0"/>
           </a:p>
           <a:p>
-            <a:pPr indent="0" marL="0">
+            <a:pPr marL="0" indent="0">
               <a:buNone/>
             </a:pPr>
             <a:r>
@@ -19535,7 +19167,7 @@
             <a:prstDash val="solid"/>
           </a:ln>
           <a:effectLst>
-            <a:outerShdw sx="100000" sy="100000" kx="0" ky="0" algn="bl" rotWithShape="0" blurRad="76200" dist="19050" dir="5400000">
+            <a:outerShdw blurRad="76200" dist="19050" dir="5400000" algn="bl" rotWithShape="0">
               <a:srgbClr val="0B1F33">
                 <a:alpha val="10000"/>
               </a:srgbClr>
@@ -19564,11 +19196,11 @@
           <a:bodyPr wrap="square" lIns="0" tIns="0" rIns="0" bIns="0" rtlCol="0" anchor="ctr"/>
           <a:lstStyle/>
           <a:p>
-            <a:pPr indent="0" marL="0">
-              <a:buNone/>
-            </a:pPr>
-            <a:r>
-              <a:rPr lang="en-US" sz="900" b="1" spc="200" kern="0" dirty="0">
+            <a:pPr marL="0" indent="0">
+              <a:buNone/>
+            </a:pPr>
+            <a:r>
+              <a:rPr lang="en-US" sz="900" b="1" kern="0" spc="200" dirty="0">
                 <a:solidFill>
                   <a:srgbClr val="0E9F6E"/>
                 </a:solidFill>
@@ -19605,7 +19237,7 @@
           </a:bodyPr>
           <a:lstStyle/>
           <a:p>
-            <a:pPr indent="0" marL="0">
+            <a:pPr marL="0" indent="0">
               <a:buNone/>
             </a:pPr>
             <a:r>
@@ -19647,7 +19279,7 @@
             <a:prstDash val="solid"/>
           </a:ln>
           <a:effectLst>
-            <a:outerShdw sx="100000" sy="100000" kx="0" ky="0" algn="bl" rotWithShape="0" blurRad="76200" dist="19050" dir="5400000">
+            <a:outerShdw blurRad="76200" dist="19050" dir="5400000" algn="bl" rotWithShape="0">
               <a:srgbClr val="0B1F33">
                 <a:alpha val="10000"/>
               </a:srgbClr>
@@ -19676,11 +19308,11 @@
           <a:bodyPr wrap="square" lIns="0" tIns="0" rIns="0" bIns="0" rtlCol="0" anchor="ctr"/>
           <a:lstStyle/>
           <a:p>
-            <a:pPr indent="0" marL="0">
-              <a:buNone/>
-            </a:pPr>
-            <a:r>
-              <a:rPr lang="en-US" sz="900" b="1" spc="200" kern="0" dirty="0">
+            <a:pPr marL="0" indent="0">
+              <a:buNone/>
+            </a:pPr>
+            <a:r>
+              <a:rPr lang="en-US" sz="900" b="1" kern="0" spc="200" dirty="0">
                 <a:solidFill>
                   <a:srgbClr val="F28C28"/>
                 </a:solidFill>
@@ -19717,7 +19349,7 @@
           </a:bodyPr>
           <a:lstStyle/>
           <a:p>
-            <a:pPr indent="0" marL="0">
+            <a:pPr marL="0" indent="0">
               <a:buNone/>
             </a:pPr>
             <a:r>
@@ -19759,7 +19391,7 @@
             <a:prstDash val="solid"/>
           </a:ln>
           <a:effectLst>
-            <a:outerShdw sx="100000" sy="100000" kx="0" ky="0" algn="bl" rotWithShape="0" blurRad="76200" dist="19050" dir="5400000">
+            <a:outerShdw blurRad="76200" dist="19050" dir="5400000" algn="bl" rotWithShape="0">
               <a:srgbClr val="0B1F33">
                 <a:alpha val="10000"/>
               </a:srgbClr>
@@ -19788,11 +19420,11 @@
           <a:bodyPr wrap="square" lIns="0" tIns="0" rIns="0" bIns="0" rtlCol="0" anchor="ctr"/>
           <a:lstStyle/>
           <a:p>
-            <a:pPr indent="0" marL="0">
-              <a:buNone/>
-            </a:pPr>
-            <a:r>
-              <a:rPr lang="en-US" sz="900" b="1" spc="200" kern="0" dirty="0">
+            <a:pPr marL="0" indent="0">
+              <a:buNone/>
+            </a:pPr>
+            <a:r>
+              <a:rPr lang="en-US" sz="900" b="1" kern="0" spc="200" dirty="0">
                 <a:solidFill>
                   <a:srgbClr val="0B1F33"/>
                 </a:solidFill>
@@ -19829,7 +19461,7 @@
           </a:bodyPr>
           <a:lstStyle/>
           <a:p>
-            <a:pPr indent="0" marL="0">
+            <a:pPr marL="0" indent="0">
               <a:buNone/>
             </a:pPr>
             <a:r>
@@ -20148,4 +19780,319 @@
     </a:ext>
   </a:extLst>
 </a:theme>
+</file>
+
+<file path=ppt/theme/theme2.xml><?xml version="1.0" encoding="utf-8"?>
+<a:theme xmlns:a="http://schemas.openxmlformats.org/drawingml/2006/main" name="Thème Office">
+  <a:themeElements>
+    <a:clrScheme name="Office">
+      <a:dk1>
+        <a:sysClr val="windowText" lastClr="000000"/>
+      </a:dk1>
+      <a:lt1>
+        <a:sysClr val="window" lastClr="FFFFFF"/>
+      </a:lt1>
+      <a:dk2>
+        <a:srgbClr val="0E2841"/>
+      </a:dk2>
+      <a:lt2>
+        <a:srgbClr val="E8E8E8"/>
+      </a:lt2>
+      <a:accent1>
+        <a:srgbClr val="156082"/>
+      </a:accent1>
+      <a:accent2>
+        <a:srgbClr val="E97132"/>
+      </a:accent2>
+      <a:accent3>
+        <a:srgbClr val="196B24"/>
+      </a:accent3>
+      <a:accent4>
+        <a:srgbClr val="0F9ED5"/>
+      </a:accent4>
+      <a:accent5>
+        <a:srgbClr val="A02B93"/>
+      </a:accent5>
+      <a:accent6>
+        <a:srgbClr val="4EA72E"/>
+      </a:accent6>
+      <a:hlink>
+        <a:srgbClr val="467886"/>
+      </a:hlink>
+      <a:folHlink>
+        <a:srgbClr val="96607D"/>
+      </a:folHlink>
+    </a:clrScheme>
+    <a:fontScheme name="Office">
+      <a:majorFont>
+        <a:latin typeface="Aptos Display" panose="02110004020202020204"/>
+        <a:ea typeface=""/>
+        <a:cs typeface=""/>
+        <a:font script="Jpan" typeface="游ゴシック Light"/>
+        <a:font script="Hang" typeface="맑은 고딕"/>
+        <a:font script="Hans" typeface="等线 Light"/>
+        <a:font script="Hant" typeface="新細明體"/>
+        <a:font script="Arab" typeface="Times New Roman"/>
+        <a:font script="Hebr" typeface="Times New Roman"/>
+        <a:font script="Thai" typeface="Angsana New"/>
+        <a:font script="Ethi" typeface="Nyala"/>
+        <a:font script="Beng" typeface="Vrinda"/>
+        <a:font script="Gujr" typeface="Shruti"/>
+        <a:font script="Khmr" typeface="MoolBoran"/>
+        <a:font script="Knda" typeface="Tunga"/>
+        <a:font script="Guru" typeface="Raavi"/>
+        <a:font script="Cans" typeface="Euphemia"/>
+        <a:font script="Cher" typeface="Plantagenet Cherokee"/>
+        <a:font script="Yiii" typeface="Microsoft Yi Baiti"/>
+        <a:font script="Tibt" typeface="Microsoft Himalaya"/>
+        <a:font script="Thaa" typeface="MV Boli"/>
+        <a:font script="Deva" typeface="Mangal"/>
+        <a:font script="Telu" typeface="Gautami"/>
+        <a:font script="Taml" typeface="Latha"/>
+        <a:font script="Syrc" typeface="Estrangelo Edessa"/>
+        <a:font script="Orya" typeface="Kalinga"/>
+        <a:font script="Mlym" typeface="Kartika"/>
+        <a:font script="Laoo" typeface="DokChampa"/>
+        <a:font script="Sinh" typeface="Iskoola Pota"/>
+        <a:font script="Mong" typeface="Mongolian Baiti"/>
+        <a:font script="Viet" typeface="Times New Roman"/>
+        <a:font script="Uigh" typeface="Microsoft Uighur"/>
+        <a:font script="Geor" typeface="Sylfaen"/>
+        <a:font script="Armn" typeface="Arial"/>
+        <a:font script="Bugi" typeface="Leelawadee UI"/>
+        <a:font script="Bopo" typeface="Microsoft JhengHei"/>
+        <a:font script="Java" typeface="Javanese Text"/>
+        <a:font script="Lisu" typeface="Segoe UI"/>
+        <a:font script="Mymr" typeface="Myanmar Text"/>
+        <a:font script="Nkoo" typeface="Ebrima"/>
+        <a:font script="Olck" typeface="Nirmala UI"/>
+        <a:font script="Osma" typeface="Ebrima"/>
+        <a:font script="Phag" typeface="Phagspa"/>
+        <a:font script="Syrn" typeface="Estrangelo Edessa"/>
+        <a:font script="Syrj" typeface="Estrangelo Edessa"/>
+        <a:font script="Syre" typeface="Estrangelo Edessa"/>
+        <a:font script="Sora" typeface="Nirmala UI"/>
+        <a:font script="Tale" typeface="Microsoft Tai Le"/>
+        <a:font script="Talu" typeface="Microsoft New Tai Lue"/>
+        <a:font script="Tfng" typeface="Ebrima"/>
+      </a:majorFont>
+      <a:minorFont>
+        <a:latin typeface="Aptos" panose="02110004020202020204"/>
+        <a:ea typeface=""/>
+        <a:cs typeface=""/>
+        <a:font script="Jpan" typeface="游ゴシック"/>
+        <a:font script="Hang" typeface="맑은 고딕"/>
+        <a:font script="Hans" typeface="等线"/>
+        <a:font script="Hant" typeface="新細明體"/>
+        <a:font script="Arab" typeface="Arial"/>
+        <a:font script="Hebr" typeface="Arial"/>
+        <a:font script="Thai" typeface="Cordia New"/>
+        <a:font script="Ethi" typeface="Nyala"/>
+        <a:font script="Beng" typeface="Vrinda"/>
+        <a:font script="Gujr" typeface="Shruti"/>
+        <a:font script="Khmr" typeface="DaunPenh"/>
+        <a:font script="Knda" typeface="Tunga"/>
+        <a:font script="Guru" typeface="Raavi"/>
+        <a:font script="Cans" typeface="Euphemia"/>
+        <a:font script="Cher" typeface="Plantagenet Cherokee"/>
+        <a:font script="Yiii" typeface="Microsoft Yi Baiti"/>
+        <a:font script="Tibt" typeface="Microsoft Himalaya"/>
+        <a:font script="Thaa" typeface="MV Boli"/>
+        <a:font script="Deva" typeface="Mangal"/>
+        <a:font script="Telu" typeface="Gautami"/>
+        <a:font script="Taml" typeface="Latha"/>
+        <a:font script="Syrc" typeface="Estrangelo Edessa"/>
+        <a:font script="Orya" typeface="Kalinga"/>
+        <a:font script="Mlym" typeface="Kartika"/>
+        <a:font script="Laoo" typeface="DokChampa"/>
+        <a:font script="Sinh" typeface="Iskoola Pota"/>
+        <a:font script="Mong" typeface="Mongolian Baiti"/>
+        <a:font script="Viet" typeface="Arial"/>
+        <a:font script="Uigh" typeface="Microsoft Uighur"/>
+        <a:font script="Geor" typeface="Sylfaen"/>
+        <a:font script="Armn" typeface="Arial"/>
+        <a:font script="Bugi" typeface="Leelawadee UI"/>
+        <a:font script="Bopo" typeface="Microsoft JhengHei"/>
+        <a:font script="Java" typeface="Javanese Text"/>
+        <a:font script="Lisu" typeface="Segoe UI"/>
+        <a:font script="Mymr" typeface="Myanmar Text"/>
+        <a:font script="Nkoo" typeface="Ebrima"/>
+        <a:font script="Olck" typeface="Nirmala UI"/>
+        <a:font script="Osma" typeface="Ebrima"/>
+        <a:font script="Phag" typeface="Phagspa"/>
+        <a:font script="Syrn" typeface="Estrangelo Edessa"/>
+        <a:font script="Syrj" typeface="Estrangelo Edessa"/>
+        <a:font script="Syre" typeface="Estrangelo Edessa"/>
+        <a:font script="Sora" typeface="Nirmala UI"/>
+        <a:font script="Tale" typeface="Microsoft Tai Le"/>
+        <a:font script="Talu" typeface="Microsoft New Tai Lue"/>
+        <a:font script="Tfng" typeface="Ebrima"/>
+      </a:minorFont>
+    </a:fontScheme>
+    <a:fmtScheme name="Office">
+      <a:fillStyleLst>
+        <a:solidFill>
+          <a:schemeClr val="phClr"/>
+        </a:solidFill>
+        <a:gradFill rotWithShape="1">
+          <a:gsLst>
+            <a:gs pos="0">
+              <a:schemeClr val="phClr">
+                <a:lumMod val="110000"/>
+                <a:satMod val="105000"/>
+                <a:tint val="67000"/>
+              </a:schemeClr>
+            </a:gs>
+            <a:gs pos="50000">
+              <a:schemeClr val="phClr">
+                <a:lumMod val="105000"/>
+                <a:satMod val="103000"/>
+                <a:tint val="73000"/>
+              </a:schemeClr>
+            </a:gs>
+            <a:gs pos="100000">
+              <a:schemeClr val="phClr">
+                <a:lumMod val="105000"/>
+                <a:satMod val="109000"/>
+                <a:tint val="81000"/>
+              </a:schemeClr>
+            </a:gs>
+          </a:gsLst>
+          <a:lin ang="5400000" scaled="0"/>
+        </a:gradFill>
+        <a:gradFill rotWithShape="1">
+          <a:gsLst>
+            <a:gs pos="0">
+              <a:schemeClr val="phClr">
+                <a:satMod val="103000"/>
+                <a:lumMod val="102000"/>
+                <a:tint val="94000"/>
+              </a:schemeClr>
+            </a:gs>
+            <a:gs pos="50000">
+              <a:schemeClr val="phClr">
+                <a:satMod val="110000"/>
+                <a:lumMod val="100000"/>
+                <a:shade val="100000"/>
+              </a:schemeClr>
+            </a:gs>
+            <a:gs pos="100000">
+              <a:schemeClr val="phClr">
+                <a:lumMod val="99000"/>
+                <a:satMod val="120000"/>
+                <a:shade val="78000"/>
+              </a:schemeClr>
+            </a:gs>
+          </a:gsLst>
+          <a:lin ang="5400000" scaled="0"/>
+        </a:gradFill>
+      </a:fillStyleLst>
+      <a:lnStyleLst>
+        <a:ln w="12700" cap="flat" cmpd="sng" algn="ctr">
+          <a:solidFill>
+            <a:schemeClr val="phClr"/>
+          </a:solidFill>
+          <a:prstDash val="solid"/>
+          <a:miter lim="800000"/>
+        </a:ln>
+        <a:ln w="19050" cap="flat" cmpd="sng" algn="ctr">
+          <a:solidFill>
+            <a:schemeClr val="phClr"/>
+          </a:solidFill>
+          <a:prstDash val="solid"/>
+          <a:miter lim="800000"/>
+        </a:ln>
+        <a:ln w="25400" cap="flat" cmpd="sng" algn="ctr">
+          <a:solidFill>
+            <a:schemeClr val="phClr"/>
+          </a:solidFill>
+          <a:prstDash val="solid"/>
+          <a:miter lim="800000"/>
+        </a:ln>
+      </a:lnStyleLst>
+      <a:effectStyleLst>
+        <a:effectStyle>
+          <a:effectLst/>
+        </a:effectStyle>
+        <a:effectStyle>
+          <a:effectLst/>
+        </a:effectStyle>
+        <a:effectStyle>
+          <a:effectLst>
+            <a:outerShdw blurRad="57150" dist="19050" dir="5400000" algn="ctr" rotWithShape="0">
+              <a:srgbClr val="000000">
+                <a:alpha val="63000"/>
+              </a:srgbClr>
+            </a:outerShdw>
+          </a:effectLst>
+        </a:effectStyle>
+      </a:effectStyleLst>
+      <a:bgFillStyleLst>
+        <a:solidFill>
+          <a:schemeClr val="phClr"/>
+        </a:solidFill>
+        <a:solidFill>
+          <a:schemeClr val="phClr">
+            <a:tint val="95000"/>
+            <a:satMod val="170000"/>
+          </a:schemeClr>
+        </a:solidFill>
+        <a:gradFill rotWithShape="1">
+          <a:gsLst>
+            <a:gs pos="0">
+              <a:schemeClr val="phClr">
+                <a:tint val="93000"/>
+                <a:satMod val="150000"/>
+                <a:shade val="98000"/>
+                <a:lumMod val="102000"/>
+              </a:schemeClr>
+            </a:gs>
+            <a:gs pos="50000">
+              <a:schemeClr val="phClr">
+                <a:tint val="98000"/>
+                <a:satMod val="130000"/>
+                <a:shade val="90000"/>
+                <a:lumMod val="103000"/>
+              </a:schemeClr>
+            </a:gs>
+            <a:gs pos="100000">
+              <a:schemeClr val="phClr">
+                <a:shade val="63000"/>
+                <a:satMod val="120000"/>
+              </a:schemeClr>
+            </a:gs>
+          </a:gsLst>
+          <a:lin ang="5400000" scaled="0"/>
+        </a:gradFill>
+      </a:bgFillStyleLst>
+    </a:fmtScheme>
+  </a:themeElements>
+  <a:objectDefaults>
+    <a:lnDef>
+      <a:spPr/>
+      <a:bodyPr/>
+      <a:lstStyle/>
+      <a:style>
+        <a:lnRef idx="2">
+          <a:schemeClr val="accent1"/>
+        </a:lnRef>
+        <a:fillRef idx="0">
+          <a:schemeClr val="accent1"/>
+        </a:fillRef>
+        <a:effectRef idx="1">
+          <a:schemeClr val="accent1"/>
+        </a:effectRef>
+        <a:fontRef idx="minor">
+          <a:schemeClr val="tx1"/>
+        </a:fontRef>
+      </a:style>
+    </a:lnDef>
+  </a:objectDefaults>
+  <a:extraClrSchemeLst/>
+  <a:extLst>
+    <a:ext uri="{05A4C25C-085E-4340-85A3-A5531E510DB2}">
+      <thm15:themeFamily xmlns:thm15="http://schemas.microsoft.com/office/thememl/2012/main" name="Office Theme" id="{2E142A2C-CD16-42D6-873A-C26D2A0506FA}" vid="{1BDDFF52-6CD6-40A5-AB3C-68EB2F1E4D0A}"/>
+    </a:ext>
+  </a:extLst>
+</a:theme>
 </file>